--- a/docs/Oblig-Introduction-Deck.pptx
+++ b/docs/Oblig-Introduction-Deck.pptx
@@ -1782,9 +1782,111 @@
           </a:prstGeom>
         </p:spPr>
       </p:pic>
-      <p:sp>
-        <p:nvSpPr>
-          <p:cNvPr id="3" name="Text 0"/>
+      <p:pic>
+        <p:nvPicPr>
+          <p:cNvPr id="3" name="Image 1" descr="/home/workdir/artifacts/oblig/public/oblig-icon.png">    </p:cNvPr>
+          <p:cNvPicPr>
+            <a:picLocks noChangeAspect="1"/>
+          </p:cNvPicPr>
+          <p:nvPr/>
+        </p:nvPicPr>
+        <p:blipFill>
+          <a:blip r:embed="rId2"/>
+          <a:stretch>
+            <a:fillRect/>
+          </a:stretch>
+        </p:blipFill>
+        <p:spPr>
+          <a:xfrm>
+            <a:off x="8275320" y="201168"/>
+            <a:ext cx="438912" cy="475488"/>
+          </a:xfrm>
+          <a:prstGeom prst="rect">
+            <a:avLst/>
+          </a:prstGeom>
+        </p:spPr>
+      </p:pic>
+      <p:sp>
+        <p:nvSpPr>
+          <p:cNvPr id="4" name="Text 0"/>
+          <p:cNvSpPr/>
+          <p:nvPr/>
+        </p:nvSpPr>
+        <p:spPr>
+          <a:xfrm>
+            <a:off x="457200" y="4709160"/>
+            <a:ext cx="4572000" cy="228600"/>
+          </a:xfrm>
+          <a:prstGeom prst="rect">
+            <a:avLst/>
+          </a:prstGeom>
+          <a:noFill/>
+          <a:ln/>
+        </p:spPr>
+        <p:txBody>
+          <a:bodyPr wrap="square" rtlCol="0" anchor="ctr"/>
+          <a:lstStyle/>
+          <a:p>
+            <a:pPr indent="0" marL="0">
+              <a:buNone/>
+            </a:pPr>
+            <a:r>
+              <a:rPr lang="en-US" sz="1000" dirty="0">
+                <a:solidFill>
+                  <a:srgbClr val="A8C0CC"/>
+                </a:solidFill>
+                <a:latin typeface="Georgia" pitchFamily="34" charset="0"/>
+                <a:ea typeface="Georgia" pitchFamily="34" charset="-122"/>
+                <a:cs typeface="Georgia" pitchFamily="34" charset="-120"/>
+              </a:rPr>
+              <a:t>Oblig  ·  Confidential</a:t>
+            </a:r>
+            <a:endParaRPr lang="en-US" sz="1000" dirty="0"/>
+          </a:p>
+        </p:txBody>
+      </p:sp>
+      <p:sp>
+        <p:nvSpPr>
+          <p:cNvPr id="5" name="Text 1"/>
+          <p:cNvSpPr/>
+          <p:nvPr/>
+        </p:nvSpPr>
+        <p:spPr>
+          <a:xfrm>
+            <a:off x="7772400" y="4709160"/>
+            <a:ext cx="914400" cy="228600"/>
+          </a:xfrm>
+          <a:prstGeom prst="rect">
+            <a:avLst/>
+          </a:prstGeom>
+          <a:noFill/>
+          <a:ln/>
+        </p:spPr>
+        <p:txBody>
+          <a:bodyPr wrap="square" rtlCol="0" anchor="ctr"/>
+          <a:lstStyle/>
+          <a:p>
+            <a:pPr algn="r" indent="0" marL="0">
+              <a:buNone/>
+            </a:pPr>
+            <a:r>
+              <a:rPr lang="en-US" sz="1000" dirty="0">
+                <a:solidFill>
+                  <a:srgbClr val="A8C0CC"/>
+                </a:solidFill>
+                <a:latin typeface="Georgia" pitchFamily="34" charset="0"/>
+                <a:ea typeface="Georgia" pitchFamily="34" charset="-122"/>
+                <a:cs typeface="Georgia" pitchFamily="34" charset="-120"/>
+              </a:rPr>
+              <a:t>1 / 11</a:t>
+            </a:r>
+            <a:endParaRPr lang="en-US" sz="1000" dirty="0"/>
+          </a:p>
+        </p:txBody>
+      </p:sp>
+      <p:sp>
+        <p:nvSpPr>
+          <p:cNvPr id="6" name="Text 2"/>
           <p:cNvSpPr/>
           <p:nvPr/>
         </p:nvSpPr>
@@ -1811,9 +1913,9 @@
                 <a:solidFill>
                   <a:srgbClr val="E11D48"/>
                 </a:solidFill>
-                <a:latin typeface="Calibri" pitchFamily="34" charset="0"/>
-                <a:ea typeface="Calibri" pitchFamily="34" charset="-122"/>
-                <a:cs typeface="Calibri" pitchFamily="34" charset="-120"/>
+                <a:latin typeface="Georgia" pitchFamily="34" charset="0"/>
+                <a:ea typeface="Georgia" pitchFamily="34" charset="-122"/>
+                <a:cs typeface="Georgia" pitchFamily="34" charset="-120"/>
               </a:rPr>
               <a:t>OBLIG</a:t>
             </a:r>
@@ -1823,7 +1925,7 @@
       </p:sp>
       <p:sp>
         <p:nvSpPr>
-          <p:cNvPr id="4" name="Text 1"/>
+          <p:cNvPr id="7" name="Text 3"/>
           <p:cNvSpPr/>
           <p:nvPr/>
         </p:nvSpPr>
@@ -1846,23 +1948,23 @@
               <a:buNone/>
             </a:pPr>
             <a:r>
-              <a:rPr lang="en-US" sz="3600" b="1" dirty="0">
+              <a:rPr lang="en-US" sz="3400" b="1" dirty="0">
                 <a:solidFill>
                   <a:srgbClr val="F3F7F9"/>
                 </a:solidFill>
-                <a:latin typeface="Calibri" pitchFamily="34" charset="0"/>
-                <a:ea typeface="Calibri" pitchFamily="34" charset="-122"/>
-                <a:cs typeface="Calibri" pitchFamily="34" charset="-120"/>
+                <a:latin typeface="Georgia" pitchFamily="34" charset="0"/>
+                <a:ea typeface="Georgia" pitchFamily="34" charset="-122"/>
+                <a:cs typeface="Georgia" pitchFamily="34" charset="-120"/>
               </a:rPr>
               <a:t>Tech governance for APAC fintechs</a:t>
             </a:r>
-            <a:endParaRPr lang="en-US" sz="3600" dirty="0"/>
-          </a:p>
-        </p:txBody>
-      </p:sp>
-      <p:sp>
-        <p:nvSpPr>
-          <p:cNvPr id="5" name="Text 2"/>
+            <a:endParaRPr lang="en-US" sz="3400" dirty="0"/>
+          </a:p>
+        </p:txBody>
+      </p:sp>
+      <p:sp>
+        <p:nvSpPr>
+          <p:cNvPr id="8" name="Text 4"/>
           <p:cNvSpPr/>
           <p:nvPr/>
         </p:nvSpPr>
@@ -1885,23 +1987,23 @@
               <a:buNone/>
             </a:pPr>
             <a:r>
-              <a:rPr lang="en-US" sz="1600" dirty="0">
+              <a:rPr lang="en-US" sz="1500" dirty="0">
                 <a:solidFill>
                   <a:srgbClr val="B8D4E3"/>
                 </a:solidFill>
-                <a:latin typeface="Calibri" pitchFamily="34" charset="0"/>
-                <a:ea typeface="Calibri" pitchFamily="34" charset="-122"/>
-                <a:cs typeface="Calibri" pitchFamily="34" charset="-120"/>
+                <a:latin typeface="Georgia" pitchFamily="34" charset="0"/>
+                <a:ea typeface="Georgia" pitchFamily="34" charset="-122"/>
+                <a:cs typeface="Georgia" pitchFamily="34" charset="-120"/>
               </a:rPr>
               <a:t>Measure technology, data, and AI posture — for leadership clarity and for selling into regulated FIs.</a:t>
             </a:r>
-            <a:endParaRPr lang="en-US" sz="1600" dirty="0"/>
-          </a:p>
-        </p:txBody>
-      </p:sp>
-      <p:sp>
-        <p:nvSpPr>
-          <p:cNvPr id="6" name="Text 3"/>
+            <a:endParaRPr lang="en-US" sz="1500" dirty="0"/>
+          </a:p>
+        </p:txBody>
+      </p:sp>
+      <p:sp>
+        <p:nvSpPr>
+          <p:cNvPr id="9" name="Text 5"/>
           <p:cNvSpPr/>
           <p:nvPr/>
         </p:nvSpPr>
@@ -1928,91 +2030,13 @@
                 <a:solidFill>
                   <a:srgbClr val="A8C0CC"/>
                 </a:solidFill>
-                <a:latin typeface="Calibri" pitchFamily="34" charset="0"/>
-                <a:ea typeface="Calibri" pitchFamily="34" charset="-122"/>
-                <a:cs typeface="Calibri" pitchFamily="34" charset="-120"/>
+                <a:latin typeface="Georgia" pitchFamily="34" charset="0"/>
+                <a:ea typeface="Georgia" pitchFamily="34" charset="-122"/>
+                <a:cs typeface="Georgia" pitchFamily="34" charset="-120"/>
               </a:rPr>
               <a:t>Introduction for customers  ·  partners  ·  investors</a:t>
             </a:r>
             <a:endParaRPr lang="en-US" sz="1300" dirty="0"/>
-          </a:p>
-        </p:txBody>
-      </p:sp>
-      <p:sp>
-        <p:nvSpPr>
-          <p:cNvPr id="7" name="Text 4"/>
-          <p:cNvSpPr/>
-          <p:nvPr/>
-        </p:nvSpPr>
-        <p:spPr>
-          <a:xfrm>
-            <a:off x="457200" y="4709160"/>
-            <a:ext cx="4572000" cy="228600"/>
-          </a:xfrm>
-          <a:prstGeom prst="rect">
-            <a:avLst/>
-          </a:prstGeom>
-          <a:noFill/>
-          <a:ln/>
-        </p:spPr>
-        <p:txBody>
-          <a:bodyPr wrap="square" rtlCol="0" anchor="ctr"/>
-          <a:lstStyle/>
-          <a:p>
-            <a:pPr indent="0" marL="0">
-              <a:buNone/>
-            </a:pPr>
-            <a:r>
-              <a:rPr lang="en-US" sz="1000" dirty="0">
-                <a:solidFill>
-                  <a:srgbClr val="A8C0CC"/>
-                </a:solidFill>
-                <a:latin typeface="Calibri" pitchFamily="34" charset="0"/>
-                <a:ea typeface="Calibri" pitchFamily="34" charset="-122"/>
-                <a:cs typeface="Calibri" pitchFamily="34" charset="-120"/>
-              </a:rPr>
-              <a:t>Oblig  ·  Confidential</a:t>
-            </a:r>
-            <a:endParaRPr lang="en-US" sz="1000" dirty="0"/>
-          </a:p>
-        </p:txBody>
-      </p:sp>
-      <p:sp>
-        <p:nvSpPr>
-          <p:cNvPr id="8" name="Text 5"/>
-          <p:cNvSpPr/>
-          <p:nvPr/>
-        </p:nvSpPr>
-        <p:spPr>
-          <a:xfrm>
-            <a:off x="7772400" y="4709160"/>
-            <a:ext cx="914400" cy="228600"/>
-          </a:xfrm>
-          <a:prstGeom prst="rect">
-            <a:avLst/>
-          </a:prstGeom>
-          <a:noFill/>
-          <a:ln/>
-        </p:spPr>
-        <p:txBody>
-          <a:bodyPr wrap="square" rtlCol="0" anchor="ctr"/>
-          <a:lstStyle/>
-          <a:p>
-            <a:pPr algn="r" indent="0" marL="0">
-              <a:buNone/>
-            </a:pPr>
-            <a:r>
-              <a:rPr lang="en-US" sz="1000" dirty="0">
-                <a:solidFill>
-                  <a:srgbClr val="A8C0CC"/>
-                </a:solidFill>
-                <a:latin typeface="Calibri" pitchFamily="34" charset="0"/>
-                <a:ea typeface="Calibri" pitchFamily="34" charset="-122"/>
-                <a:cs typeface="Calibri" pitchFamily="34" charset="-120"/>
-              </a:rPr>
-              <a:t>1 / 11</a:t>
-            </a:r>
-            <a:endParaRPr lang="en-US" sz="1000" dirty="0"/>
           </a:p>
         </p:txBody>
       </p:sp>
@@ -2065,16 +2089,118 @@
           </a:prstGeom>
         </p:spPr>
       </p:pic>
-      <p:sp>
-        <p:nvSpPr>
-          <p:cNvPr id="3" name="Text 0"/>
+      <p:pic>
+        <p:nvPicPr>
+          <p:cNvPr id="3" name="Image 1" descr="/home/workdir/artifacts/oblig/public/oblig-icon.png">    </p:cNvPr>
+          <p:cNvPicPr>
+            <a:picLocks noChangeAspect="1"/>
+          </p:cNvPicPr>
+          <p:nvPr/>
+        </p:nvPicPr>
+        <p:blipFill>
+          <a:blip r:embed="rId2"/>
+          <a:stretch>
+            <a:fillRect/>
+          </a:stretch>
+        </p:blipFill>
+        <p:spPr>
+          <a:xfrm>
+            <a:off x="8275320" y="201168"/>
+            <a:ext cx="438912" cy="475488"/>
+          </a:xfrm>
+          <a:prstGeom prst="rect">
+            <a:avLst/>
+          </a:prstGeom>
+        </p:spPr>
+      </p:pic>
+      <p:sp>
+        <p:nvSpPr>
+          <p:cNvPr id="4" name="Text 0"/>
+          <p:cNvSpPr/>
+          <p:nvPr/>
+        </p:nvSpPr>
+        <p:spPr>
+          <a:xfrm>
+            <a:off x="457200" y="4709160"/>
+            <a:ext cx="4572000" cy="228600"/>
+          </a:xfrm>
+          <a:prstGeom prst="rect">
+            <a:avLst/>
+          </a:prstGeom>
+          <a:noFill/>
+          <a:ln/>
+        </p:spPr>
+        <p:txBody>
+          <a:bodyPr wrap="square" rtlCol="0" anchor="ctr"/>
+          <a:lstStyle/>
+          <a:p>
+            <a:pPr indent="0" marL="0">
+              <a:buNone/>
+            </a:pPr>
+            <a:r>
+              <a:rPr lang="en-US" sz="1000" dirty="0">
+                <a:solidFill>
+                  <a:srgbClr val="A8C0CC"/>
+                </a:solidFill>
+                <a:latin typeface="Georgia" pitchFamily="34" charset="0"/>
+                <a:ea typeface="Georgia" pitchFamily="34" charset="-122"/>
+                <a:cs typeface="Georgia" pitchFamily="34" charset="-120"/>
+              </a:rPr>
+              <a:t>Oblig  ·  Confidential</a:t>
+            </a:r>
+            <a:endParaRPr lang="en-US" sz="1000" dirty="0"/>
+          </a:p>
+        </p:txBody>
+      </p:sp>
+      <p:sp>
+        <p:nvSpPr>
+          <p:cNvPr id="5" name="Text 1"/>
+          <p:cNvSpPr/>
+          <p:nvPr/>
+        </p:nvSpPr>
+        <p:spPr>
+          <a:xfrm>
+            <a:off x="7772400" y="4709160"/>
+            <a:ext cx="914400" cy="228600"/>
+          </a:xfrm>
+          <a:prstGeom prst="rect">
+            <a:avLst/>
+          </a:prstGeom>
+          <a:noFill/>
+          <a:ln/>
+        </p:spPr>
+        <p:txBody>
+          <a:bodyPr wrap="square" rtlCol="0" anchor="ctr"/>
+          <a:lstStyle/>
+          <a:p>
+            <a:pPr algn="r" indent="0" marL="0">
+              <a:buNone/>
+            </a:pPr>
+            <a:r>
+              <a:rPr lang="en-US" sz="1000" dirty="0">
+                <a:solidFill>
+                  <a:srgbClr val="A8C0CC"/>
+                </a:solidFill>
+                <a:latin typeface="Georgia" pitchFamily="34" charset="0"/>
+                <a:ea typeface="Georgia" pitchFamily="34" charset="-122"/>
+                <a:cs typeface="Georgia" pitchFamily="34" charset="-120"/>
+              </a:rPr>
+              <a:t>10 / 11</a:t>
+            </a:r>
+            <a:endParaRPr lang="en-US" sz="1000" dirty="0"/>
+          </a:p>
+        </p:txBody>
+      </p:sp>
+      <p:sp>
+        <p:nvSpPr>
+          <p:cNvPr id="6" name="Text 2"/>
           <p:cNvSpPr/>
           <p:nvPr/>
         </p:nvSpPr>
         <p:spPr>
           <a:xfrm>
             <a:off x="548640" y="320040"/>
-            <a:ext cx="8229600" cy="274320"/>
+            <a:ext cx="7498080" cy="274320"/>
           </a:xfrm>
           <a:prstGeom prst="rect">
             <a:avLst/>
@@ -2094,9 +2220,9 @@
                 <a:solidFill>
                   <a:srgbClr val="E11D48"/>
                 </a:solidFill>
-                <a:latin typeface="Calibri" pitchFamily="34" charset="0"/>
-                <a:ea typeface="Calibri" pitchFamily="34" charset="-122"/>
-                <a:cs typeface="Calibri" pitchFamily="34" charset="-120"/>
+                <a:latin typeface="Georgia" pitchFamily="34" charset="0"/>
+                <a:ea typeface="Georgia" pitchFamily="34" charset="-122"/>
+                <a:cs typeface="Georgia" pitchFamily="34" charset="-120"/>
               </a:rPr>
               <a:t>NEXT STEP</a:t>
             </a:r>
@@ -2106,46 +2232,46 @@
       </p:sp>
       <p:sp>
         <p:nvSpPr>
-          <p:cNvPr id="4" name="Text 1"/>
+          <p:cNvPr id="7" name="Text 3"/>
           <p:cNvSpPr/>
           <p:nvPr/>
         </p:nvSpPr>
         <p:spPr>
           <a:xfrm>
             <a:off x="548640" y="685800"/>
-            <a:ext cx="8229600" cy="457200"/>
-          </a:xfrm>
-          <a:prstGeom prst="rect">
-            <a:avLst/>
-          </a:prstGeom>
-          <a:noFill/>
-          <a:ln/>
-        </p:spPr>
-        <p:txBody>
-          <a:bodyPr wrap="square" rtlCol="0" anchor="ctr"/>
-          <a:lstStyle/>
-          <a:p>
-            <a:pPr indent="0" marL="0">
-              <a:buNone/>
-            </a:pPr>
-            <a:r>
-              <a:rPr lang="en-US" sz="2800" b="1" dirty="0">
+            <a:ext cx="7498080" cy="457200"/>
+          </a:xfrm>
+          <a:prstGeom prst="rect">
+            <a:avLst/>
+          </a:prstGeom>
+          <a:noFill/>
+          <a:ln/>
+        </p:spPr>
+        <p:txBody>
+          <a:bodyPr wrap="square" rtlCol="0" anchor="ctr"/>
+          <a:lstStyle/>
+          <a:p>
+            <a:pPr indent="0" marL="0">
+              <a:buNone/>
+            </a:pPr>
+            <a:r>
+              <a:rPr lang="en-US" sz="2600" b="1" dirty="0">
                 <a:solidFill>
                   <a:srgbClr val="F3F7F9"/>
                 </a:solidFill>
-                <a:latin typeface="Calibri" pitchFamily="34" charset="0"/>
-                <a:ea typeface="Calibri" pitchFamily="34" charset="-122"/>
-                <a:cs typeface="Calibri" pitchFamily="34" charset="-120"/>
+                <a:latin typeface="Georgia" pitchFamily="34" charset="0"/>
+                <a:ea typeface="Georgia" pitchFamily="34" charset="-122"/>
+                <a:cs typeface="Georgia" pitchFamily="34" charset="-120"/>
               </a:rPr>
               <a:t>How we can work together</a:t>
             </a:r>
-            <a:endParaRPr lang="en-US" sz="2800" dirty="0"/>
-          </a:p>
-        </p:txBody>
-      </p:sp>
-      <p:sp>
-        <p:nvSpPr>
-          <p:cNvPr id="5" name="Shape 2"/>
+            <a:endParaRPr lang="en-US" sz="2600" dirty="0"/>
+          </a:p>
+        </p:txBody>
+      </p:sp>
+      <p:sp>
+        <p:nvSpPr>
+          <p:cNvPr id="8" name="Shape 4"/>
           <p:cNvSpPr/>
           <p:nvPr/>
         </p:nvSpPr>
@@ -2169,7 +2295,7 @@
       </p:sp>
       <p:sp>
         <p:nvSpPr>
-          <p:cNvPr id="6" name="Text 3"/>
+          <p:cNvPr id="9" name="Text 5"/>
           <p:cNvSpPr/>
           <p:nvPr/>
         </p:nvSpPr>
@@ -2192,23 +2318,23 @@
               <a:buNone/>
             </a:pPr>
             <a:r>
-              <a:rPr lang="en-US" sz="1600" b="1" dirty="0">
+              <a:rPr lang="en-US" sz="1500" b="1" dirty="0">
                 <a:solidFill>
                   <a:srgbClr val="E11D48"/>
                 </a:solidFill>
-                <a:latin typeface="Calibri" pitchFamily="34" charset="0"/>
-                <a:ea typeface="Calibri" pitchFamily="34" charset="-122"/>
-                <a:cs typeface="Calibri" pitchFamily="34" charset="-120"/>
+                <a:latin typeface="Georgia" pitchFamily="34" charset="0"/>
+                <a:ea typeface="Georgia" pitchFamily="34" charset="-122"/>
+                <a:cs typeface="Georgia" pitchFamily="34" charset="-120"/>
               </a:rPr>
               <a:t>Customers</a:t>
             </a:r>
-            <a:endParaRPr lang="en-US" sz="1600" dirty="0"/>
-          </a:p>
-        </p:txBody>
-      </p:sp>
-      <p:sp>
-        <p:nvSpPr>
-          <p:cNvPr id="7" name="Text 4"/>
+            <a:endParaRPr lang="en-US" sz="1500" dirty="0"/>
+          </a:p>
+        </p:txBody>
+      </p:sp>
+      <p:sp>
+        <p:nvSpPr>
+          <p:cNvPr id="10" name="Text 6"/>
           <p:cNvSpPr/>
           <p:nvPr/>
         </p:nvSpPr>
@@ -2231,23 +2357,23 @@
               <a:buNone/>
             </a:pPr>
             <a:r>
-              <a:rPr lang="en-US" sz="1400" dirty="0">
+              <a:rPr lang="en-US" sz="1300" dirty="0">
                 <a:solidFill>
                   <a:srgbClr val="F3F7F9"/>
                 </a:solidFill>
-                <a:latin typeface="Calibri" pitchFamily="34" charset="0"/>
-                <a:ea typeface="Calibri" pitchFamily="34" charset="-122"/>
-                <a:cs typeface="Calibri" pitchFamily="34" charset="-120"/>
+                <a:latin typeface="Georgia" pitchFamily="34" charset="0"/>
+                <a:ea typeface="Georgia" pitchFamily="34" charset="-122"/>
+                <a:cs typeface="Georgia" pitchFamily="34" charset="-120"/>
               </a:rPr>
               <a:t>Run the free assessment. Optional guided pilot for one target FI market.</a:t>
             </a:r>
-            <a:endParaRPr lang="en-US" sz="1400" dirty="0"/>
-          </a:p>
-        </p:txBody>
-      </p:sp>
-      <p:sp>
-        <p:nvSpPr>
-          <p:cNvPr id="8" name="Shape 5"/>
+            <a:endParaRPr lang="en-US" sz="1300" dirty="0"/>
+          </a:p>
+        </p:txBody>
+      </p:sp>
+      <p:sp>
+        <p:nvSpPr>
+          <p:cNvPr id="11" name="Shape 7"/>
           <p:cNvSpPr/>
           <p:nvPr/>
         </p:nvSpPr>
@@ -2271,7 +2397,7 @@
       </p:sp>
       <p:sp>
         <p:nvSpPr>
-          <p:cNvPr id="9" name="Text 6"/>
+          <p:cNvPr id="12" name="Text 8"/>
           <p:cNvSpPr/>
           <p:nvPr/>
         </p:nvSpPr>
@@ -2294,23 +2420,23 @@
               <a:buNone/>
             </a:pPr>
             <a:r>
-              <a:rPr lang="en-US" sz="1600" b="1" dirty="0">
+              <a:rPr lang="en-US" sz="1500" b="1" dirty="0">
                 <a:solidFill>
                   <a:srgbClr val="E11D48"/>
                 </a:solidFill>
-                <a:latin typeface="Calibri" pitchFamily="34" charset="0"/>
-                <a:ea typeface="Calibri" pitchFamily="34" charset="-122"/>
-                <a:cs typeface="Calibri" pitchFamily="34" charset="-120"/>
+                <a:latin typeface="Georgia" pitchFamily="34" charset="0"/>
+                <a:ea typeface="Georgia" pitchFamily="34" charset="-122"/>
+                <a:cs typeface="Georgia" pitchFamily="34" charset="-120"/>
               </a:rPr>
               <a:t>Partners</a:t>
             </a:r>
-            <a:endParaRPr lang="en-US" sz="1600" dirty="0"/>
-          </a:p>
-        </p:txBody>
-      </p:sp>
-      <p:sp>
-        <p:nvSpPr>
-          <p:cNvPr id="10" name="Text 7"/>
+            <a:endParaRPr lang="en-US" sz="1500" dirty="0"/>
+          </a:p>
+        </p:txBody>
+      </p:sp>
+      <p:sp>
+        <p:nvSpPr>
+          <p:cNvPr id="13" name="Text 9"/>
           <p:cNvSpPr/>
           <p:nvPr/>
         </p:nvSpPr>
@@ -2333,23 +2459,23 @@
               <a:buNone/>
             </a:pPr>
             <a:r>
-              <a:rPr lang="en-US" sz="1400" dirty="0">
+              <a:rPr lang="en-US" sz="1300" dirty="0">
                 <a:solidFill>
                   <a:srgbClr val="F3F7F9"/>
                 </a:solidFill>
-                <a:latin typeface="Calibri" pitchFamily="34" charset="0"/>
-                <a:ea typeface="Calibri" pitchFamily="34" charset="-122"/>
-                <a:cs typeface="Calibri" pitchFamily="34" charset="-120"/>
+                <a:latin typeface="Georgia" pitchFamily="34" charset="0"/>
+                <a:ea typeface="Georgia" pitchFamily="34" charset="-122"/>
+                <a:cs typeface="Georgia" pitchFamily="34" charset="-120"/>
               </a:rPr>
               <a:t>Joint intro session with a fintech client. Co-branded walkthrough available.</a:t>
             </a:r>
-            <a:endParaRPr lang="en-US" sz="1400" dirty="0"/>
-          </a:p>
-        </p:txBody>
-      </p:sp>
-      <p:sp>
-        <p:nvSpPr>
-          <p:cNvPr id="11" name="Shape 8"/>
+            <a:endParaRPr lang="en-US" sz="1300" dirty="0"/>
+          </a:p>
+        </p:txBody>
+      </p:sp>
+      <p:sp>
+        <p:nvSpPr>
+          <p:cNvPr id="14" name="Shape 10"/>
           <p:cNvSpPr/>
           <p:nvPr/>
         </p:nvSpPr>
@@ -2373,7 +2499,7 @@
       </p:sp>
       <p:sp>
         <p:nvSpPr>
-          <p:cNvPr id="12" name="Text 9"/>
+          <p:cNvPr id="15" name="Text 11"/>
           <p:cNvSpPr/>
           <p:nvPr/>
         </p:nvSpPr>
@@ -2396,23 +2522,23 @@
               <a:buNone/>
             </a:pPr>
             <a:r>
-              <a:rPr lang="en-US" sz="1600" b="1" dirty="0">
+              <a:rPr lang="en-US" sz="1500" b="1" dirty="0">
                 <a:solidFill>
                   <a:srgbClr val="E11D48"/>
                 </a:solidFill>
-                <a:latin typeface="Calibri" pitchFamily="34" charset="0"/>
-                <a:ea typeface="Calibri" pitchFamily="34" charset="-122"/>
-                <a:cs typeface="Calibri" pitchFamily="34" charset="-120"/>
+                <a:latin typeface="Georgia" pitchFamily="34" charset="0"/>
+                <a:ea typeface="Georgia" pitchFamily="34" charset="-122"/>
+                <a:cs typeface="Georgia" pitchFamily="34" charset="-120"/>
               </a:rPr>
               <a:t>Investors</a:t>
             </a:r>
-            <a:endParaRPr lang="en-US" sz="1600" dirty="0"/>
-          </a:p>
-        </p:txBody>
-      </p:sp>
-      <p:sp>
-        <p:nvSpPr>
-          <p:cNvPr id="13" name="Text 10"/>
+            <a:endParaRPr lang="en-US" sz="1500" dirty="0"/>
+          </a:p>
+        </p:txBody>
+      </p:sp>
+      <p:sp>
+        <p:nvSpPr>
+          <p:cNvPr id="16" name="Text 12"/>
           <p:cNvSpPr/>
           <p:nvPr/>
         </p:nvSpPr>
@@ -2435,95 +2561,17 @@
               <a:buNone/>
             </a:pPr>
             <a:r>
-              <a:rPr lang="en-US" sz="1400" dirty="0">
+              <a:rPr lang="en-US" sz="1300" dirty="0">
                 <a:solidFill>
                   <a:srgbClr val="F3F7F9"/>
                 </a:solidFill>
-                <a:latin typeface="Calibri" pitchFamily="34" charset="0"/>
-                <a:ea typeface="Calibri" pitchFamily="34" charset="-122"/>
-                <a:cs typeface="Calibri" pitchFamily="34" charset="-120"/>
+                <a:latin typeface="Georgia" pitchFamily="34" charset="0"/>
+                <a:ea typeface="Georgia" pitchFamily="34" charset="-122"/>
+                <a:cs typeface="Georgia" pitchFamily="34" charset="-120"/>
               </a:rPr>
               <a:t>Design-partner traction first. Conversation welcome once pilots are live.</a:t>
             </a:r>
-            <a:endParaRPr lang="en-US" sz="1400" dirty="0"/>
-          </a:p>
-        </p:txBody>
-      </p:sp>
-      <p:sp>
-        <p:nvSpPr>
-          <p:cNvPr id="14" name="Text 11"/>
-          <p:cNvSpPr/>
-          <p:nvPr/>
-        </p:nvSpPr>
-        <p:spPr>
-          <a:xfrm>
-            <a:off x="457200" y="4709160"/>
-            <a:ext cx="4572000" cy="228600"/>
-          </a:xfrm>
-          <a:prstGeom prst="rect">
-            <a:avLst/>
-          </a:prstGeom>
-          <a:noFill/>
-          <a:ln/>
-        </p:spPr>
-        <p:txBody>
-          <a:bodyPr wrap="square" rtlCol="0" anchor="ctr"/>
-          <a:lstStyle/>
-          <a:p>
-            <a:pPr indent="0" marL="0">
-              <a:buNone/>
-            </a:pPr>
-            <a:r>
-              <a:rPr lang="en-US" sz="1000" dirty="0">
-                <a:solidFill>
-                  <a:srgbClr val="A8C0CC"/>
-                </a:solidFill>
-                <a:latin typeface="Calibri" pitchFamily="34" charset="0"/>
-                <a:ea typeface="Calibri" pitchFamily="34" charset="-122"/>
-                <a:cs typeface="Calibri" pitchFamily="34" charset="-120"/>
-              </a:rPr>
-              <a:t>Oblig  ·  Confidential</a:t>
-            </a:r>
-            <a:endParaRPr lang="en-US" sz="1000" dirty="0"/>
-          </a:p>
-        </p:txBody>
-      </p:sp>
-      <p:sp>
-        <p:nvSpPr>
-          <p:cNvPr id="15" name="Text 12"/>
-          <p:cNvSpPr/>
-          <p:nvPr/>
-        </p:nvSpPr>
-        <p:spPr>
-          <a:xfrm>
-            <a:off x="7772400" y="4709160"/>
-            <a:ext cx="914400" cy="228600"/>
-          </a:xfrm>
-          <a:prstGeom prst="rect">
-            <a:avLst/>
-          </a:prstGeom>
-          <a:noFill/>
-          <a:ln/>
-        </p:spPr>
-        <p:txBody>
-          <a:bodyPr wrap="square" rtlCol="0" anchor="ctr"/>
-          <a:lstStyle/>
-          <a:p>
-            <a:pPr algn="r" indent="0" marL="0">
-              <a:buNone/>
-            </a:pPr>
-            <a:r>
-              <a:rPr lang="en-US" sz="1000" dirty="0">
-                <a:solidFill>
-                  <a:srgbClr val="A8C0CC"/>
-                </a:solidFill>
-                <a:latin typeface="Calibri" pitchFamily="34" charset="0"/>
-                <a:ea typeface="Calibri" pitchFamily="34" charset="-122"/>
-                <a:cs typeface="Calibri" pitchFamily="34" charset="-120"/>
-              </a:rPr>
-              <a:t>10 / 11</a:t>
-            </a:r>
-            <a:endParaRPr lang="en-US" sz="1000" dirty="0"/>
+            <a:endParaRPr lang="en-US" sz="1300" dirty="0"/>
           </a:p>
         </p:txBody>
       </p:sp>
@@ -2576,182 +2624,33 @@
           </a:prstGeom>
         </p:spPr>
       </p:pic>
-      <p:sp>
-        <p:nvSpPr>
-          <p:cNvPr id="3" name="Text 0"/>
-          <p:cNvSpPr/>
-          <p:nvPr/>
-        </p:nvSpPr>
-        <p:spPr>
-          <a:xfrm>
-            <a:off x="548640" y="1463040"/>
-            <a:ext cx="8229600" cy="320040"/>
-          </a:xfrm>
-          <a:prstGeom prst="rect">
-            <a:avLst/>
-          </a:prstGeom>
-          <a:noFill/>
-          <a:ln/>
-        </p:spPr>
-        <p:txBody>
-          <a:bodyPr wrap="square" rtlCol="0" anchor="ctr"/>
-          <a:lstStyle/>
-          <a:p>
-            <a:pPr indent="0" marL="0">
-              <a:buNone/>
-            </a:pPr>
-            <a:r>
-              <a:rPr lang="en-US" sz="1400" b="1" spc="600" kern="0" dirty="0">
-                <a:solidFill>
-                  <a:srgbClr val="E11D48"/>
-                </a:solidFill>
-                <a:latin typeface="Calibri" pitchFamily="34" charset="0"/>
-                <a:ea typeface="Calibri" pitchFamily="34" charset="-122"/>
-                <a:cs typeface="Calibri" pitchFamily="34" charset="-120"/>
-              </a:rPr>
-              <a:t>OBLIG</a:t>
-            </a:r>
-            <a:endParaRPr lang="en-US" sz="1400" dirty="0"/>
-          </a:p>
-        </p:txBody>
-      </p:sp>
-      <p:sp>
-        <p:nvSpPr>
-          <p:cNvPr id="4" name="Text 1"/>
-          <p:cNvSpPr/>
-          <p:nvPr/>
-        </p:nvSpPr>
-        <p:spPr>
-          <a:xfrm>
-            <a:off x="548640" y="1920240"/>
-            <a:ext cx="8229600" cy="1005840"/>
-          </a:xfrm>
-          <a:prstGeom prst="rect">
-            <a:avLst/>
-          </a:prstGeom>
-          <a:noFill/>
-          <a:ln/>
-        </p:spPr>
-        <p:txBody>
-          <a:bodyPr wrap="square" rtlCol="0" anchor="ctr"/>
-          <a:lstStyle/>
-          <a:p>
-            <a:pPr indent="0" marL="0">
-              <a:buNone/>
-            </a:pPr>
-            <a:r>
-              <a:rPr lang="en-US" sz="2800" b="1" dirty="0">
-                <a:solidFill>
-                  <a:srgbClr val="F3F7F9"/>
-                </a:solidFill>
-                <a:latin typeface="Calibri" pitchFamily="34" charset="0"/>
-                <a:ea typeface="Calibri" pitchFamily="34" charset="-122"/>
-                <a:cs typeface="Calibri" pitchFamily="34" charset="-120"/>
-              </a:rPr>
-              <a:t>Know your tech governance posture</a:t>
-            </a:r>
-            <a:endParaRPr lang="en-US" sz="2800" dirty="0"/>
-          </a:p>
-          <a:p>
-            <a:pPr indent="0" marL="0">
-              <a:buNone/>
-            </a:pPr>
-            <a:r>
-              <a:rPr lang="en-US" sz="2800" b="1" dirty="0">
-                <a:solidFill>
-                  <a:srgbClr val="F3F7F9"/>
-                </a:solidFill>
-                <a:latin typeface="Calibri" pitchFamily="34" charset="0"/>
-                <a:ea typeface="Calibri" pitchFamily="34" charset="-122"/>
-                <a:cs typeface="Calibri" pitchFamily="34" charset="-120"/>
-              </a:rPr>
-              <a:t>before the gap costs you.</a:t>
-            </a:r>
-            <a:endParaRPr lang="en-US" sz="2800" dirty="0"/>
-          </a:p>
-        </p:txBody>
-      </p:sp>
-      <p:sp>
-        <p:nvSpPr>
-          <p:cNvPr id="5" name="Text 2"/>
-          <p:cNvSpPr/>
-          <p:nvPr/>
-        </p:nvSpPr>
-        <p:spPr>
-          <a:xfrm>
-            <a:off x="548640" y="3200400"/>
-            <a:ext cx="8229600" cy="365760"/>
-          </a:xfrm>
-          <a:prstGeom prst="rect">
-            <a:avLst/>
-          </a:prstGeom>
-          <a:noFill/>
-          <a:ln/>
-        </p:spPr>
-        <p:txBody>
-          <a:bodyPr wrap="square" rtlCol="0" anchor="ctr"/>
-          <a:lstStyle/>
-          <a:p>
-            <a:pPr indent="0" marL="0">
-              <a:buNone/>
-            </a:pPr>
-            <a:r>
-              <a:rPr lang="en-US" sz="1800" dirty="0">
-                <a:solidFill>
-                  <a:srgbClr val="B8D4E3"/>
-                </a:solidFill>
-                <a:latin typeface="Calibri" pitchFamily="34" charset="0"/>
-                <a:ea typeface="Calibri" pitchFamily="34" charset="-122"/>
-                <a:cs typeface="Calibri" pitchFamily="34" charset="-120"/>
-              </a:rPr>
-              <a:t>oblig.vercel.app</a:t>
-            </a:r>
-            <a:endParaRPr lang="en-US" sz="1800" dirty="0"/>
-          </a:p>
-        </p:txBody>
-      </p:sp>
-      <p:sp>
-        <p:nvSpPr>
-          <p:cNvPr id="6" name="Text 3"/>
-          <p:cNvSpPr/>
-          <p:nvPr/>
-        </p:nvSpPr>
-        <p:spPr>
-          <a:xfrm>
-            <a:off x="548640" y="4114800"/>
-            <a:ext cx="8229600" cy="274320"/>
-          </a:xfrm>
-          <a:prstGeom prst="rect">
-            <a:avLst/>
-          </a:prstGeom>
-          <a:noFill/>
-          <a:ln/>
-        </p:spPr>
-        <p:txBody>
-          <a:bodyPr wrap="square" rtlCol="0" anchor="ctr"/>
-          <a:lstStyle/>
-          <a:p>
-            <a:pPr indent="0" marL="0">
-              <a:buNone/>
-            </a:pPr>
-            <a:r>
-              <a:rPr lang="en-US" sz="1100" dirty="0">
-                <a:solidFill>
-                  <a:srgbClr val="A8C0CC"/>
-                </a:solidFill>
-                <a:latin typeface="Calibri" pitchFamily="34" charset="0"/>
-                <a:ea typeface="Calibri" pitchFamily="34" charset="-122"/>
-                <a:cs typeface="Calibri" pitchFamily="34" charset="-120"/>
-              </a:rPr>
-              <a:t>Not legal or regulatory advice. Framework mappings are informational.</a:t>
-            </a:r>
-            <a:endParaRPr lang="en-US" sz="1100" dirty="0"/>
-          </a:p>
-        </p:txBody>
-      </p:sp>
-      <p:sp>
-        <p:nvSpPr>
-          <p:cNvPr id="7" name="Text 4"/>
+      <p:pic>
+        <p:nvPicPr>
+          <p:cNvPr id="3" name="Image 1" descr="/home/workdir/artifacts/oblig/public/oblig-icon.png">    </p:cNvPr>
+          <p:cNvPicPr>
+            <a:picLocks noChangeAspect="1"/>
+          </p:cNvPicPr>
+          <p:nvPr/>
+        </p:nvPicPr>
+        <p:blipFill>
+          <a:blip r:embed="rId2"/>
+          <a:stretch>
+            <a:fillRect/>
+          </a:stretch>
+        </p:blipFill>
+        <p:spPr>
+          <a:xfrm>
+            <a:off x="8275320" y="201168"/>
+            <a:ext cx="438912" cy="475488"/>
+          </a:xfrm>
+          <a:prstGeom prst="rect">
+            <a:avLst/>
+          </a:prstGeom>
+        </p:spPr>
+      </p:pic>
+      <p:sp>
+        <p:nvSpPr>
+          <p:cNvPr id="4" name="Text 0"/>
           <p:cNvSpPr/>
           <p:nvPr/>
         </p:nvSpPr>
@@ -2778,9 +2677,9 @@
                 <a:solidFill>
                   <a:srgbClr val="A8C0CC"/>
                 </a:solidFill>
-                <a:latin typeface="Calibri" pitchFamily="34" charset="0"/>
-                <a:ea typeface="Calibri" pitchFamily="34" charset="-122"/>
-                <a:cs typeface="Calibri" pitchFamily="34" charset="-120"/>
+                <a:latin typeface="Georgia" pitchFamily="34" charset="0"/>
+                <a:ea typeface="Georgia" pitchFamily="34" charset="-122"/>
+                <a:cs typeface="Georgia" pitchFamily="34" charset="-120"/>
               </a:rPr>
               <a:t>Oblig  ·  Confidential</a:t>
             </a:r>
@@ -2790,7 +2689,7 @@
       </p:sp>
       <p:sp>
         <p:nvSpPr>
-          <p:cNvPr id="8" name="Text 5"/>
+          <p:cNvPr id="5" name="Text 1"/>
           <p:cNvSpPr/>
           <p:nvPr/>
         </p:nvSpPr>
@@ -2817,13 +2716,186 @@
                 <a:solidFill>
                   <a:srgbClr val="A8C0CC"/>
                 </a:solidFill>
-                <a:latin typeface="Calibri" pitchFamily="34" charset="0"/>
-                <a:ea typeface="Calibri" pitchFamily="34" charset="-122"/>
-                <a:cs typeface="Calibri" pitchFamily="34" charset="-120"/>
+                <a:latin typeface="Georgia" pitchFamily="34" charset="0"/>
+                <a:ea typeface="Georgia" pitchFamily="34" charset="-122"/>
+                <a:cs typeface="Georgia" pitchFamily="34" charset="-120"/>
               </a:rPr>
               <a:t>11 / 11</a:t>
             </a:r>
             <a:endParaRPr lang="en-US" sz="1000" dirty="0"/>
+          </a:p>
+        </p:txBody>
+      </p:sp>
+      <p:sp>
+        <p:nvSpPr>
+          <p:cNvPr id="6" name="Text 2"/>
+          <p:cNvSpPr/>
+          <p:nvPr/>
+        </p:nvSpPr>
+        <p:spPr>
+          <a:xfrm>
+            <a:off x="548640" y="1463040"/>
+            <a:ext cx="7498080" cy="320040"/>
+          </a:xfrm>
+          <a:prstGeom prst="rect">
+            <a:avLst/>
+          </a:prstGeom>
+          <a:noFill/>
+          <a:ln/>
+        </p:spPr>
+        <p:txBody>
+          <a:bodyPr wrap="square" rtlCol="0" anchor="ctr"/>
+          <a:lstStyle/>
+          <a:p>
+            <a:pPr indent="0" marL="0">
+              <a:buNone/>
+            </a:pPr>
+            <a:r>
+              <a:rPr lang="en-US" sz="1400" b="1" spc="600" kern="0" dirty="0">
+                <a:solidFill>
+                  <a:srgbClr val="E11D48"/>
+                </a:solidFill>
+                <a:latin typeface="Georgia" pitchFamily="34" charset="0"/>
+                <a:ea typeface="Georgia" pitchFamily="34" charset="-122"/>
+                <a:cs typeface="Georgia" pitchFamily="34" charset="-120"/>
+              </a:rPr>
+              <a:t>OBLIG</a:t>
+            </a:r>
+            <a:endParaRPr lang="en-US" sz="1400" dirty="0"/>
+          </a:p>
+        </p:txBody>
+      </p:sp>
+      <p:sp>
+        <p:nvSpPr>
+          <p:cNvPr id="7" name="Text 3"/>
+          <p:cNvSpPr/>
+          <p:nvPr/>
+        </p:nvSpPr>
+        <p:spPr>
+          <a:xfrm>
+            <a:off x="548640" y="1920240"/>
+            <a:ext cx="7772400" cy="1005840"/>
+          </a:xfrm>
+          <a:prstGeom prst="rect">
+            <a:avLst/>
+          </a:prstGeom>
+          <a:noFill/>
+          <a:ln/>
+        </p:spPr>
+        <p:txBody>
+          <a:bodyPr wrap="square" rtlCol="0" anchor="ctr"/>
+          <a:lstStyle/>
+          <a:p>
+            <a:pPr indent="0" marL="0">
+              <a:buNone/>
+            </a:pPr>
+            <a:r>
+              <a:rPr lang="en-US" sz="2600" b="1" dirty="0">
+                <a:solidFill>
+                  <a:srgbClr val="F3F7F9"/>
+                </a:solidFill>
+                <a:latin typeface="Georgia" pitchFamily="34" charset="0"/>
+                <a:ea typeface="Georgia" pitchFamily="34" charset="-122"/>
+                <a:cs typeface="Georgia" pitchFamily="34" charset="-120"/>
+              </a:rPr>
+              <a:t>Know your tech governance posture</a:t>
+            </a:r>
+            <a:endParaRPr lang="en-US" sz="2600" dirty="0"/>
+          </a:p>
+          <a:p>
+            <a:pPr indent="0" marL="0">
+              <a:buNone/>
+            </a:pPr>
+            <a:r>
+              <a:rPr lang="en-US" sz="2600" b="1" dirty="0">
+                <a:solidFill>
+                  <a:srgbClr val="F3F7F9"/>
+                </a:solidFill>
+                <a:latin typeface="Georgia" pitchFamily="34" charset="0"/>
+                <a:ea typeface="Georgia" pitchFamily="34" charset="-122"/>
+                <a:cs typeface="Georgia" pitchFamily="34" charset="-120"/>
+              </a:rPr>
+              <a:t>before the gap costs you.</a:t>
+            </a:r>
+            <a:endParaRPr lang="en-US" sz="2600" dirty="0"/>
+          </a:p>
+        </p:txBody>
+      </p:sp>
+      <p:sp>
+        <p:nvSpPr>
+          <p:cNvPr id="8" name="Text 4"/>
+          <p:cNvSpPr/>
+          <p:nvPr/>
+        </p:nvSpPr>
+        <p:spPr>
+          <a:xfrm>
+            <a:off x="548640" y="3200400"/>
+            <a:ext cx="7498080" cy="365760"/>
+          </a:xfrm>
+          <a:prstGeom prst="rect">
+            <a:avLst/>
+          </a:prstGeom>
+          <a:noFill/>
+          <a:ln/>
+        </p:spPr>
+        <p:txBody>
+          <a:bodyPr wrap="square" rtlCol="0" anchor="ctr"/>
+          <a:lstStyle/>
+          <a:p>
+            <a:pPr indent="0" marL="0">
+              <a:buNone/>
+            </a:pPr>
+            <a:r>
+              <a:rPr lang="en-US" sz="1700" dirty="0">
+                <a:solidFill>
+                  <a:srgbClr val="B8D4E3"/>
+                </a:solidFill>
+                <a:latin typeface="Georgia" pitchFamily="34" charset="0"/>
+                <a:ea typeface="Georgia" pitchFamily="34" charset="-122"/>
+                <a:cs typeface="Georgia" pitchFamily="34" charset="-120"/>
+              </a:rPr>
+              <a:t>oblig.vercel.app</a:t>
+            </a:r>
+            <a:endParaRPr lang="en-US" sz="1700" dirty="0"/>
+          </a:p>
+        </p:txBody>
+      </p:sp>
+      <p:sp>
+        <p:nvSpPr>
+          <p:cNvPr id="9" name="Text 5"/>
+          <p:cNvSpPr/>
+          <p:nvPr/>
+        </p:nvSpPr>
+        <p:spPr>
+          <a:xfrm>
+            <a:off x="548640" y="4114800"/>
+            <a:ext cx="7498080" cy="274320"/>
+          </a:xfrm>
+          <a:prstGeom prst="rect">
+            <a:avLst/>
+          </a:prstGeom>
+          <a:noFill/>
+          <a:ln/>
+        </p:spPr>
+        <p:txBody>
+          <a:bodyPr wrap="square" rtlCol="0" anchor="ctr"/>
+          <a:lstStyle/>
+          <a:p>
+            <a:pPr indent="0" marL="0">
+              <a:buNone/>
+            </a:pPr>
+            <a:r>
+              <a:rPr lang="en-US" sz="1100" dirty="0">
+                <a:solidFill>
+                  <a:srgbClr val="A8C0CC"/>
+                </a:solidFill>
+                <a:latin typeface="Georgia" pitchFamily="34" charset="0"/>
+                <a:ea typeface="Georgia" pitchFamily="34" charset="-122"/>
+                <a:cs typeface="Georgia" pitchFamily="34" charset="-120"/>
+              </a:rPr>
+              <a:t>Not legal or regulatory advice. Framework mappings are informational.</a:t>
+            </a:r>
+            <a:endParaRPr lang="en-US" sz="1100" dirty="0"/>
           </a:p>
         </p:txBody>
       </p:sp>
@@ -2876,16 +2948,118 @@
           </a:prstGeom>
         </p:spPr>
       </p:pic>
-      <p:sp>
-        <p:nvSpPr>
-          <p:cNvPr id="3" name="Text 0"/>
+      <p:pic>
+        <p:nvPicPr>
+          <p:cNvPr id="3" name="Image 1" descr="/home/workdir/artifacts/oblig/public/oblig-icon.png">    </p:cNvPr>
+          <p:cNvPicPr>
+            <a:picLocks noChangeAspect="1"/>
+          </p:cNvPicPr>
+          <p:nvPr/>
+        </p:nvPicPr>
+        <p:blipFill>
+          <a:blip r:embed="rId2"/>
+          <a:stretch>
+            <a:fillRect/>
+          </a:stretch>
+        </p:blipFill>
+        <p:spPr>
+          <a:xfrm>
+            <a:off x="8275320" y="201168"/>
+            <a:ext cx="438912" cy="475488"/>
+          </a:xfrm>
+          <a:prstGeom prst="rect">
+            <a:avLst/>
+          </a:prstGeom>
+        </p:spPr>
+      </p:pic>
+      <p:sp>
+        <p:nvSpPr>
+          <p:cNvPr id="4" name="Text 0"/>
+          <p:cNvSpPr/>
+          <p:nvPr/>
+        </p:nvSpPr>
+        <p:spPr>
+          <a:xfrm>
+            <a:off x="457200" y="4709160"/>
+            <a:ext cx="4572000" cy="228600"/>
+          </a:xfrm>
+          <a:prstGeom prst="rect">
+            <a:avLst/>
+          </a:prstGeom>
+          <a:noFill/>
+          <a:ln/>
+        </p:spPr>
+        <p:txBody>
+          <a:bodyPr wrap="square" rtlCol="0" anchor="ctr"/>
+          <a:lstStyle/>
+          <a:p>
+            <a:pPr indent="0" marL="0">
+              <a:buNone/>
+            </a:pPr>
+            <a:r>
+              <a:rPr lang="en-US" sz="1000" dirty="0">
+                <a:solidFill>
+                  <a:srgbClr val="A8C0CC"/>
+                </a:solidFill>
+                <a:latin typeface="Georgia" pitchFamily="34" charset="0"/>
+                <a:ea typeface="Georgia" pitchFamily="34" charset="-122"/>
+                <a:cs typeface="Georgia" pitchFamily="34" charset="-120"/>
+              </a:rPr>
+              <a:t>Oblig  ·  Confidential</a:t>
+            </a:r>
+            <a:endParaRPr lang="en-US" sz="1000" dirty="0"/>
+          </a:p>
+        </p:txBody>
+      </p:sp>
+      <p:sp>
+        <p:nvSpPr>
+          <p:cNvPr id="5" name="Text 1"/>
+          <p:cNvSpPr/>
+          <p:nvPr/>
+        </p:nvSpPr>
+        <p:spPr>
+          <a:xfrm>
+            <a:off x="7772400" y="4709160"/>
+            <a:ext cx="914400" cy="228600"/>
+          </a:xfrm>
+          <a:prstGeom prst="rect">
+            <a:avLst/>
+          </a:prstGeom>
+          <a:noFill/>
+          <a:ln/>
+        </p:spPr>
+        <p:txBody>
+          <a:bodyPr wrap="square" rtlCol="0" anchor="ctr"/>
+          <a:lstStyle/>
+          <a:p>
+            <a:pPr algn="r" indent="0" marL="0">
+              <a:buNone/>
+            </a:pPr>
+            <a:r>
+              <a:rPr lang="en-US" sz="1000" dirty="0">
+                <a:solidFill>
+                  <a:srgbClr val="A8C0CC"/>
+                </a:solidFill>
+                <a:latin typeface="Georgia" pitchFamily="34" charset="0"/>
+                <a:ea typeface="Georgia" pitchFamily="34" charset="-122"/>
+                <a:cs typeface="Georgia" pitchFamily="34" charset="-120"/>
+              </a:rPr>
+              <a:t>2 / 11</a:t>
+            </a:r>
+            <a:endParaRPr lang="en-US" sz="1000" dirty="0"/>
+          </a:p>
+        </p:txBody>
+      </p:sp>
+      <p:sp>
+        <p:nvSpPr>
+          <p:cNvPr id="6" name="Text 2"/>
           <p:cNvSpPr/>
           <p:nvPr/>
         </p:nvSpPr>
         <p:spPr>
           <a:xfrm>
             <a:off x="548640" y="320040"/>
-            <a:ext cx="8229600" cy="274320"/>
+            <a:ext cx="7498080" cy="274320"/>
           </a:xfrm>
           <a:prstGeom prst="rect">
             <a:avLst/>
@@ -2905,9 +3079,9 @@
                 <a:solidFill>
                   <a:srgbClr val="E11D48"/>
                 </a:solidFill>
-                <a:latin typeface="Calibri" pitchFamily="34" charset="0"/>
-                <a:ea typeface="Calibri" pitchFamily="34" charset="-122"/>
-                <a:cs typeface="Calibri" pitchFamily="34" charset="-120"/>
+                <a:latin typeface="Georgia" pitchFamily="34" charset="0"/>
+                <a:ea typeface="Georgia" pitchFamily="34" charset="-122"/>
+                <a:cs typeface="Georgia" pitchFamily="34" charset="-120"/>
               </a:rPr>
               <a:t>THE PROBLEM</a:t>
             </a:r>
@@ -2917,85 +3091,85 @@
       </p:sp>
       <p:sp>
         <p:nvSpPr>
-          <p:cNvPr id="4" name="Text 1"/>
+          <p:cNvPr id="7" name="Text 3"/>
           <p:cNvSpPr/>
           <p:nvPr/>
         </p:nvSpPr>
         <p:spPr>
           <a:xfrm>
             <a:off x="548640" y="685800"/>
-            <a:ext cx="8229600" cy="502920"/>
-          </a:xfrm>
-          <a:prstGeom prst="rect">
-            <a:avLst/>
-          </a:prstGeom>
-          <a:noFill/>
-          <a:ln/>
-        </p:spPr>
-        <p:txBody>
-          <a:bodyPr wrap="square" rtlCol="0" anchor="ctr"/>
-          <a:lstStyle/>
-          <a:p>
-            <a:pPr indent="0" marL="0">
-              <a:buNone/>
-            </a:pPr>
-            <a:r>
-              <a:rPr lang="en-US" sz="2800" b="1" dirty="0">
+            <a:ext cx="7498080" cy="502920"/>
+          </a:xfrm>
+          <a:prstGeom prst="rect">
+            <a:avLst/>
+          </a:prstGeom>
+          <a:noFill/>
+          <a:ln/>
+        </p:spPr>
+        <p:txBody>
+          <a:bodyPr wrap="square" rtlCol="0" anchor="ctr"/>
+          <a:lstStyle/>
+          <a:p>
+            <a:pPr indent="0" marL="0">
+              <a:buNone/>
+            </a:pPr>
+            <a:r>
+              <a:rPr lang="en-US" sz="2600" b="1" dirty="0">
                 <a:solidFill>
                   <a:srgbClr val="F3F7F9"/>
                 </a:solidFill>
-                <a:latin typeface="Calibri" pitchFamily="34" charset="0"/>
-                <a:ea typeface="Calibri" pitchFamily="34" charset="-122"/>
-                <a:cs typeface="Calibri" pitchFamily="34" charset="-120"/>
+                <a:latin typeface="Georgia" pitchFamily="34" charset="0"/>
+                <a:ea typeface="Georgia" pitchFamily="34" charset="-122"/>
+                <a:cs typeface="Georgia" pitchFamily="34" charset="-120"/>
               </a:rPr>
               <a:t>SOC 2 is not the questionnaire</a:t>
             </a:r>
-            <a:endParaRPr lang="en-US" sz="2800" dirty="0"/>
-          </a:p>
-        </p:txBody>
-      </p:sp>
-      <p:sp>
-        <p:nvSpPr>
-          <p:cNvPr id="5" name="Text 2"/>
+            <a:endParaRPr lang="en-US" sz="2600" dirty="0"/>
+          </a:p>
+        </p:txBody>
+      </p:sp>
+      <p:sp>
+        <p:nvSpPr>
+          <p:cNvPr id="8" name="Text 4"/>
           <p:cNvSpPr/>
           <p:nvPr/>
         </p:nvSpPr>
         <p:spPr>
           <a:xfrm>
             <a:off x="548640" y="1325880"/>
-            <a:ext cx="8229600" cy="640080"/>
-          </a:xfrm>
-          <a:prstGeom prst="rect">
-            <a:avLst/>
-          </a:prstGeom>
-          <a:noFill/>
-          <a:ln/>
-        </p:spPr>
-        <p:txBody>
-          <a:bodyPr wrap="square" rtlCol="0" anchor="ctr"/>
-          <a:lstStyle/>
-          <a:p>
-            <a:pPr indent="0" marL="0">
-              <a:buNone/>
-            </a:pPr>
-            <a:r>
-              <a:rPr lang="en-US" sz="1500" dirty="0">
+            <a:ext cx="8046720" cy="640080"/>
+          </a:xfrm>
+          <a:prstGeom prst="rect">
+            <a:avLst/>
+          </a:prstGeom>
+          <a:noFill/>
+          <a:ln/>
+        </p:spPr>
+        <p:txBody>
+          <a:bodyPr wrap="square" rtlCol="0" anchor="ctr"/>
+          <a:lstStyle/>
+          <a:p>
+            <a:pPr indent="0" marL="0">
+              <a:buNone/>
+            </a:pPr>
+            <a:r>
+              <a:rPr lang="en-US" sz="1400" dirty="0">
                 <a:solidFill>
                   <a:srgbClr val="B8D4E3"/>
                 </a:solidFill>
-                <a:latin typeface="Calibri" pitchFamily="34" charset="0"/>
-                <a:ea typeface="Calibri" pitchFamily="34" charset="-122"/>
-                <a:cs typeface="Calibri" pitchFamily="34" charset="-120"/>
+                <a:latin typeface="Georgia" pitchFamily="34" charset="0"/>
+                <a:ea typeface="Georgia" pitchFamily="34" charset="-122"/>
+                <a:cs typeface="Georgia" pitchFamily="34" charset="-120"/>
               </a:rPr>
               <a:t>Banks, insurers, and payment institutions in APAC assess technology vendors against local technology-risk and outsourcing expectations — not a global certificate alone.</a:t>
             </a:r>
-            <a:endParaRPr lang="en-US" sz="1500" dirty="0"/>
-          </a:p>
-        </p:txBody>
-      </p:sp>
-      <p:sp>
-        <p:nvSpPr>
-          <p:cNvPr id="6" name="Shape 3"/>
+            <a:endParaRPr lang="en-US" sz="1400" dirty="0"/>
+          </a:p>
+        </p:txBody>
+      </p:sp>
+      <p:sp>
+        <p:nvSpPr>
+          <p:cNvPr id="9" name="Shape 5"/>
           <p:cNvSpPr/>
           <p:nvPr/>
         </p:nvSpPr>
@@ -3019,7 +3193,7 @@
       </p:sp>
       <p:sp>
         <p:nvSpPr>
-          <p:cNvPr id="7" name="Text 4"/>
+          <p:cNvPr id="10" name="Text 6"/>
           <p:cNvSpPr/>
           <p:nvPr/>
         </p:nvSpPr>
@@ -3042,23 +3216,23 @@
               <a:buNone/>
             </a:pPr>
             <a:r>
-              <a:rPr lang="en-US" sz="1400" b="1" dirty="0">
+              <a:rPr lang="en-US" sz="1300" b="1" dirty="0">
                 <a:solidFill>
                   <a:srgbClr val="E11D48"/>
                 </a:solidFill>
-                <a:latin typeface="Calibri" pitchFamily="34" charset="0"/>
-                <a:ea typeface="Calibri" pitchFamily="34" charset="-122"/>
-                <a:cs typeface="Calibri" pitchFamily="34" charset="-120"/>
+                <a:latin typeface="Georgia" pitchFamily="34" charset="0"/>
+                <a:ea typeface="Georgia" pitchFamily="34" charset="-122"/>
+                <a:cs typeface="Georgia" pitchFamily="34" charset="-120"/>
               </a:rPr>
               <a:t>What buyers ask</a:t>
             </a:r>
-            <a:endParaRPr lang="en-US" sz="1400" dirty="0"/>
-          </a:p>
-        </p:txBody>
-      </p:sp>
-      <p:sp>
-        <p:nvSpPr>
-          <p:cNvPr id="8" name="Text 5"/>
+            <a:endParaRPr lang="en-US" sz="1300" dirty="0"/>
+          </a:p>
+        </p:txBody>
+      </p:sp>
+      <p:sp>
+        <p:nvSpPr>
+          <p:cNvPr id="11" name="Text 7"/>
           <p:cNvSpPr/>
           <p:nvPr/>
         </p:nvSpPr>
@@ -3081,23 +3255,23 @@
               <a:buNone/>
             </a:pPr>
             <a:r>
-              <a:rPr lang="en-US" sz="1300" dirty="0">
+              <a:rPr lang="en-US" sz="1200" dirty="0">
                 <a:solidFill>
                   <a:srgbClr val="F3F7F9"/>
                 </a:solidFill>
-                <a:latin typeface="Calibri" pitchFamily="34" charset="0"/>
-                <a:ea typeface="Calibri" pitchFamily="34" charset="-122"/>
-                <a:cs typeface="Calibri" pitchFamily="34" charset="-120"/>
+                <a:latin typeface="Georgia" pitchFamily="34" charset="0"/>
+                <a:ea typeface="Georgia" pitchFamily="34" charset="-122"/>
+                <a:cs typeface="Georgia" pitchFamily="34" charset="-120"/>
               </a:rPr>
               <a:t>MAS TRM themes, BNM RMiT baselines, data location, subcontractors, incident timers, AI oversight</a:t>
             </a:r>
-            <a:endParaRPr lang="en-US" sz="1300" dirty="0"/>
-          </a:p>
-        </p:txBody>
-      </p:sp>
-      <p:sp>
-        <p:nvSpPr>
-          <p:cNvPr id="9" name="Shape 6"/>
+            <a:endParaRPr lang="en-US" sz="1200" dirty="0"/>
+          </a:p>
+        </p:txBody>
+      </p:sp>
+      <p:sp>
+        <p:nvSpPr>
+          <p:cNvPr id="12" name="Shape 8"/>
           <p:cNvSpPr/>
           <p:nvPr/>
         </p:nvSpPr>
@@ -3121,7 +3295,7 @@
       </p:sp>
       <p:sp>
         <p:nvSpPr>
-          <p:cNvPr id="10" name="Text 7"/>
+          <p:cNvPr id="13" name="Text 9"/>
           <p:cNvSpPr/>
           <p:nvPr/>
         </p:nvSpPr>
@@ -3144,23 +3318,23 @@
               <a:buNone/>
             </a:pPr>
             <a:r>
-              <a:rPr lang="en-US" sz="1400" b="1" dirty="0">
+              <a:rPr lang="en-US" sz="1300" b="1" dirty="0">
                 <a:solidFill>
                   <a:srgbClr val="E11D48"/>
                 </a:solidFill>
-                <a:latin typeface="Calibri" pitchFamily="34" charset="0"/>
-                <a:ea typeface="Calibri" pitchFamily="34" charset="-122"/>
-                <a:cs typeface="Calibri" pitchFamily="34" charset="-120"/>
+                <a:latin typeface="Georgia" pitchFamily="34" charset="0"/>
+                <a:ea typeface="Georgia" pitchFamily="34" charset="-122"/>
+                <a:cs typeface="Georgia" pitchFamily="34" charset="-120"/>
               </a:rPr>
               <a:t>What vendors bring</a:t>
             </a:r>
-            <a:endParaRPr lang="en-US" sz="1400" dirty="0"/>
-          </a:p>
-        </p:txBody>
-      </p:sp>
-      <p:sp>
-        <p:nvSpPr>
-          <p:cNvPr id="11" name="Text 8"/>
+            <a:endParaRPr lang="en-US" sz="1300" dirty="0"/>
+          </a:p>
+        </p:txBody>
+      </p:sp>
+      <p:sp>
+        <p:nvSpPr>
+          <p:cNvPr id="14" name="Text 10"/>
           <p:cNvSpPr/>
           <p:nvPr/>
         </p:nvSpPr>
@@ -3183,23 +3357,23 @@
               <a:buNone/>
             </a:pPr>
             <a:r>
-              <a:rPr lang="en-US" sz="1300" dirty="0">
+              <a:rPr lang="en-US" sz="1200" dirty="0">
                 <a:solidFill>
                   <a:srgbClr val="F3F7F9"/>
                 </a:solidFill>
-                <a:latin typeface="Calibri" pitchFamily="34" charset="0"/>
-                <a:ea typeface="Calibri" pitchFamily="34" charset="-122"/>
-                <a:cs typeface="Calibri" pitchFamily="34" charset="-120"/>
-              </a:rPr>
-              <a:t>ISO 27001 / SOC 2 packs that help — but don’t answer market-specific bars</a:t>
-            </a:r>
-            <a:endParaRPr lang="en-US" sz="1300" dirty="0"/>
-          </a:p>
-        </p:txBody>
-      </p:sp>
-      <p:sp>
-        <p:nvSpPr>
-          <p:cNvPr id="12" name="Shape 9"/>
+                <a:latin typeface="Georgia" pitchFamily="34" charset="0"/>
+                <a:ea typeface="Georgia" pitchFamily="34" charset="-122"/>
+                <a:cs typeface="Georgia" pitchFamily="34" charset="-120"/>
+              </a:rPr>
+              <a:t>ISO 27001 / SOC 2 packs that help — but do not answer market-specific bars</a:t>
+            </a:r>
+            <a:endParaRPr lang="en-US" sz="1200" dirty="0"/>
+          </a:p>
+        </p:txBody>
+      </p:sp>
+      <p:sp>
+        <p:nvSpPr>
+          <p:cNvPr id="15" name="Shape 11"/>
           <p:cNvSpPr/>
           <p:nvPr/>
         </p:nvSpPr>
@@ -3223,7 +3397,7 @@
       </p:sp>
       <p:sp>
         <p:nvSpPr>
-          <p:cNvPr id="13" name="Text 10"/>
+          <p:cNvPr id="16" name="Text 12"/>
           <p:cNvSpPr/>
           <p:nvPr/>
         </p:nvSpPr>
@@ -3246,23 +3420,23 @@
               <a:buNone/>
             </a:pPr>
             <a:r>
-              <a:rPr lang="en-US" sz="1400" b="1" dirty="0">
+              <a:rPr lang="en-US" sz="1300" b="1" dirty="0">
                 <a:solidFill>
                   <a:srgbClr val="E11D48"/>
                 </a:solidFill>
-                <a:latin typeface="Calibri" pitchFamily="34" charset="0"/>
-                <a:ea typeface="Calibri" pitchFamily="34" charset="-122"/>
-                <a:cs typeface="Calibri" pitchFamily="34" charset="-120"/>
+                <a:latin typeface="Georgia" pitchFamily="34" charset="0"/>
+                <a:ea typeface="Georgia" pitchFamily="34" charset="-122"/>
+                <a:cs typeface="Georgia" pitchFamily="34" charset="-120"/>
               </a:rPr>
               <a:t>The cost of the gap</a:t>
             </a:r>
-            <a:endParaRPr lang="en-US" sz="1400" dirty="0"/>
-          </a:p>
-        </p:txBody>
-      </p:sp>
-      <p:sp>
-        <p:nvSpPr>
-          <p:cNvPr id="14" name="Text 11"/>
+            <a:endParaRPr lang="en-US" sz="1300" dirty="0"/>
+          </a:p>
+        </p:txBody>
+      </p:sp>
+      <p:sp>
+        <p:nvSpPr>
+          <p:cNvPr id="17" name="Text 13"/>
           <p:cNvSpPr/>
           <p:nvPr/>
         </p:nvSpPr>
@@ -3285,95 +3459,17 @@
               <a:buNone/>
             </a:pPr>
             <a:r>
-              <a:rPr lang="en-US" sz="1300" dirty="0">
+              <a:rPr lang="en-US" sz="1200" dirty="0">
                 <a:solidFill>
                   <a:srgbClr val="F3F7F9"/>
                 </a:solidFill>
-                <a:latin typeface="Calibri" pitchFamily="34" charset="0"/>
-                <a:ea typeface="Calibri" pitchFamily="34" charset="-122"/>
-                <a:cs typeface="Calibri" pitchFamily="34" charset="-120"/>
+                <a:latin typeface="Georgia" pitchFamily="34" charset="0"/>
+                <a:ea typeface="Georgia" pitchFamily="34" charset="-122"/>
+                <a:cs typeface="Georgia" pitchFamily="34" charset="-120"/>
               </a:rPr>
               <a:t>Slow deals, repeated questionnaires, board conversations without a shared baseline</a:t>
             </a:r>
-            <a:endParaRPr lang="en-US" sz="1300" dirty="0"/>
-          </a:p>
-        </p:txBody>
-      </p:sp>
-      <p:sp>
-        <p:nvSpPr>
-          <p:cNvPr id="15" name="Text 12"/>
-          <p:cNvSpPr/>
-          <p:nvPr/>
-        </p:nvSpPr>
-        <p:spPr>
-          <a:xfrm>
-            <a:off x="457200" y="4709160"/>
-            <a:ext cx="4572000" cy="228600"/>
-          </a:xfrm>
-          <a:prstGeom prst="rect">
-            <a:avLst/>
-          </a:prstGeom>
-          <a:noFill/>
-          <a:ln/>
-        </p:spPr>
-        <p:txBody>
-          <a:bodyPr wrap="square" rtlCol="0" anchor="ctr"/>
-          <a:lstStyle/>
-          <a:p>
-            <a:pPr indent="0" marL="0">
-              <a:buNone/>
-            </a:pPr>
-            <a:r>
-              <a:rPr lang="en-US" sz="1000" dirty="0">
-                <a:solidFill>
-                  <a:srgbClr val="A8C0CC"/>
-                </a:solidFill>
-                <a:latin typeface="Calibri" pitchFamily="34" charset="0"/>
-                <a:ea typeface="Calibri" pitchFamily="34" charset="-122"/>
-                <a:cs typeface="Calibri" pitchFamily="34" charset="-120"/>
-              </a:rPr>
-              <a:t>Oblig  ·  Confidential</a:t>
-            </a:r>
-            <a:endParaRPr lang="en-US" sz="1000" dirty="0"/>
-          </a:p>
-        </p:txBody>
-      </p:sp>
-      <p:sp>
-        <p:nvSpPr>
-          <p:cNvPr id="16" name="Text 13"/>
-          <p:cNvSpPr/>
-          <p:nvPr/>
-        </p:nvSpPr>
-        <p:spPr>
-          <a:xfrm>
-            <a:off x="7772400" y="4709160"/>
-            <a:ext cx="914400" cy="228600"/>
-          </a:xfrm>
-          <a:prstGeom prst="rect">
-            <a:avLst/>
-          </a:prstGeom>
-          <a:noFill/>
-          <a:ln/>
-        </p:spPr>
-        <p:txBody>
-          <a:bodyPr wrap="square" rtlCol="0" anchor="ctr"/>
-          <a:lstStyle/>
-          <a:p>
-            <a:pPr algn="r" indent="0" marL="0">
-              <a:buNone/>
-            </a:pPr>
-            <a:r>
-              <a:rPr lang="en-US" sz="1000" dirty="0">
-                <a:solidFill>
-                  <a:srgbClr val="A8C0CC"/>
-                </a:solidFill>
-                <a:latin typeface="Calibri" pitchFamily="34" charset="0"/>
-                <a:ea typeface="Calibri" pitchFamily="34" charset="-122"/>
-                <a:cs typeface="Calibri" pitchFamily="34" charset="-120"/>
-              </a:rPr>
-              <a:t>2 / 11</a:t>
-            </a:r>
-            <a:endParaRPr lang="en-US" sz="1000" dirty="0"/>
+            <a:endParaRPr lang="en-US" sz="1200" dirty="0"/>
           </a:p>
         </p:txBody>
       </p:sp>
@@ -3426,16 +3522,118 @@
           </a:prstGeom>
         </p:spPr>
       </p:pic>
-      <p:sp>
-        <p:nvSpPr>
-          <p:cNvPr id="3" name="Text 0"/>
+      <p:pic>
+        <p:nvPicPr>
+          <p:cNvPr id="3" name="Image 1" descr="/home/workdir/artifacts/oblig/public/oblig-icon.png">    </p:cNvPr>
+          <p:cNvPicPr>
+            <a:picLocks noChangeAspect="1"/>
+          </p:cNvPicPr>
+          <p:nvPr/>
+        </p:nvPicPr>
+        <p:blipFill>
+          <a:blip r:embed="rId2"/>
+          <a:stretch>
+            <a:fillRect/>
+          </a:stretch>
+        </p:blipFill>
+        <p:spPr>
+          <a:xfrm>
+            <a:off x="8275320" y="201168"/>
+            <a:ext cx="438912" cy="475488"/>
+          </a:xfrm>
+          <a:prstGeom prst="rect">
+            <a:avLst/>
+          </a:prstGeom>
+        </p:spPr>
+      </p:pic>
+      <p:sp>
+        <p:nvSpPr>
+          <p:cNvPr id="4" name="Text 0"/>
+          <p:cNvSpPr/>
+          <p:nvPr/>
+        </p:nvSpPr>
+        <p:spPr>
+          <a:xfrm>
+            <a:off x="457200" y="4709160"/>
+            <a:ext cx="4572000" cy="228600"/>
+          </a:xfrm>
+          <a:prstGeom prst="rect">
+            <a:avLst/>
+          </a:prstGeom>
+          <a:noFill/>
+          <a:ln/>
+        </p:spPr>
+        <p:txBody>
+          <a:bodyPr wrap="square" rtlCol="0" anchor="ctr"/>
+          <a:lstStyle/>
+          <a:p>
+            <a:pPr indent="0" marL="0">
+              <a:buNone/>
+            </a:pPr>
+            <a:r>
+              <a:rPr lang="en-US" sz="1000" dirty="0">
+                <a:solidFill>
+                  <a:srgbClr val="A8C0CC"/>
+                </a:solidFill>
+                <a:latin typeface="Georgia" pitchFamily="34" charset="0"/>
+                <a:ea typeface="Georgia" pitchFamily="34" charset="-122"/>
+                <a:cs typeface="Georgia" pitchFamily="34" charset="-120"/>
+              </a:rPr>
+              <a:t>Oblig  ·  Confidential</a:t>
+            </a:r>
+            <a:endParaRPr lang="en-US" sz="1000" dirty="0"/>
+          </a:p>
+        </p:txBody>
+      </p:sp>
+      <p:sp>
+        <p:nvSpPr>
+          <p:cNvPr id="5" name="Text 1"/>
+          <p:cNvSpPr/>
+          <p:nvPr/>
+        </p:nvSpPr>
+        <p:spPr>
+          <a:xfrm>
+            <a:off x="7772400" y="4709160"/>
+            <a:ext cx="914400" cy="228600"/>
+          </a:xfrm>
+          <a:prstGeom prst="rect">
+            <a:avLst/>
+          </a:prstGeom>
+          <a:noFill/>
+          <a:ln/>
+        </p:spPr>
+        <p:txBody>
+          <a:bodyPr wrap="square" rtlCol="0" anchor="ctr"/>
+          <a:lstStyle/>
+          <a:p>
+            <a:pPr algn="r" indent="0" marL="0">
+              <a:buNone/>
+            </a:pPr>
+            <a:r>
+              <a:rPr lang="en-US" sz="1000" dirty="0">
+                <a:solidFill>
+                  <a:srgbClr val="A8C0CC"/>
+                </a:solidFill>
+                <a:latin typeface="Georgia" pitchFamily="34" charset="0"/>
+                <a:ea typeface="Georgia" pitchFamily="34" charset="-122"/>
+                <a:cs typeface="Georgia" pitchFamily="34" charset="-120"/>
+              </a:rPr>
+              <a:t>3 / 11</a:t>
+            </a:r>
+            <a:endParaRPr lang="en-US" sz="1000" dirty="0"/>
+          </a:p>
+        </p:txBody>
+      </p:sp>
+      <p:sp>
+        <p:nvSpPr>
+          <p:cNvPr id="6" name="Text 2"/>
           <p:cNvSpPr/>
           <p:nvPr/>
         </p:nvSpPr>
         <p:spPr>
           <a:xfrm>
             <a:off x="548640" y="320040"/>
-            <a:ext cx="8229600" cy="274320"/>
+            <a:ext cx="7498080" cy="274320"/>
           </a:xfrm>
           <a:prstGeom prst="rect">
             <a:avLst/>
@@ -3455,11 +3653,11 @@
                 <a:solidFill>
                   <a:srgbClr val="E11D48"/>
                 </a:solidFill>
-                <a:latin typeface="Calibri" pitchFamily="34" charset="0"/>
-                <a:ea typeface="Calibri" pitchFamily="34" charset="-122"/>
-                <a:cs typeface="Calibri" pitchFamily="34" charset="-120"/>
-              </a:rPr>
-              <a:t>WHO IT’S FOR</a:t>
+                <a:latin typeface="Georgia" pitchFamily="34" charset="0"/>
+                <a:ea typeface="Georgia" pitchFamily="34" charset="-122"/>
+                <a:cs typeface="Georgia" pitchFamily="34" charset="-120"/>
+              </a:rPr>
+              <a:t>WHO IT IS FOR</a:t>
             </a:r>
             <a:endParaRPr lang="en-US" sz="1100" dirty="0"/>
           </a:p>
@@ -3467,46 +3665,46 @@
       </p:sp>
       <p:sp>
         <p:nvSpPr>
-          <p:cNvPr id="4" name="Text 1"/>
+          <p:cNvPr id="7" name="Text 3"/>
           <p:cNvSpPr/>
           <p:nvPr/>
         </p:nvSpPr>
         <p:spPr>
           <a:xfrm>
             <a:off x="548640" y="685800"/>
-            <a:ext cx="8229600" cy="457200"/>
-          </a:xfrm>
-          <a:prstGeom prst="rect">
-            <a:avLst/>
-          </a:prstGeom>
-          <a:noFill/>
-          <a:ln/>
-        </p:spPr>
-        <p:txBody>
-          <a:bodyPr wrap="square" rtlCol="0" anchor="ctr"/>
-          <a:lstStyle/>
-          <a:p>
-            <a:pPr indent="0" marL="0">
-              <a:buNone/>
-            </a:pPr>
-            <a:r>
-              <a:rPr lang="en-US" sz="2800" b="1" dirty="0">
+            <a:ext cx="7498080" cy="457200"/>
+          </a:xfrm>
+          <a:prstGeom prst="rect">
+            <a:avLst/>
+          </a:prstGeom>
+          <a:noFill/>
+          <a:ln/>
+        </p:spPr>
+        <p:txBody>
+          <a:bodyPr wrap="square" rtlCol="0" anchor="ctr"/>
+          <a:lstStyle/>
+          <a:p>
+            <a:pPr indent="0" marL="0">
+              <a:buNone/>
+            </a:pPr>
+            <a:r>
+              <a:rPr lang="en-US" sz="2600" b="1" dirty="0">
                 <a:solidFill>
                   <a:srgbClr val="F3F7F9"/>
                 </a:solidFill>
-                <a:latin typeface="Calibri" pitchFamily="34" charset="0"/>
-                <a:ea typeface="Calibri" pitchFamily="34" charset="-122"/>
-                <a:cs typeface="Calibri" pitchFamily="34" charset="-120"/>
+                <a:latin typeface="Georgia" pitchFamily="34" charset="0"/>
+                <a:ea typeface="Georgia" pitchFamily="34" charset="-122"/>
+                <a:cs typeface="Georgia" pitchFamily="34" charset="-120"/>
               </a:rPr>
               <a:t>One platform, two jobs</a:t>
             </a:r>
-            <a:endParaRPr lang="en-US" sz="2800" dirty="0"/>
-          </a:p>
-        </p:txBody>
-      </p:sp>
-      <p:sp>
-        <p:nvSpPr>
-          <p:cNvPr id="5" name="Shape 2"/>
+            <a:endParaRPr lang="en-US" sz="2600" dirty="0"/>
+          </a:p>
+        </p:txBody>
+      </p:sp>
+      <p:sp>
+        <p:nvSpPr>
+          <p:cNvPr id="8" name="Shape 4"/>
           <p:cNvSpPr/>
           <p:nvPr/>
         </p:nvSpPr>
@@ -3530,7 +3728,7 @@
       </p:sp>
       <p:sp>
         <p:nvSpPr>
-          <p:cNvPr id="6" name="Text 3"/>
+          <p:cNvPr id="9" name="Text 5"/>
           <p:cNvSpPr/>
           <p:nvPr/>
         </p:nvSpPr>
@@ -3553,23 +3751,23 @@
               <a:buNone/>
             </a:pPr>
             <a:r>
-              <a:rPr lang="en-US" sz="1800" b="1" dirty="0">
+              <a:rPr lang="en-US" sz="1600" b="1" dirty="0">
                 <a:solidFill>
                   <a:srgbClr val="F3F7F9"/>
                 </a:solidFill>
-                <a:latin typeface="Calibri" pitchFamily="34" charset="0"/>
-                <a:ea typeface="Calibri" pitchFamily="34" charset="-122"/>
-                <a:cs typeface="Calibri" pitchFamily="34" charset="-120"/>
+                <a:latin typeface="Georgia" pitchFamily="34" charset="0"/>
+                <a:ea typeface="Georgia" pitchFamily="34" charset="-122"/>
+                <a:cs typeface="Georgia" pitchFamily="34" charset="-120"/>
               </a:rPr>
               <a:t>Fintechs &amp; tech companies</a:t>
             </a:r>
-            <a:endParaRPr lang="en-US" sz="1800" dirty="0"/>
-          </a:p>
-        </p:txBody>
-      </p:sp>
-      <p:sp>
-        <p:nvSpPr>
-          <p:cNvPr id="7" name="Text 4"/>
+            <a:endParaRPr lang="en-US" sz="1600" dirty="0"/>
+          </a:p>
+        </p:txBody>
+      </p:sp>
+      <p:sp>
+        <p:nvSpPr>
+          <p:cNvPr id="10" name="Text 6"/>
           <p:cNvSpPr/>
           <p:nvPr/>
         </p:nvSpPr>
@@ -3592,23 +3790,23 @@
               <a:buNone/>
             </a:pPr>
             <a:r>
-              <a:rPr lang="en-US" sz="1400" dirty="0">
+              <a:rPr lang="en-US" sz="1300" dirty="0">
                 <a:solidFill>
                   <a:srgbClr val="B8D4E3"/>
                 </a:solidFill>
-                <a:latin typeface="Calibri" pitchFamily="34" charset="0"/>
-                <a:ea typeface="Calibri" pitchFamily="34" charset="-122"/>
-                <a:cs typeface="Calibri" pitchFamily="34" charset="-120"/>
+                <a:latin typeface="Georgia" pitchFamily="34" charset="0"/>
+                <a:ea typeface="Georgia" pitchFamily="34" charset="-122"/>
+                <a:cs typeface="Georgia" pitchFamily="34" charset="-120"/>
               </a:rPr>
               <a:t>Know your current tech, data, and AI posture for founders, CIOs, and the board — without a six-month GRC programme.</a:t>
             </a:r>
-            <a:endParaRPr lang="en-US" sz="1400" dirty="0"/>
-          </a:p>
-        </p:txBody>
-      </p:sp>
-      <p:sp>
-        <p:nvSpPr>
-          <p:cNvPr id="8" name="Shape 5"/>
+            <a:endParaRPr lang="en-US" sz="1300" dirty="0"/>
+          </a:p>
+        </p:txBody>
+      </p:sp>
+      <p:sp>
+        <p:nvSpPr>
+          <p:cNvPr id="11" name="Shape 7"/>
           <p:cNvSpPr/>
           <p:nvPr/>
         </p:nvSpPr>
@@ -3632,7 +3830,7 @@
       </p:sp>
       <p:sp>
         <p:nvSpPr>
-          <p:cNvPr id="9" name="Text 6"/>
+          <p:cNvPr id="12" name="Text 8"/>
           <p:cNvSpPr/>
           <p:nvPr/>
         </p:nvSpPr>
@@ -3655,23 +3853,23 @@
               <a:buNone/>
             </a:pPr>
             <a:r>
-              <a:rPr lang="en-US" sz="1800" b="1" dirty="0">
+              <a:rPr lang="en-US" sz="1600" b="1" dirty="0">
                 <a:solidFill>
                   <a:srgbClr val="F3F7F9"/>
                 </a:solidFill>
-                <a:latin typeface="Calibri" pitchFamily="34" charset="0"/>
-                <a:ea typeface="Calibri" pitchFamily="34" charset="-122"/>
-                <a:cs typeface="Calibri" pitchFamily="34" charset="-120"/>
+                <a:latin typeface="Georgia" pitchFamily="34" charset="0"/>
+                <a:ea typeface="Georgia" pitchFamily="34" charset="-122"/>
+                <a:cs typeface="Georgia" pitchFamily="34" charset="-120"/>
               </a:rPr>
               <a:t>Teams selling into FIs</a:t>
             </a:r>
-            <a:endParaRPr lang="en-US" sz="1800" dirty="0"/>
-          </a:p>
-        </p:txBody>
-      </p:sp>
-      <p:sp>
-        <p:nvSpPr>
-          <p:cNvPr id="10" name="Text 7"/>
+            <a:endParaRPr lang="en-US" sz="1600" dirty="0"/>
+          </a:p>
+        </p:txBody>
+      </p:sp>
+      <p:sp>
+        <p:nvSpPr>
+          <p:cNvPr id="13" name="Text 9"/>
           <p:cNvSpPr/>
           <p:nvPr/>
         </p:nvSpPr>
@@ -3694,95 +3892,17 @@
               <a:buNone/>
             </a:pPr>
             <a:r>
-              <a:rPr lang="en-US" sz="1400" dirty="0">
+              <a:rPr lang="en-US" sz="1300" dirty="0">
                 <a:solidFill>
                   <a:srgbClr val="B8D4E3"/>
                 </a:solidFill>
-                <a:latin typeface="Calibri" pitchFamily="34" charset="0"/>
-                <a:ea typeface="Calibri" pitchFamily="34" charset="-122"/>
-                <a:cs typeface="Calibri" pitchFamily="34" charset="-120"/>
+                <a:latin typeface="Georgia" pitchFamily="34" charset="0"/>
+                <a:ea typeface="Georgia" pitchFamily="34" charset="-122"/>
+                <a:cs typeface="Georgia" pitchFamily="34" charset="-120"/>
               </a:rPr>
               <a:t>Walk into vendor due diligence with answers shaped by APAC expectations — not only a generic assurance report.</a:t>
             </a:r>
-            <a:endParaRPr lang="en-US" sz="1400" dirty="0"/>
-          </a:p>
-        </p:txBody>
-      </p:sp>
-      <p:sp>
-        <p:nvSpPr>
-          <p:cNvPr id="11" name="Text 8"/>
-          <p:cNvSpPr/>
-          <p:nvPr/>
-        </p:nvSpPr>
-        <p:spPr>
-          <a:xfrm>
-            <a:off x="457200" y="4709160"/>
-            <a:ext cx="4572000" cy="228600"/>
-          </a:xfrm>
-          <a:prstGeom prst="rect">
-            <a:avLst/>
-          </a:prstGeom>
-          <a:noFill/>
-          <a:ln/>
-        </p:spPr>
-        <p:txBody>
-          <a:bodyPr wrap="square" rtlCol="0" anchor="ctr"/>
-          <a:lstStyle/>
-          <a:p>
-            <a:pPr indent="0" marL="0">
-              <a:buNone/>
-            </a:pPr>
-            <a:r>
-              <a:rPr lang="en-US" sz="1000" dirty="0">
-                <a:solidFill>
-                  <a:srgbClr val="A8C0CC"/>
-                </a:solidFill>
-                <a:latin typeface="Calibri" pitchFamily="34" charset="0"/>
-                <a:ea typeface="Calibri" pitchFamily="34" charset="-122"/>
-                <a:cs typeface="Calibri" pitchFamily="34" charset="-120"/>
-              </a:rPr>
-              <a:t>Oblig  ·  Confidential</a:t>
-            </a:r>
-            <a:endParaRPr lang="en-US" sz="1000" dirty="0"/>
-          </a:p>
-        </p:txBody>
-      </p:sp>
-      <p:sp>
-        <p:nvSpPr>
-          <p:cNvPr id="12" name="Text 9"/>
-          <p:cNvSpPr/>
-          <p:nvPr/>
-        </p:nvSpPr>
-        <p:spPr>
-          <a:xfrm>
-            <a:off x="7772400" y="4709160"/>
-            <a:ext cx="914400" cy="228600"/>
-          </a:xfrm>
-          <a:prstGeom prst="rect">
-            <a:avLst/>
-          </a:prstGeom>
-          <a:noFill/>
-          <a:ln/>
-        </p:spPr>
-        <p:txBody>
-          <a:bodyPr wrap="square" rtlCol="0" anchor="ctr"/>
-          <a:lstStyle/>
-          <a:p>
-            <a:pPr algn="r" indent="0" marL="0">
-              <a:buNone/>
-            </a:pPr>
-            <a:r>
-              <a:rPr lang="en-US" sz="1000" dirty="0">
-                <a:solidFill>
-                  <a:srgbClr val="A8C0CC"/>
-                </a:solidFill>
-                <a:latin typeface="Calibri" pitchFamily="34" charset="0"/>
-                <a:ea typeface="Calibri" pitchFamily="34" charset="-122"/>
-                <a:cs typeface="Calibri" pitchFamily="34" charset="-120"/>
-              </a:rPr>
-              <a:t>3 / 11</a:t>
-            </a:r>
-            <a:endParaRPr lang="en-US" sz="1000" dirty="0"/>
+            <a:endParaRPr lang="en-US" sz="1300" dirty="0"/>
           </a:p>
         </p:txBody>
       </p:sp>
@@ -3835,16 +3955,118 @@
           </a:prstGeom>
         </p:spPr>
       </p:pic>
-      <p:sp>
-        <p:nvSpPr>
-          <p:cNvPr id="3" name="Text 0"/>
+      <p:pic>
+        <p:nvPicPr>
+          <p:cNvPr id="3" name="Image 1" descr="/home/workdir/artifacts/oblig/public/oblig-icon.png">    </p:cNvPr>
+          <p:cNvPicPr>
+            <a:picLocks noChangeAspect="1"/>
+          </p:cNvPicPr>
+          <p:nvPr/>
+        </p:nvPicPr>
+        <p:blipFill>
+          <a:blip r:embed="rId2"/>
+          <a:stretch>
+            <a:fillRect/>
+          </a:stretch>
+        </p:blipFill>
+        <p:spPr>
+          <a:xfrm>
+            <a:off x="8275320" y="201168"/>
+            <a:ext cx="438912" cy="475488"/>
+          </a:xfrm>
+          <a:prstGeom prst="rect">
+            <a:avLst/>
+          </a:prstGeom>
+        </p:spPr>
+      </p:pic>
+      <p:sp>
+        <p:nvSpPr>
+          <p:cNvPr id="4" name="Text 0"/>
+          <p:cNvSpPr/>
+          <p:nvPr/>
+        </p:nvSpPr>
+        <p:spPr>
+          <a:xfrm>
+            <a:off x="457200" y="4709160"/>
+            <a:ext cx="4572000" cy="228600"/>
+          </a:xfrm>
+          <a:prstGeom prst="rect">
+            <a:avLst/>
+          </a:prstGeom>
+          <a:noFill/>
+          <a:ln/>
+        </p:spPr>
+        <p:txBody>
+          <a:bodyPr wrap="square" rtlCol="0" anchor="ctr"/>
+          <a:lstStyle/>
+          <a:p>
+            <a:pPr indent="0" marL="0">
+              <a:buNone/>
+            </a:pPr>
+            <a:r>
+              <a:rPr lang="en-US" sz="1000" dirty="0">
+                <a:solidFill>
+                  <a:srgbClr val="A8C0CC"/>
+                </a:solidFill>
+                <a:latin typeface="Georgia" pitchFamily="34" charset="0"/>
+                <a:ea typeface="Georgia" pitchFamily="34" charset="-122"/>
+                <a:cs typeface="Georgia" pitchFamily="34" charset="-120"/>
+              </a:rPr>
+              <a:t>Oblig  ·  Confidential</a:t>
+            </a:r>
+            <a:endParaRPr lang="en-US" sz="1000" dirty="0"/>
+          </a:p>
+        </p:txBody>
+      </p:sp>
+      <p:sp>
+        <p:nvSpPr>
+          <p:cNvPr id="5" name="Text 1"/>
+          <p:cNvSpPr/>
+          <p:nvPr/>
+        </p:nvSpPr>
+        <p:spPr>
+          <a:xfrm>
+            <a:off x="7772400" y="4709160"/>
+            <a:ext cx="914400" cy="228600"/>
+          </a:xfrm>
+          <a:prstGeom prst="rect">
+            <a:avLst/>
+          </a:prstGeom>
+          <a:noFill/>
+          <a:ln/>
+        </p:spPr>
+        <p:txBody>
+          <a:bodyPr wrap="square" rtlCol="0" anchor="ctr"/>
+          <a:lstStyle/>
+          <a:p>
+            <a:pPr algn="r" indent="0" marL="0">
+              <a:buNone/>
+            </a:pPr>
+            <a:r>
+              <a:rPr lang="en-US" sz="1000" dirty="0">
+                <a:solidFill>
+                  <a:srgbClr val="A8C0CC"/>
+                </a:solidFill>
+                <a:latin typeface="Georgia" pitchFamily="34" charset="0"/>
+                <a:ea typeface="Georgia" pitchFamily="34" charset="-122"/>
+                <a:cs typeface="Georgia" pitchFamily="34" charset="-120"/>
+              </a:rPr>
+              <a:t>4 / 11</a:t>
+            </a:r>
+            <a:endParaRPr lang="en-US" sz="1000" dirty="0"/>
+          </a:p>
+        </p:txBody>
+      </p:sp>
+      <p:sp>
+        <p:nvSpPr>
+          <p:cNvPr id="6" name="Text 2"/>
           <p:cNvSpPr/>
           <p:nvPr/>
         </p:nvSpPr>
         <p:spPr>
           <a:xfrm>
             <a:off x="548640" y="320040"/>
-            <a:ext cx="8229600" cy="274320"/>
+            <a:ext cx="7498080" cy="274320"/>
           </a:xfrm>
           <a:prstGeom prst="rect">
             <a:avLst/>
@@ -3864,9 +4086,9 @@
                 <a:solidFill>
                   <a:srgbClr val="E11D48"/>
                 </a:solidFill>
-                <a:latin typeface="Calibri" pitchFamily="34" charset="0"/>
-                <a:ea typeface="Calibri" pitchFamily="34" charset="-122"/>
-                <a:cs typeface="Calibri" pitchFamily="34" charset="-120"/>
+                <a:latin typeface="Georgia" pitchFamily="34" charset="0"/>
+                <a:ea typeface="Georgia" pitchFamily="34" charset="-122"/>
+                <a:cs typeface="Georgia" pitchFamily="34" charset="-120"/>
               </a:rPr>
               <a:t>PRODUCT</a:t>
             </a:r>
@@ -3876,46 +4098,46 @@
       </p:sp>
       <p:sp>
         <p:nvSpPr>
-          <p:cNvPr id="4" name="Text 1"/>
+          <p:cNvPr id="7" name="Text 3"/>
           <p:cNvSpPr/>
           <p:nvPr/>
         </p:nvSpPr>
         <p:spPr>
           <a:xfrm>
             <a:off x="548640" y="685800"/>
-            <a:ext cx="8229600" cy="457200"/>
-          </a:xfrm>
-          <a:prstGeom prst="rect">
-            <a:avLst/>
-          </a:prstGeom>
-          <a:noFill/>
-          <a:ln/>
-        </p:spPr>
-        <p:txBody>
-          <a:bodyPr wrap="square" rtlCol="0" anchor="ctr"/>
-          <a:lstStyle/>
-          <a:p>
-            <a:pPr indent="0" marL="0">
-              <a:buNone/>
-            </a:pPr>
-            <a:r>
-              <a:rPr lang="en-US" sz="2800" b="1" dirty="0">
+            <a:ext cx="7498080" cy="457200"/>
+          </a:xfrm>
+          <a:prstGeom prst="rect">
+            <a:avLst/>
+          </a:prstGeom>
+          <a:noFill/>
+          <a:ln/>
+        </p:spPr>
+        <p:txBody>
+          <a:bodyPr wrap="square" rtlCol="0" anchor="ctr"/>
+          <a:lstStyle/>
+          <a:p>
+            <a:pPr indent="0" marL="0">
+              <a:buNone/>
+            </a:pPr>
+            <a:r>
+              <a:rPr lang="en-US" sz="2600" b="1" dirty="0">
                 <a:solidFill>
                   <a:srgbClr val="F3F7F9"/>
                 </a:solidFill>
-                <a:latin typeface="Calibri" pitchFamily="34" charset="0"/>
-                <a:ea typeface="Calibri" pitchFamily="34" charset="-122"/>
-                <a:cs typeface="Calibri" pitchFamily="34" charset="-120"/>
+                <a:latin typeface="Georgia" pitchFamily="34" charset="0"/>
+                <a:ea typeface="Georgia" pitchFamily="34" charset="-122"/>
+                <a:cs typeface="Georgia" pitchFamily="34" charset="-120"/>
               </a:rPr>
               <a:t>Measure → act → evidence</a:t>
             </a:r>
-            <a:endParaRPr lang="en-US" sz="2800" dirty="0"/>
-          </a:p>
-        </p:txBody>
-      </p:sp>
-      <p:sp>
-        <p:nvSpPr>
-          <p:cNvPr id="5" name="Text 2"/>
+            <a:endParaRPr lang="en-US" sz="2600" dirty="0"/>
+          </a:p>
+        </p:txBody>
+      </p:sp>
+      <p:sp>
+        <p:nvSpPr>
+          <p:cNvPr id="8" name="Text 4"/>
           <p:cNvSpPr/>
           <p:nvPr/>
         </p:nvSpPr>
@@ -3938,23 +4160,23 @@
               <a:buNone/>
             </a:pPr>
             <a:r>
-              <a:rPr lang="en-US" sz="1800" b="1" dirty="0">
+              <a:rPr lang="en-US" sz="1700" b="1" dirty="0">
                 <a:solidFill>
                   <a:srgbClr val="E11D48"/>
                 </a:solidFill>
-                <a:latin typeface="Calibri" pitchFamily="34" charset="0"/>
-                <a:ea typeface="Calibri" pitchFamily="34" charset="-122"/>
-                <a:cs typeface="Calibri" pitchFamily="34" charset="-120"/>
+                <a:latin typeface="Georgia" pitchFamily="34" charset="0"/>
+                <a:ea typeface="Georgia" pitchFamily="34" charset="-122"/>
+                <a:cs typeface="Georgia" pitchFamily="34" charset="-120"/>
               </a:rPr>
               <a:t>01</a:t>
             </a:r>
-            <a:endParaRPr lang="en-US" sz="1800" dirty="0"/>
-          </a:p>
-        </p:txBody>
-      </p:sp>
-      <p:sp>
-        <p:nvSpPr>
-          <p:cNvPr id="6" name="Text 3"/>
+            <a:endParaRPr lang="en-US" sz="1700" dirty="0"/>
+          </a:p>
+        </p:txBody>
+      </p:sp>
+      <p:sp>
+        <p:nvSpPr>
+          <p:cNvPr id="9" name="Text 5"/>
           <p:cNvSpPr/>
           <p:nvPr/>
         </p:nvSpPr>
@@ -3977,23 +4199,23 @@
               <a:buNone/>
             </a:pPr>
             <a:r>
-              <a:rPr lang="en-US" sz="1800" b="1" dirty="0">
+              <a:rPr lang="en-US" sz="1700" b="1" dirty="0">
                 <a:solidFill>
                   <a:srgbClr val="F3F7F9"/>
                 </a:solidFill>
-                <a:latin typeface="Calibri" pitchFamily="34" charset="0"/>
-                <a:ea typeface="Calibri" pitchFamily="34" charset="-122"/>
-                <a:cs typeface="Calibri" pitchFamily="34" charset="-120"/>
+                <a:latin typeface="Georgia" pitchFamily="34" charset="0"/>
+                <a:ea typeface="Georgia" pitchFamily="34" charset="-122"/>
+                <a:cs typeface="Georgia" pitchFamily="34" charset="-120"/>
               </a:rPr>
               <a:t>Assess</a:t>
             </a:r>
-            <a:endParaRPr lang="en-US" sz="1800" dirty="0"/>
-          </a:p>
-        </p:txBody>
-      </p:sp>
-      <p:sp>
-        <p:nvSpPr>
-          <p:cNvPr id="7" name="Text 4"/>
+            <a:endParaRPr lang="en-US" sz="1700" dirty="0"/>
+          </a:p>
+        </p:txBody>
+      </p:sp>
+      <p:sp>
+        <p:nvSpPr>
+          <p:cNvPr id="10" name="Text 6"/>
           <p:cNvSpPr/>
           <p:nvPr/>
         </p:nvSpPr>
@@ -4016,23 +4238,23 @@
               <a:buNone/>
             </a:pPr>
             <a:r>
-              <a:rPr lang="en-US" sz="1400" dirty="0">
+              <a:rPr lang="en-US" sz="1300" dirty="0">
                 <a:solidFill>
                   <a:srgbClr val="B8D4E3"/>
                 </a:solidFill>
-                <a:latin typeface="Calibri" pitchFamily="34" charset="0"/>
-                <a:ea typeface="Calibri" pitchFamily="34" charset="-122"/>
-                <a:cs typeface="Calibri" pitchFamily="34" charset="-120"/>
+                <a:latin typeface="Georgia" pitchFamily="34" charset="0"/>
+                <a:ea typeface="Georgia" pitchFamily="34" charset="-122"/>
+                <a:cs typeface="Georgia" pitchFamily="34" charset="-120"/>
               </a:rPr>
               <a:t>Structured checklist across tech-governance domains. Minutes, not months.</a:t>
             </a:r>
-            <a:endParaRPr lang="en-US" sz="1400" dirty="0"/>
-          </a:p>
-        </p:txBody>
-      </p:sp>
-      <p:sp>
-        <p:nvSpPr>
-          <p:cNvPr id="8" name="Text 5"/>
+            <a:endParaRPr lang="en-US" sz="1300" dirty="0"/>
+          </a:p>
+        </p:txBody>
+      </p:sp>
+      <p:sp>
+        <p:nvSpPr>
+          <p:cNvPr id="11" name="Text 7"/>
           <p:cNvSpPr/>
           <p:nvPr/>
         </p:nvSpPr>
@@ -4055,23 +4277,23 @@
               <a:buNone/>
             </a:pPr>
             <a:r>
-              <a:rPr lang="en-US" sz="1800" b="1" dirty="0">
+              <a:rPr lang="en-US" sz="1700" b="1" dirty="0">
                 <a:solidFill>
                   <a:srgbClr val="E11D48"/>
                 </a:solidFill>
-                <a:latin typeface="Calibri" pitchFamily="34" charset="0"/>
-                <a:ea typeface="Calibri" pitchFamily="34" charset="-122"/>
-                <a:cs typeface="Calibri" pitchFamily="34" charset="-120"/>
+                <a:latin typeface="Georgia" pitchFamily="34" charset="0"/>
+                <a:ea typeface="Georgia" pitchFamily="34" charset="-122"/>
+                <a:cs typeface="Georgia" pitchFamily="34" charset="-120"/>
               </a:rPr>
               <a:t>02</a:t>
             </a:r>
-            <a:endParaRPr lang="en-US" sz="1800" dirty="0"/>
-          </a:p>
-        </p:txBody>
-      </p:sp>
-      <p:sp>
-        <p:nvSpPr>
-          <p:cNvPr id="9" name="Text 6"/>
+            <a:endParaRPr lang="en-US" sz="1700" dirty="0"/>
+          </a:p>
+        </p:txBody>
+      </p:sp>
+      <p:sp>
+        <p:nvSpPr>
+          <p:cNvPr id="12" name="Text 8"/>
           <p:cNvSpPr/>
           <p:nvPr/>
         </p:nvSpPr>
@@ -4094,23 +4316,23 @@
               <a:buNone/>
             </a:pPr>
             <a:r>
-              <a:rPr lang="en-US" sz="1800" b="1" dirty="0">
+              <a:rPr lang="en-US" sz="1700" b="1" dirty="0">
                 <a:solidFill>
                   <a:srgbClr val="F3F7F9"/>
                 </a:solidFill>
-                <a:latin typeface="Calibri" pitchFamily="34" charset="0"/>
-                <a:ea typeface="Calibri" pitchFamily="34" charset="-122"/>
-                <a:cs typeface="Calibri" pitchFamily="34" charset="-120"/>
+                <a:latin typeface="Georgia" pitchFamily="34" charset="0"/>
+                <a:ea typeface="Georgia" pitchFamily="34" charset="-122"/>
+                <a:cs typeface="Georgia" pitchFamily="34" charset="-120"/>
               </a:rPr>
               <a:t>Prioritise</a:t>
             </a:r>
-            <a:endParaRPr lang="en-US" sz="1800" dirty="0"/>
-          </a:p>
-        </p:txBody>
-      </p:sp>
-      <p:sp>
-        <p:nvSpPr>
-          <p:cNvPr id="10" name="Text 7"/>
+            <a:endParaRPr lang="en-US" sz="1700" dirty="0"/>
+          </a:p>
+        </p:txBody>
+      </p:sp>
+      <p:sp>
+        <p:nvSpPr>
+          <p:cNvPr id="13" name="Text 9"/>
           <p:cNvSpPr/>
           <p:nvPr/>
         </p:nvSpPr>
@@ -4133,23 +4355,23 @@
               <a:buNone/>
             </a:pPr>
             <a:r>
-              <a:rPr lang="en-US" sz="1400" dirty="0">
+              <a:rPr lang="en-US" sz="1300" dirty="0">
                 <a:solidFill>
                   <a:srgbClr val="B8D4E3"/>
                 </a:solidFill>
-                <a:latin typeface="Calibri" pitchFamily="34" charset="0"/>
-                <a:ea typeface="Calibri" pitchFamily="34" charset="-122"/>
-                <a:cs typeface="Calibri" pitchFamily="34" charset="-120"/>
+                <a:latin typeface="Georgia" pitchFamily="34" charset="0"/>
+                <a:ea typeface="Georgia" pitchFamily="34" charset="-122"/>
+                <a:cs typeface="Georgia" pitchFamily="34" charset="-120"/>
               </a:rPr>
               <a:t>Score, gaps, risks, and a practical roadmap for leadership.</a:t>
             </a:r>
-            <a:endParaRPr lang="en-US" sz="1400" dirty="0"/>
-          </a:p>
-        </p:txBody>
-      </p:sp>
-      <p:sp>
-        <p:nvSpPr>
-          <p:cNvPr id="11" name="Text 8"/>
+            <a:endParaRPr lang="en-US" sz="1300" dirty="0"/>
+          </a:p>
+        </p:txBody>
+      </p:sp>
+      <p:sp>
+        <p:nvSpPr>
+          <p:cNvPr id="14" name="Text 10"/>
           <p:cNvSpPr/>
           <p:nvPr/>
         </p:nvSpPr>
@@ -4172,23 +4394,23 @@
               <a:buNone/>
             </a:pPr>
             <a:r>
-              <a:rPr lang="en-US" sz="1800" b="1" dirty="0">
+              <a:rPr lang="en-US" sz="1700" b="1" dirty="0">
                 <a:solidFill>
                   <a:srgbClr val="E11D48"/>
                 </a:solidFill>
-                <a:latin typeface="Calibri" pitchFamily="34" charset="0"/>
-                <a:ea typeface="Calibri" pitchFamily="34" charset="-122"/>
-                <a:cs typeface="Calibri" pitchFamily="34" charset="-120"/>
+                <a:latin typeface="Georgia" pitchFamily="34" charset="0"/>
+                <a:ea typeface="Georgia" pitchFamily="34" charset="-122"/>
+                <a:cs typeface="Georgia" pitchFamily="34" charset="-120"/>
               </a:rPr>
               <a:t>03</a:t>
             </a:r>
-            <a:endParaRPr lang="en-US" sz="1800" dirty="0"/>
-          </a:p>
-        </p:txBody>
-      </p:sp>
-      <p:sp>
-        <p:nvSpPr>
-          <p:cNvPr id="12" name="Text 9"/>
+            <a:endParaRPr lang="en-US" sz="1700" dirty="0"/>
+          </a:p>
+        </p:txBody>
+      </p:sp>
+      <p:sp>
+        <p:nvSpPr>
+          <p:cNvPr id="15" name="Text 11"/>
           <p:cNvSpPr/>
           <p:nvPr/>
         </p:nvSpPr>
@@ -4211,23 +4433,23 @@
               <a:buNone/>
             </a:pPr>
             <a:r>
-              <a:rPr lang="en-US" sz="1800" b="1" dirty="0">
+              <a:rPr lang="en-US" sz="1700" b="1" dirty="0">
                 <a:solidFill>
                   <a:srgbClr val="F3F7F9"/>
                 </a:solidFill>
-                <a:latin typeface="Calibri" pitchFamily="34" charset="0"/>
-                <a:ea typeface="Calibri" pitchFamily="34" charset="-122"/>
-                <a:cs typeface="Calibri" pitchFamily="34" charset="-120"/>
+                <a:latin typeface="Georgia" pitchFamily="34" charset="0"/>
+                <a:ea typeface="Georgia" pitchFamily="34" charset="-122"/>
+                <a:cs typeface="Georgia" pitchFamily="34" charset="-120"/>
               </a:rPr>
               <a:t>Draft</a:t>
             </a:r>
-            <a:endParaRPr lang="en-US" sz="1800" dirty="0"/>
-          </a:p>
-        </p:txBody>
-      </p:sp>
-      <p:sp>
-        <p:nvSpPr>
-          <p:cNvPr id="13" name="Text 10"/>
+            <a:endParaRPr lang="en-US" sz="1700" dirty="0"/>
+          </a:p>
+        </p:txBody>
+      </p:sp>
+      <p:sp>
+        <p:nvSpPr>
+          <p:cNvPr id="16" name="Text 12"/>
           <p:cNvSpPr/>
           <p:nvPr/>
         </p:nvSpPr>
@@ -4250,23 +4472,23 @@
               <a:buNone/>
             </a:pPr>
             <a:r>
-              <a:rPr lang="en-US" sz="1400" dirty="0">
+              <a:rPr lang="en-US" sz="1300" dirty="0">
                 <a:solidFill>
                   <a:srgbClr val="B8D4E3"/>
                 </a:solidFill>
-                <a:latin typeface="Calibri" pitchFamily="34" charset="0"/>
-                <a:ea typeface="Calibri" pitchFamily="34" charset="-122"/>
-                <a:cs typeface="Calibri" pitchFamily="34" charset="-120"/>
+                <a:latin typeface="Georgia" pitchFamily="34" charset="0"/>
+                <a:ea typeface="Georgia" pitchFamily="34" charset="-122"/>
+                <a:cs typeface="Georgia" pitchFamily="34" charset="-120"/>
               </a:rPr>
               <a:t>Tech governance policies and Copilot guidance tied to APAC themes.</a:t>
             </a:r>
-            <a:endParaRPr lang="en-US" sz="1400" dirty="0"/>
-          </a:p>
-        </p:txBody>
-      </p:sp>
-      <p:sp>
-        <p:nvSpPr>
-          <p:cNvPr id="14" name="Text 11"/>
+            <a:endParaRPr lang="en-US" sz="1300" dirty="0"/>
+          </a:p>
+        </p:txBody>
+      </p:sp>
+      <p:sp>
+        <p:nvSpPr>
+          <p:cNvPr id="17" name="Text 13"/>
           <p:cNvSpPr/>
           <p:nvPr/>
         </p:nvSpPr>
@@ -4289,23 +4511,23 @@
               <a:buNone/>
             </a:pPr>
             <a:r>
-              <a:rPr lang="en-US" sz="1800" b="1" dirty="0">
+              <a:rPr lang="en-US" sz="1700" b="1" dirty="0">
                 <a:solidFill>
                   <a:srgbClr val="E11D48"/>
                 </a:solidFill>
-                <a:latin typeface="Calibri" pitchFamily="34" charset="0"/>
-                <a:ea typeface="Calibri" pitchFamily="34" charset="-122"/>
-                <a:cs typeface="Calibri" pitchFamily="34" charset="-120"/>
+                <a:latin typeface="Georgia" pitchFamily="34" charset="0"/>
+                <a:ea typeface="Georgia" pitchFamily="34" charset="-122"/>
+                <a:cs typeface="Georgia" pitchFamily="34" charset="-120"/>
               </a:rPr>
               <a:t>04</a:t>
             </a:r>
-            <a:endParaRPr lang="en-US" sz="1800" dirty="0"/>
-          </a:p>
-        </p:txBody>
-      </p:sp>
-      <p:sp>
-        <p:nvSpPr>
-          <p:cNvPr id="15" name="Text 12"/>
+            <a:endParaRPr lang="en-US" sz="1700" dirty="0"/>
+          </a:p>
+        </p:txBody>
+      </p:sp>
+      <p:sp>
+        <p:nvSpPr>
+          <p:cNvPr id="18" name="Text 14"/>
           <p:cNvSpPr/>
           <p:nvPr/>
         </p:nvSpPr>
@@ -4328,23 +4550,23 @@
               <a:buNone/>
             </a:pPr>
             <a:r>
-              <a:rPr lang="en-US" sz="1800" b="1" dirty="0">
+              <a:rPr lang="en-US" sz="1700" b="1" dirty="0">
                 <a:solidFill>
                   <a:srgbClr val="F3F7F9"/>
                 </a:solidFill>
-                <a:latin typeface="Calibri" pitchFamily="34" charset="0"/>
-                <a:ea typeface="Calibri" pitchFamily="34" charset="-122"/>
-                <a:cs typeface="Calibri" pitchFamily="34" charset="-120"/>
+                <a:latin typeface="Georgia" pitchFamily="34" charset="0"/>
+                <a:ea typeface="Georgia" pitchFamily="34" charset="-122"/>
+                <a:cs typeface="Georgia" pitchFamily="34" charset="-120"/>
               </a:rPr>
               <a:t>Respond</a:t>
             </a:r>
-            <a:endParaRPr lang="en-US" sz="1800" dirty="0"/>
-          </a:p>
-        </p:txBody>
-      </p:sp>
-      <p:sp>
-        <p:nvSpPr>
-          <p:cNvPr id="16" name="Text 13"/>
+            <a:endParaRPr lang="en-US" sz="1700" dirty="0"/>
+          </a:p>
+        </p:txBody>
+      </p:sp>
+      <p:sp>
+        <p:nvSpPr>
+          <p:cNvPr id="19" name="Text 15"/>
           <p:cNvSpPr/>
           <p:nvPr/>
         </p:nvSpPr>
@@ -4367,95 +4589,17 @@
               <a:buNone/>
             </a:pPr>
             <a:r>
-              <a:rPr lang="en-US" sz="1400" dirty="0">
+              <a:rPr lang="en-US" sz="1300" dirty="0">
                 <a:solidFill>
                   <a:srgbClr val="B8D4E3"/>
                 </a:solidFill>
-                <a:latin typeface="Calibri" pitchFamily="34" charset="0"/>
-                <a:ea typeface="Calibri" pitchFamily="34" charset="-122"/>
-                <a:cs typeface="Calibri" pitchFamily="34" charset="-120"/>
+                <a:latin typeface="Georgia" pitchFamily="34" charset="0"/>
+                <a:ea typeface="Georgia" pitchFamily="34" charset="-122"/>
+                <a:cs typeface="Georgia" pitchFamily="34" charset="-120"/>
               </a:rPr>
               <a:t>Questionnaire assist from your real readiness and policy library.</a:t>
             </a:r>
-            <a:endParaRPr lang="en-US" sz="1400" dirty="0"/>
-          </a:p>
-        </p:txBody>
-      </p:sp>
-      <p:sp>
-        <p:nvSpPr>
-          <p:cNvPr id="17" name="Text 14"/>
-          <p:cNvSpPr/>
-          <p:nvPr/>
-        </p:nvSpPr>
-        <p:spPr>
-          <a:xfrm>
-            <a:off x="457200" y="4709160"/>
-            <a:ext cx="4572000" cy="228600"/>
-          </a:xfrm>
-          <a:prstGeom prst="rect">
-            <a:avLst/>
-          </a:prstGeom>
-          <a:noFill/>
-          <a:ln/>
-        </p:spPr>
-        <p:txBody>
-          <a:bodyPr wrap="square" rtlCol="0" anchor="ctr"/>
-          <a:lstStyle/>
-          <a:p>
-            <a:pPr indent="0" marL="0">
-              <a:buNone/>
-            </a:pPr>
-            <a:r>
-              <a:rPr lang="en-US" sz="1000" dirty="0">
-                <a:solidFill>
-                  <a:srgbClr val="A8C0CC"/>
-                </a:solidFill>
-                <a:latin typeface="Calibri" pitchFamily="34" charset="0"/>
-                <a:ea typeface="Calibri" pitchFamily="34" charset="-122"/>
-                <a:cs typeface="Calibri" pitchFamily="34" charset="-120"/>
-              </a:rPr>
-              <a:t>Oblig  ·  Confidential</a:t>
-            </a:r>
-            <a:endParaRPr lang="en-US" sz="1000" dirty="0"/>
-          </a:p>
-        </p:txBody>
-      </p:sp>
-      <p:sp>
-        <p:nvSpPr>
-          <p:cNvPr id="18" name="Text 15"/>
-          <p:cNvSpPr/>
-          <p:nvPr/>
-        </p:nvSpPr>
-        <p:spPr>
-          <a:xfrm>
-            <a:off x="7772400" y="4709160"/>
-            <a:ext cx="914400" cy="228600"/>
-          </a:xfrm>
-          <a:prstGeom prst="rect">
-            <a:avLst/>
-          </a:prstGeom>
-          <a:noFill/>
-          <a:ln/>
-        </p:spPr>
-        <p:txBody>
-          <a:bodyPr wrap="square" rtlCol="0" anchor="ctr"/>
-          <a:lstStyle/>
-          <a:p>
-            <a:pPr algn="r" indent="0" marL="0">
-              <a:buNone/>
-            </a:pPr>
-            <a:r>
-              <a:rPr lang="en-US" sz="1000" dirty="0">
-                <a:solidFill>
-                  <a:srgbClr val="A8C0CC"/>
-                </a:solidFill>
-                <a:latin typeface="Calibri" pitchFamily="34" charset="0"/>
-                <a:ea typeface="Calibri" pitchFamily="34" charset="-122"/>
-                <a:cs typeface="Calibri" pitchFamily="34" charset="-120"/>
-              </a:rPr>
-              <a:t>4 / 11</a:t>
-            </a:r>
-            <a:endParaRPr lang="en-US" sz="1000" dirty="0"/>
+            <a:endParaRPr lang="en-US" sz="1300" dirty="0"/>
           </a:p>
         </p:txBody>
       </p:sp>
@@ -4508,282 +4652,33 @@
           </a:prstGeom>
         </p:spPr>
       </p:pic>
-      <p:sp>
-        <p:nvSpPr>
-          <p:cNvPr id="3" name="Text 0"/>
-          <p:cNvSpPr/>
-          <p:nvPr/>
-        </p:nvSpPr>
-        <p:spPr>
-          <a:xfrm>
-            <a:off x="548640" y="320040"/>
-            <a:ext cx="8229600" cy="274320"/>
-          </a:xfrm>
-          <a:prstGeom prst="rect">
-            <a:avLst/>
-          </a:prstGeom>
-          <a:noFill/>
-          <a:ln/>
-        </p:spPr>
-        <p:txBody>
-          <a:bodyPr wrap="square" rtlCol="0" anchor="ctr"/>
-          <a:lstStyle/>
-          <a:p>
-            <a:pPr indent="0" marL="0">
-              <a:buNone/>
-            </a:pPr>
-            <a:r>
-              <a:rPr lang="en-US" sz="1100" b="1" spc="300" kern="0" dirty="0">
-                <a:solidFill>
-                  <a:srgbClr val="E11D48"/>
-                </a:solidFill>
-                <a:latin typeface="Calibri" pitchFamily="34" charset="0"/>
-                <a:ea typeface="Calibri" pitchFamily="34" charset="-122"/>
-                <a:cs typeface="Calibri" pitchFamily="34" charset="-120"/>
-              </a:rPr>
-              <a:t>ASSESSMENT</a:t>
-            </a:r>
-            <a:endParaRPr lang="en-US" sz="1100" dirty="0"/>
-          </a:p>
-        </p:txBody>
-      </p:sp>
-      <p:sp>
-        <p:nvSpPr>
-          <p:cNvPr id="4" name="Text 1"/>
-          <p:cNvSpPr/>
-          <p:nvPr/>
-        </p:nvSpPr>
-        <p:spPr>
-          <a:xfrm>
-            <a:off x="548640" y="685800"/>
-            <a:ext cx="8229600" cy="457200"/>
-          </a:xfrm>
-          <a:prstGeom prst="rect">
-            <a:avLst/>
-          </a:prstGeom>
-          <a:noFill/>
-          <a:ln/>
-        </p:spPr>
-        <p:txBody>
-          <a:bodyPr wrap="square" rtlCol="0" anchor="ctr"/>
-          <a:lstStyle/>
-          <a:p>
-            <a:pPr indent="0" marL="0">
-              <a:buNone/>
-            </a:pPr>
-            <a:r>
-              <a:rPr lang="en-US" sz="2800" b="1" dirty="0">
-                <a:solidFill>
-                  <a:srgbClr val="F3F7F9"/>
-                </a:solidFill>
-                <a:latin typeface="Calibri" pitchFamily="34" charset="0"/>
-                <a:ea typeface="Calibri" pitchFamily="34" charset="-122"/>
-                <a:cs typeface="Calibri" pitchFamily="34" charset="-120"/>
-              </a:rPr>
-              <a:t>A working baseline in one sitting</a:t>
-            </a:r>
-            <a:endParaRPr lang="en-US" sz="2800" dirty="0"/>
-          </a:p>
-        </p:txBody>
-      </p:sp>
-      <p:sp>
-        <p:nvSpPr>
-          <p:cNvPr id="5" name="Text 2"/>
-          <p:cNvSpPr/>
-          <p:nvPr/>
-        </p:nvSpPr>
-        <p:spPr>
-          <a:xfrm>
-            <a:off x="548640" y="1280160"/>
-            <a:ext cx="8229600" cy="594360"/>
-          </a:xfrm>
-          <a:prstGeom prst="rect">
-            <a:avLst/>
-          </a:prstGeom>
-          <a:noFill/>
-          <a:ln/>
-        </p:spPr>
-        <p:txBody>
-          <a:bodyPr wrap="square" rtlCol="0" anchor="ctr"/>
-          <a:lstStyle/>
-          <a:p>
-            <a:pPr indent="0" marL="0">
-              <a:buNone/>
-            </a:pPr>
-            <a:r>
-              <a:rPr lang="en-US" sz="1500" dirty="0">
-                <a:solidFill>
-                  <a:srgbClr val="B8D4E3"/>
-                </a:solidFill>
-                <a:latin typeface="Calibri" pitchFamily="34" charset="0"/>
-                <a:ea typeface="Calibri" pitchFamily="34" charset="-122"/>
-                <a:cs typeface="Calibri" pitchFamily="34" charset="-120"/>
-              </a:rPr>
-              <a:t>Self-reported checklist grounded in what APAC FIs probe: oversight, vendors, monitoring, data residency, incidents, subcontractors, AI, and more.</a:t>
-            </a:r>
-            <a:endParaRPr lang="en-US" sz="1500" dirty="0"/>
-          </a:p>
-        </p:txBody>
-      </p:sp>
-      <p:sp>
-        <p:nvSpPr>
-          <p:cNvPr id="6" name="Text 3"/>
-          <p:cNvSpPr/>
-          <p:nvPr/>
-        </p:nvSpPr>
-        <p:spPr>
-          <a:xfrm>
-            <a:off x="548640" y="2057400"/>
-            <a:ext cx="8229600" cy="365760"/>
-          </a:xfrm>
-          <a:prstGeom prst="rect">
-            <a:avLst/>
-          </a:prstGeom>
-          <a:noFill/>
-          <a:ln/>
-        </p:spPr>
-        <p:txBody>
-          <a:bodyPr wrap="square" rtlCol="0" anchor="ctr"/>
-          <a:lstStyle/>
-          <a:p>
-            <a:pPr indent="0" marL="0">
-              <a:buNone/>
-            </a:pPr>
-            <a:r>
-              <a:rPr lang="en-US" sz="1500" dirty="0">
-                <a:solidFill>
-                  <a:srgbClr val="F3F7F9"/>
-                </a:solidFill>
-                <a:latin typeface="Calibri" pitchFamily="34" charset="0"/>
-                <a:ea typeface="Calibri" pitchFamily="34" charset="-122"/>
-                <a:cs typeface="Calibri" pitchFamily="34" charset="-120"/>
-              </a:rPr>
-              <a:t>▸  Domain-by-domain progress with clear “why this matters” context</a:t>
-            </a:r>
-            <a:endParaRPr lang="en-US" sz="1500" dirty="0"/>
-          </a:p>
-        </p:txBody>
-      </p:sp>
-      <p:sp>
-        <p:nvSpPr>
-          <p:cNvPr id="7" name="Text 4"/>
-          <p:cNvSpPr/>
-          <p:nvPr/>
-        </p:nvSpPr>
-        <p:spPr>
-          <a:xfrm>
-            <a:off x="548640" y="2514600"/>
-            <a:ext cx="8229600" cy="365760"/>
-          </a:xfrm>
-          <a:prstGeom prst="rect">
-            <a:avLst/>
-          </a:prstGeom>
-          <a:noFill/>
-          <a:ln/>
-        </p:spPr>
-        <p:txBody>
-          <a:bodyPr wrap="square" rtlCol="0" anchor="ctr"/>
-          <a:lstStyle/>
-          <a:p>
-            <a:pPr indent="0" marL="0">
-              <a:buNone/>
-            </a:pPr>
-            <a:r>
-              <a:rPr lang="en-US" sz="1500" dirty="0">
-                <a:solidFill>
-                  <a:srgbClr val="F3F7F9"/>
-                </a:solidFill>
-                <a:latin typeface="Calibri" pitchFamily="34" charset="0"/>
-                <a:ea typeface="Calibri" pitchFamily="34" charset="-122"/>
-                <a:cs typeface="Calibri" pitchFamily="34" charset="-120"/>
-              </a:rPr>
-              <a:t>▸  Readiness signals for leadership — not a consultant binder</a:t>
-            </a:r>
-            <a:endParaRPr lang="en-US" sz="1500" dirty="0"/>
-          </a:p>
-        </p:txBody>
-      </p:sp>
-      <p:sp>
-        <p:nvSpPr>
-          <p:cNvPr id="8" name="Text 5"/>
-          <p:cNvSpPr/>
-          <p:nvPr/>
-        </p:nvSpPr>
-        <p:spPr>
-          <a:xfrm>
-            <a:off x="548640" y="2971800"/>
-            <a:ext cx="8229600" cy="365760"/>
-          </a:xfrm>
-          <a:prstGeom prst="rect">
-            <a:avLst/>
-          </a:prstGeom>
-          <a:noFill/>
-          <a:ln/>
-        </p:spPr>
-        <p:txBody>
-          <a:bodyPr wrap="square" rtlCol="0" anchor="ctr"/>
-          <a:lstStyle/>
-          <a:p>
-            <a:pPr indent="0" marL="0">
-              <a:buNone/>
-            </a:pPr>
-            <a:r>
-              <a:rPr lang="en-US" sz="1500" dirty="0">
-                <a:solidFill>
-                  <a:srgbClr val="F3F7F9"/>
-                </a:solidFill>
-                <a:latin typeface="Calibri" pitchFamily="34" charset="0"/>
-                <a:ea typeface="Calibri" pitchFamily="34" charset="-122"/>
-                <a:cs typeface="Calibri" pitchFamily="34" charset="-120"/>
-              </a:rPr>
-              <a:t>▸  Saves as you go; sign-in syncs across devices</a:t>
-            </a:r>
-            <a:endParaRPr lang="en-US" sz="1500" dirty="0"/>
-          </a:p>
-        </p:txBody>
-      </p:sp>
-      <p:sp>
-        <p:nvSpPr>
-          <p:cNvPr id="9" name="Text 6"/>
-          <p:cNvSpPr/>
-          <p:nvPr/>
-        </p:nvSpPr>
-        <p:spPr>
-          <a:xfrm>
-            <a:off x="548640" y="3429000"/>
-            <a:ext cx="8229600" cy="365760"/>
-          </a:xfrm>
-          <a:prstGeom prst="rect">
-            <a:avLst/>
-          </a:prstGeom>
-          <a:noFill/>
-          <a:ln/>
-        </p:spPr>
-        <p:txBody>
-          <a:bodyPr wrap="square" rtlCol="0" anchor="ctr"/>
-          <a:lstStyle/>
-          <a:p>
-            <a:pPr indent="0" marL="0">
-              <a:buNone/>
-            </a:pPr>
-            <a:r>
-              <a:rPr lang="en-US" sz="1500" dirty="0">
-                <a:solidFill>
-                  <a:srgbClr val="F3F7F9"/>
-                </a:solidFill>
-                <a:latin typeface="Calibri" pitchFamily="34" charset="0"/>
-                <a:ea typeface="Calibri" pitchFamily="34" charset="-122"/>
-                <a:cs typeface="Calibri" pitchFamily="34" charset="-120"/>
-              </a:rPr>
-              <a:t>▸  Built for founders, CIOs, CTOs, and IT leads</a:t>
-            </a:r>
-            <a:endParaRPr lang="en-US" sz="1500" dirty="0"/>
-          </a:p>
-        </p:txBody>
-      </p:sp>
-      <p:sp>
-        <p:nvSpPr>
-          <p:cNvPr id="10" name="Text 7"/>
+      <p:pic>
+        <p:nvPicPr>
+          <p:cNvPr id="3" name="Image 1" descr="/home/workdir/artifacts/oblig/public/oblig-icon.png">    </p:cNvPr>
+          <p:cNvPicPr>
+            <a:picLocks noChangeAspect="1"/>
+          </p:cNvPicPr>
+          <p:nvPr/>
+        </p:nvPicPr>
+        <p:blipFill>
+          <a:blip r:embed="rId2"/>
+          <a:stretch>
+            <a:fillRect/>
+          </a:stretch>
+        </p:blipFill>
+        <p:spPr>
+          <a:xfrm>
+            <a:off x="8275320" y="201168"/>
+            <a:ext cx="438912" cy="475488"/>
+          </a:xfrm>
+          <a:prstGeom prst="rect">
+            <a:avLst/>
+          </a:prstGeom>
+        </p:spPr>
+      </p:pic>
+      <p:sp>
+        <p:nvSpPr>
+          <p:cNvPr id="4" name="Text 0"/>
           <p:cNvSpPr/>
           <p:nvPr/>
         </p:nvSpPr>
@@ -4810,9 +4705,9 @@
                 <a:solidFill>
                   <a:srgbClr val="A8C0CC"/>
                 </a:solidFill>
-                <a:latin typeface="Calibri" pitchFamily="34" charset="0"/>
-                <a:ea typeface="Calibri" pitchFamily="34" charset="-122"/>
-                <a:cs typeface="Calibri" pitchFamily="34" charset="-120"/>
+                <a:latin typeface="Georgia" pitchFamily="34" charset="0"/>
+                <a:ea typeface="Georgia" pitchFamily="34" charset="-122"/>
+                <a:cs typeface="Georgia" pitchFamily="34" charset="-120"/>
               </a:rPr>
               <a:t>Oblig  ·  Confidential</a:t>
             </a:r>
@@ -4822,7 +4717,7 @@
       </p:sp>
       <p:sp>
         <p:nvSpPr>
-          <p:cNvPr id="11" name="Text 8"/>
+          <p:cNvPr id="5" name="Text 1"/>
           <p:cNvSpPr/>
           <p:nvPr/>
         </p:nvSpPr>
@@ -4849,13 +4744,286 @@
                 <a:solidFill>
                   <a:srgbClr val="A8C0CC"/>
                 </a:solidFill>
-                <a:latin typeface="Calibri" pitchFamily="34" charset="0"/>
-                <a:ea typeface="Calibri" pitchFamily="34" charset="-122"/>
-                <a:cs typeface="Calibri" pitchFamily="34" charset="-120"/>
+                <a:latin typeface="Georgia" pitchFamily="34" charset="0"/>
+                <a:ea typeface="Georgia" pitchFamily="34" charset="-122"/>
+                <a:cs typeface="Georgia" pitchFamily="34" charset="-120"/>
               </a:rPr>
               <a:t>5 / 11</a:t>
             </a:r>
             <a:endParaRPr lang="en-US" sz="1000" dirty="0"/>
+          </a:p>
+        </p:txBody>
+      </p:sp>
+      <p:sp>
+        <p:nvSpPr>
+          <p:cNvPr id="6" name="Text 2"/>
+          <p:cNvSpPr/>
+          <p:nvPr/>
+        </p:nvSpPr>
+        <p:spPr>
+          <a:xfrm>
+            <a:off x="548640" y="320040"/>
+            <a:ext cx="7498080" cy="274320"/>
+          </a:xfrm>
+          <a:prstGeom prst="rect">
+            <a:avLst/>
+          </a:prstGeom>
+          <a:noFill/>
+          <a:ln/>
+        </p:spPr>
+        <p:txBody>
+          <a:bodyPr wrap="square" rtlCol="0" anchor="ctr"/>
+          <a:lstStyle/>
+          <a:p>
+            <a:pPr indent="0" marL="0">
+              <a:buNone/>
+            </a:pPr>
+            <a:r>
+              <a:rPr lang="en-US" sz="1100" b="1" spc="300" kern="0" dirty="0">
+                <a:solidFill>
+                  <a:srgbClr val="E11D48"/>
+                </a:solidFill>
+                <a:latin typeface="Georgia" pitchFamily="34" charset="0"/>
+                <a:ea typeface="Georgia" pitchFamily="34" charset="-122"/>
+                <a:cs typeface="Georgia" pitchFamily="34" charset="-120"/>
+              </a:rPr>
+              <a:t>ASSESSMENT</a:t>
+            </a:r>
+            <a:endParaRPr lang="en-US" sz="1100" dirty="0"/>
+          </a:p>
+        </p:txBody>
+      </p:sp>
+      <p:sp>
+        <p:nvSpPr>
+          <p:cNvPr id="7" name="Text 3"/>
+          <p:cNvSpPr/>
+          <p:nvPr/>
+        </p:nvSpPr>
+        <p:spPr>
+          <a:xfrm>
+            <a:off x="548640" y="685800"/>
+            <a:ext cx="7498080" cy="457200"/>
+          </a:xfrm>
+          <a:prstGeom prst="rect">
+            <a:avLst/>
+          </a:prstGeom>
+          <a:noFill/>
+          <a:ln/>
+        </p:spPr>
+        <p:txBody>
+          <a:bodyPr wrap="square" rtlCol="0" anchor="ctr"/>
+          <a:lstStyle/>
+          <a:p>
+            <a:pPr indent="0" marL="0">
+              <a:buNone/>
+            </a:pPr>
+            <a:r>
+              <a:rPr lang="en-US" sz="2600" b="1" dirty="0">
+                <a:solidFill>
+                  <a:srgbClr val="F3F7F9"/>
+                </a:solidFill>
+                <a:latin typeface="Georgia" pitchFamily="34" charset="0"/>
+                <a:ea typeface="Georgia" pitchFamily="34" charset="-122"/>
+                <a:cs typeface="Georgia" pitchFamily="34" charset="-120"/>
+              </a:rPr>
+              <a:t>A working baseline in one sitting</a:t>
+            </a:r>
+            <a:endParaRPr lang="en-US" sz="2600" dirty="0"/>
+          </a:p>
+        </p:txBody>
+      </p:sp>
+      <p:sp>
+        <p:nvSpPr>
+          <p:cNvPr id="8" name="Text 4"/>
+          <p:cNvSpPr/>
+          <p:nvPr/>
+        </p:nvSpPr>
+        <p:spPr>
+          <a:xfrm>
+            <a:off x="548640" y="1280160"/>
+            <a:ext cx="8046720" cy="594360"/>
+          </a:xfrm>
+          <a:prstGeom prst="rect">
+            <a:avLst/>
+          </a:prstGeom>
+          <a:noFill/>
+          <a:ln/>
+        </p:spPr>
+        <p:txBody>
+          <a:bodyPr wrap="square" rtlCol="0" anchor="ctr"/>
+          <a:lstStyle/>
+          <a:p>
+            <a:pPr indent="0" marL="0">
+              <a:buNone/>
+            </a:pPr>
+            <a:r>
+              <a:rPr lang="en-US" sz="1400" dirty="0">
+                <a:solidFill>
+                  <a:srgbClr val="B8D4E3"/>
+                </a:solidFill>
+                <a:latin typeface="Georgia" pitchFamily="34" charset="0"/>
+                <a:ea typeface="Georgia" pitchFamily="34" charset="-122"/>
+                <a:cs typeface="Georgia" pitchFamily="34" charset="-120"/>
+              </a:rPr>
+              <a:t>Self-reported checklist grounded in what APAC FIs probe: oversight, vendors, monitoring, data residency, incidents, subcontractors, AI, and more.</a:t>
+            </a:r>
+            <a:endParaRPr lang="en-US" sz="1400" dirty="0"/>
+          </a:p>
+        </p:txBody>
+      </p:sp>
+      <p:sp>
+        <p:nvSpPr>
+          <p:cNvPr id="9" name="Text 5"/>
+          <p:cNvSpPr/>
+          <p:nvPr/>
+        </p:nvSpPr>
+        <p:spPr>
+          <a:xfrm>
+            <a:off x="548640" y="2057400"/>
+            <a:ext cx="8046720" cy="365760"/>
+          </a:xfrm>
+          <a:prstGeom prst="rect">
+            <a:avLst/>
+          </a:prstGeom>
+          <a:noFill/>
+          <a:ln/>
+        </p:spPr>
+        <p:txBody>
+          <a:bodyPr wrap="square" rtlCol="0" anchor="ctr"/>
+          <a:lstStyle/>
+          <a:p>
+            <a:pPr indent="0" marL="0">
+              <a:buNone/>
+            </a:pPr>
+            <a:r>
+              <a:rPr lang="en-US" sz="1400" dirty="0">
+                <a:solidFill>
+                  <a:srgbClr val="F3F7F9"/>
+                </a:solidFill>
+                <a:latin typeface="Georgia" pitchFamily="34" charset="0"/>
+                <a:ea typeface="Georgia" pitchFamily="34" charset="-122"/>
+                <a:cs typeface="Georgia" pitchFamily="34" charset="-120"/>
+              </a:rPr>
+              <a:t>▸  Domain-by-domain progress with clear “why this matters” context</a:t>
+            </a:r>
+            <a:endParaRPr lang="en-US" sz="1400" dirty="0"/>
+          </a:p>
+        </p:txBody>
+      </p:sp>
+      <p:sp>
+        <p:nvSpPr>
+          <p:cNvPr id="10" name="Text 6"/>
+          <p:cNvSpPr/>
+          <p:nvPr/>
+        </p:nvSpPr>
+        <p:spPr>
+          <a:xfrm>
+            <a:off x="548640" y="2514600"/>
+            <a:ext cx="8046720" cy="365760"/>
+          </a:xfrm>
+          <a:prstGeom prst="rect">
+            <a:avLst/>
+          </a:prstGeom>
+          <a:noFill/>
+          <a:ln/>
+        </p:spPr>
+        <p:txBody>
+          <a:bodyPr wrap="square" rtlCol="0" anchor="ctr"/>
+          <a:lstStyle/>
+          <a:p>
+            <a:pPr indent="0" marL="0">
+              <a:buNone/>
+            </a:pPr>
+            <a:r>
+              <a:rPr lang="en-US" sz="1400" dirty="0">
+                <a:solidFill>
+                  <a:srgbClr val="F3F7F9"/>
+                </a:solidFill>
+                <a:latin typeface="Georgia" pitchFamily="34" charset="0"/>
+                <a:ea typeface="Georgia" pitchFamily="34" charset="-122"/>
+                <a:cs typeface="Georgia" pitchFamily="34" charset="-120"/>
+              </a:rPr>
+              <a:t>▸  Readiness signals for leadership — not a consultant binder</a:t>
+            </a:r>
+            <a:endParaRPr lang="en-US" sz="1400" dirty="0"/>
+          </a:p>
+        </p:txBody>
+      </p:sp>
+      <p:sp>
+        <p:nvSpPr>
+          <p:cNvPr id="11" name="Text 7"/>
+          <p:cNvSpPr/>
+          <p:nvPr/>
+        </p:nvSpPr>
+        <p:spPr>
+          <a:xfrm>
+            <a:off x="548640" y="2971800"/>
+            <a:ext cx="8046720" cy="365760"/>
+          </a:xfrm>
+          <a:prstGeom prst="rect">
+            <a:avLst/>
+          </a:prstGeom>
+          <a:noFill/>
+          <a:ln/>
+        </p:spPr>
+        <p:txBody>
+          <a:bodyPr wrap="square" rtlCol="0" anchor="ctr"/>
+          <a:lstStyle/>
+          <a:p>
+            <a:pPr indent="0" marL="0">
+              <a:buNone/>
+            </a:pPr>
+            <a:r>
+              <a:rPr lang="en-US" sz="1400" dirty="0">
+                <a:solidFill>
+                  <a:srgbClr val="F3F7F9"/>
+                </a:solidFill>
+                <a:latin typeface="Georgia" pitchFamily="34" charset="0"/>
+                <a:ea typeface="Georgia" pitchFamily="34" charset="-122"/>
+                <a:cs typeface="Georgia" pitchFamily="34" charset="-120"/>
+              </a:rPr>
+              <a:t>▸  Saves as you go; sign-in syncs across devices</a:t>
+            </a:r>
+            <a:endParaRPr lang="en-US" sz="1400" dirty="0"/>
+          </a:p>
+        </p:txBody>
+      </p:sp>
+      <p:sp>
+        <p:nvSpPr>
+          <p:cNvPr id="12" name="Text 8"/>
+          <p:cNvSpPr/>
+          <p:nvPr/>
+        </p:nvSpPr>
+        <p:spPr>
+          <a:xfrm>
+            <a:off x="548640" y="3429000"/>
+            <a:ext cx="8046720" cy="365760"/>
+          </a:xfrm>
+          <a:prstGeom prst="rect">
+            <a:avLst/>
+          </a:prstGeom>
+          <a:noFill/>
+          <a:ln/>
+        </p:spPr>
+        <p:txBody>
+          <a:bodyPr wrap="square" rtlCol="0" anchor="ctr"/>
+          <a:lstStyle/>
+          <a:p>
+            <a:pPr indent="0" marL="0">
+              <a:buNone/>
+            </a:pPr>
+            <a:r>
+              <a:rPr lang="en-US" sz="1400" dirty="0">
+                <a:solidFill>
+                  <a:srgbClr val="F3F7F9"/>
+                </a:solidFill>
+                <a:latin typeface="Georgia" pitchFamily="34" charset="0"/>
+                <a:ea typeface="Georgia" pitchFamily="34" charset="-122"/>
+                <a:cs typeface="Georgia" pitchFamily="34" charset="-120"/>
+              </a:rPr>
+              <a:t>▸  Built for founders, CIOs, CTOs, and IT leads</a:t>
+            </a:r>
+            <a:endParaRPr lang="en-US" sz="1400" dirty="0"/>
           </a:p>
         </p:txBody>
       </p:sp>
@@ -4908,16 +5076,118 @@
           </a:prstGeom>
         </p:spPr>
       </p:pic>
-      <p:sp>
-        <p:nvSpPr>
-          <p:cNvPr id="3" name="Text 0"/>
+      <p:pic>
+        <p:nvPicPr>
+          <p:cNvPr id="3" name="Image 1" descr="/home/workdir/artifacts/oblig/public/oblig-icon.png">    </p:cNvPr>
+          <p:cNvPicPr>
+            <a:picLocks noChangeAspect="1"/>
+          </p:cNvPicPr>
+          <p:nvPr/>
+        </p:nvPicPr>
+        <p:blipFill>
+          <a:blip r:embed="rId2"/>
+          <a:stretch>
+            <a:fillRect/>
+          </a:stretch>
+        </p:blipFill>
+        <p:spPr>
+          <a:xfrm>
+            <a:off x="8275320" y="201168"/>
+            <a:ext cx="438912" cy="475488"/>
+          </a:xfrm>
+          <a:prstGeom prst="rect">
+            <a:avLst/>
+          </a:prstGeom>
+        </p:spPr>
+      </p:pic>
+      <p:sp>
+        <p:nvSpPr>
+          <p:cNvPr id="4" name="Text 0"/>
+          <p:cNvSpPr/>
+          <p:nvPr/>
+        </p:nvSpPr>
+        <p:spPr>
+          <a:xfrm>
+            <a:off x="457200" y="4709160"/>
+            <a:ext cx="4572000" cy="228600"/>
+          </a:xfrm>
+          <a:prstGeom prst="rect">
+            <a:avLst/>
+          </a:prstGeom>
+          <a:noFill/>
+          <a:ln/>
+        </p:spPr>
+        <p:txBody>
+          <a:bodyPr wrap="square" rtlCol="0" anchor="ctr"/>
+          <a:lstStyle/>
+          <a:p>
+            <a:pPr indent="0" marL="0">
+              <a:buNone/>
+            </a:pPr>
+            <a:r>
+              <a:rPr lang="en-US" sz="1000" dirty="0">
+                <a:solidFill>
+                  <a:srgbClr val="A8C0CC"/>
+                </a:solidFill>
+                <a:latin typeface="Georgia" pitchFamily="34" charset="0"/>
+                <a:ea typeface="Georgia" pitchFamily="34" charset="-122"/>
+                <a:cs typeface="Georgia" pitchFamily="34" charset="-120"/>
+              </a:rPr>
+              <a:t>Oblig  ·  Confidential</a:t>
+            </a:r>
+            <a:endParaRPr lang="en-US" sz="1000" dirty="0"/>
+          </a:p>
+        </p:txBody>
+      </p:sp>
+      <p:sp>
+        <p:nvSpPr>
+          <p:cNvPr id="5" name="Text 1"/>
+          <p:cNvSpPr/>
+          <p:nvPr/>
+        </p:nvSpPr>
+        <p:spPr>
+          <a:xfrm>
+            <a:off x="7772400" y="4709160"/>
+            <a:ext cx="914400" cy="228600"/>
+          </a:xfrm>
+          <a:prstGeom prst="rect">
+            <a:avLst/>
+          </a:prstGeom>
+          <a:noFill/>
+          <a:ln/>
+        </p:spPr>
+        <p:txBody>
+          <a:bodyPr wrap="square" rtlCol="0" anchor="ctr"/>
+          <a:lstStyle/>
+          <a:p>
+            <a:pPr algn="r" indent="0" marL="0">
+              <a:buNone/>
+            </a:pPr>
+            <a:r>
+              <a:rPr lang="en-US" sz="1000" dirty="0">
+                <a:solidFill>
+                  <a:srgbClr val="A8C0CC"/>
+                </a:solidFill>
+                <a:latin typeface="Georgia" pitchFamily="34" charset="0"/>
+                <a:ea typeface="Georgia" pitchFamily="34" charset="-122"/>
+                <a:cs typeface="Georgia" pitchFamily="34" charset="-120"/>
+              </a:rPr>
+              <a:t>6 / 11</a:t>
+            </a:r>
+            <a:endParaRPr lang="en-US" sz="1000" dirty="0"/>
+          </a:p>
+        </p:txBody>
+      </p:sp>
+      <p:sp>
+        <p:nvSpPr>
+          <p:cNvPr id="6" name="Text 2"/>
           <p:cNvSpPr/>
           <p:nvPr/>
         </p:nvSpPr>
         <p:spPr>
           <a:xfrm>
             <a:off x="548640" y="320040"/>
-            <a:ext cx="8229600" cy="274320"/>
+            <a:ext cx="7498080" cy="274320"/>
           </a:xfrm>
           <a:prstGeom prst="rect">
             <a:avLst/>
@@ -4937,9 +5207,9 @@
                 <a:solidFill>
                   <a:srgbClr val="E11D48"/>
                 </a:solidFill>
-                <a:latin typeface="Calibri" pitchFamily="34" charset="0"/>
-                <a:ea typeface="Calibri" pitchFamily="34" charset="-122"/>
-                <a:cs typeface="Calibri" pitchFamily="34" charset="-120"/>
+                <a:latin typeface="Georgia" pitchFamily="34" charset="0"/>
+                <a:ea typeface="Georgia" pitchFamily="34" charset="-122"/>
+                <a:cs typeface="Georgia" pitchFamily="34" charset="-120"/>
               </a:rPr>
               <a:t>CLOSE THE GAPS</a:t>
             </a:r>
@@ -4949,46 +5219,46 @@
       </p:sp>
       <p:sp>
         <p:nvSpPr>
-          <p:cNvPr id="4" name="Text 1"/>
+          <p:cNvPr id="7" name="Text 3"/>
           <p:cNvSpPr/>
           <p:nvPr/>
         </p:nvSpPr>
         <p:spPr>
           <a:xfrm>
             <a:off x="548640" y="685800"/>
-            <a:ext cx="8229600" cy="457200"/>
-          </a:xfrm>
-          <a:prstGeom prst="rect">
-            <a:avLst/>
-          </a:prstGeom>
-          <a:noFill/>
-          <a:ln/>
-        </p:spPr>
-        <p:txBody>
-          <a:bodyPr wrap="square" rtlCol="0" anchor="ctr"/>
-          <a:lstStyle/>
-          <a:p>
-            <a:pPr indent="0" marL="0">
-              <a:buNone/>
-            </a:pPr>
-            <a:r>
-              <a:rPr lang="en-US" sz="2800" b="1" dirty="0">
+            <a:ext cx="7498080" cy="457200"/>
+          </a:xfrm>
+          <a:prstGeom prst="rect">
+            <a:avLst/>
+          </a:prstGeom>
+          <a:noFill/>
+          <a:ln/>
+        </p:spPr>
+        <p:txBody>
+          <a:bodyPr wrap="square" rtlCol="0" anchor="ctr"/>
+          <a:lstStyle/>
+          <a:p>
+            <a:pPr indent="0" marL="0">
+              <a:buNone/>
+            </a:pPr>
+            <a:r>
+              <a:rPr lang="en-US" sz="2600" b="1" dirty="0">
                 <a:solidFill>
                   <a:srgbClr val="F3F7F9"/>
                 </a:solidFill>
-                <a:latin typeface="Calibri" pitchFamily="34" charset="0"/>
-                <a:ea typeface="Calibri" pitchFamily="34" charset="-122"/>
-                <a:cs typeface="Calibri" pitchFamily="34" charset="-120"/>
+                <a:latin typeface="Georgia" pitchFamily="34" charset="0"/>
+                <a:ea typeface="Georgia" pitchFamily="34" charset="-122"/>
+                <a:cs typeface="Georgia" pitchFamily="34" charset="-120"/>
               </a:rPr>
               <a:t>Policies and specialist guidance</a:t>
             </a:r>
-            <a:endParaRPr lang="en-US" sz="2800" dirty="0"/>
-          </a:p>
-        </p:txBody>
-      </p:sp>
-      <p:sp>
-        <p:nvSpPr>
-          <p:cNvPr id="5" name="Shape 2"/>
+            <a:endParaRPr lang="en-US" sz="2600" dirty="0"/>
+          </a:p>
+        </p:txBody>
+      </p:sp>
+      <p:sp>
+        <p:nvSpPr>
+          <p:cNvPr id="8" name="Shape 4"/>
           <p:cNvSpPr/>
           <p:nvPr/>
         </p:nvSpPr>
@@ -5012,7 +5282,7 @@
       </p:sp>
       <p:sp>
         <p:nvSpPr>
-          <p:cNvPr id="6" name="Text 3"/>
+          <p:cNvPr id="9" name="Text 5"/>
           <p:cNvSpPr/>
           <p:nvPr/>
         </p:nvSpPr>
@@ -5035,23 +5305,23 @@
               <a:buNone/>
             </a:pPr>
             <a:r>
-              <a:rPr lang="en-US" sz="1500" b="1" dirty="0">
+              <a:rPr lang="en-US" sz="1400" b="1" dirty="0">
                 <a:solidFill>
                   <a:srgbClr val="F3F7F9"/>
                 </a:solidFill>
-                <a:latin typeface="Calibri" pitchFamily="34" charset="0"/>
-                <a:ea typeface="Calibri" pitchFamily="34" charset="-122"/>
-                <a:cs typeface="Calibri" pitchFamily="34" charset="-120"/>
+                <a:latin typeface="Georgia" pitchFamily="34" charset="0"/>
+                <a:ea typeface="Georgia" pitchFamily="34" charset="-122"/>
+                <a:cs typeface="Georgia" pitchFamily="34" charset="-120"/>
               </a:rPr>
               <a:t>12 tech governance policy drafts</a:t>
             </a:r>
-            <a:endParaRPr lang="en-US" sz="1500" dirty="0"/>
-          </a:p>
-        </p:txBody>
-      </p:sp>
-      <p:sp>
-        <p:nvSpPr>
-          <p:cNvPr id="7" name="Text 4"/>
+            <a:endParaRPr lang="en-US" sz="1400" dirty="0"/>
+          </a:p>
+        </p:txBody>
+      </p:sp>
+      <p:sp>
+        <p:nvSpPr>
+          <p:cNvPr id="10" name="Text 6"/>
           <p:cNvSpPr/>
           <p:nvPr/>
         </p:nvSpPr>
@@ -5074,23 +5344,23 @@
               <a:buNone/>
             </a:pPr>
             <a:r>
-              <a:rPr lang="en-US" sz="1300" dirty="0">
+              <a:rPr lang="en-US" sz="1200" dirty="0">
                 <a:solidFill>
                   <a:srgbClr val="B8D4E3"/>
                 </a:solidFill>
-                <a:latin typeface="Calibri" pitchFamily="34" charset="0"/>
-                <a:ea typeface="Calibri" pitchFamily="34" charset="-122"/>
-                <a:cs typeface="Calibri" pitchFamily="34" charset="-120"/>
+                <a:latin typeface="Georgia" pitchFamily="34" charset="0"/>
+                <a:ea typeface="Georgia" pitchFamily="34" charset="-122"/>
+                <a:cs typeface="Georgia" pitchFamily="34" charset="-120"/>
               </a:rPr>
               <a:t>Vendor risk, data residency, incidents, AI, cloud, access, SDLC, logging, board reporting, and more — editable, exportable.</a:t>
             </a:r>
-            <a:endParaRPr lang="en-US" sz="1300" dirty="0"/>
-          </a:p>
-        </p:txBody>
-      </p:sp>
-      <p:sp>
-        <p:nvSpPr>
-          <p:cNvPr id="8" name="Shape 5"/>
+            <a:endParaRPr lang="en-US" sz="1200" dirty="0"/>
+          </a:p>
+        </p:txBody>
+      </p:sp>
+      <p:sp>
+        <p:nvSpPr>
+          <p:cNvPr id="11" name="Shape 7"/>
           <p:cNvSpPr/>
           <p:nvPr/>
         </p:nvSpPr>
@@ -5114,7 +5384,7 @@
       </p:sp>
       <p:sp>
         <p:nvSpPr>
-          <p:cNvPr id="9" name="Text 6"/>
+          <p:cNvPr id="12" name="Text 8"/>
           <p:cNvSpPr/>
           <p:nvPr/>
         </p:nvSpPr>
@@ -5137,23 +5407,23 @@
               <a:buNone/>
             </a:pPr>
             <a:r>
-              <a:rPr lang="en-US" sz="1500" b="1" dirty="0">
+              <a:rPr lang="en-US" sz="1400" b="1" dirty="0">
                 <a:solidFill>
                   <a:srgbClr val="F3F7F9"/>
                 </a:solidFill>
-                <a:latin typeface="Calibri" pitchFamily="34" charset="0"/>
-                <a:ea typeface="Calibri" pitchFamily="34" charset="-122"/>
-                <a:cs typeface="Calibri" pitchFamily="34" charset="-120"/>
+                <a:latin typeface="Georgia" pitchFamily="34" charset="0"/>
+                <a:ea typeface="Georgia" pitchFamily="34" charset="-122"/>
+                <a:cs typeface="Georgia" pitchFamily="34" charset="-120"/>
               </a:rPr>
               <a:t>AI Governance Copilot</a:t>
             </a:r>
-            <a:endParaRPr lang="en-US" sz="1500" dirty="0"/>
-          </a:p>
-        </p:txBody>
-      </p:sp>
-      <p:sp>
-        <p:nvSpPr>
-          <p:cNvPr id="10" name="Text 7"/>
+            <a:endParaRPr lang="en-US" sz="1400" dirty="0"/>
+          </a:p>
+        </p:txBody>
+      </p:sp>
+      <p:sp>
+        <p:nvSpPr>
+          <p:cNvPr id="13" name="Text 9"/>
           <p:cNvSpPr/>
           <p:nvPr/>
         </p:nvSpPr>
@@ -5176,23 +5446,23 @@
               <a:buNone/>
             </a:pPr>
             <a:r>
-              <a:rPr lang="en-US" sz="1300" dirty="0">
+              <a:rPr lang="en-US" sz="1200" dirty="0">
                 <a:solidFill>
                   <a:srgbClr val="B8D4E3"/>
                 </a:solidFill>
-                <a:latin typeface="Calibri" pitchFamily="34" charset="0"/>
-                <a:ea typeface="Calibri" pitchFamily="34" charset="-122"/>
-                <a:cs typeface="Calibri" pitchFamily="34" charset="-120"/>
+                <a:latin typeface="Georgia" pitchFamily="34" charset="0"/>
+                <a:ea typeface="Georgia" pitchFamily="34" charset="-122"/>
+                <a:cs typeface="Georgia" pitchFamily="34" charset="-120"/>
               </a:rPr>
               <a:t>APAC tech/data/AI specialist. Uses your readiness context when signed in. ISO vs checklist framing included.</a:t>
             </a:r>
-            <a:endParaRPr lang="en-US" sz="1300" dirty="0"/>
-          </a:p>
-        </p:txBody>
-      </p:sp>
-      <p:sp>
-        <p:nvSpPr>
-          <p:cNvPr id="11" name="Shape 8"/>
+            <a:endParaRPr lang="en-US" sz="1200" dirty="0"/>
+          </a:p>
+        </p:txBody>
+      </p:sp>
+      <p:sp>
+        <p:nvSpPr>
+          <p:cNvPr id="14" name="Shape 10"/>
           <p:cNvSpPr/>
           <p:nvPr/>
         </p:nvSpPr>
@@ -5216,7 +5486,7 @@
       </p:sp>
       <p:sp>
         <p:nvSpPr>
-          <p:cNvPr id="12" name="Text 9"/>
+          <p:cNvPr id="15" name="Text 11"/>
           <p:cNvSpPr/>
           <p:nvPr/>
         </p:nvSpPr>
@@ -5239,23 +5509,23 @@
               <a:buNone/>
             </a:pPr>
             <a:r>
-              <a:rPr lang="en-US" sz="1500" b="1" dirty="0">
+              <a:rPr lang="en-US" sz="1400" b="1" dirty="0">
                 <a:solidFill>
                   <a:srgbClr val="F3F7F9"/>
                 </a:solidFill>
-                <a:latin typeface="Calibri" pitchFamily="34" charset="0"/>
-                <a:ea typeface="Calibri" pitchFamily="34" charset="-122"/>
-                <a:cs typeface="Calibri" pitchFamily="34" charset="-120"/>
+                <a:latin typeface="Georgia" pitchFamily="34" charset="0"/>
+                <a:ea typeface="Georgia" pitchFamily="34" charset="-122"/>
+                <a:cs typeface="Georgia" pitchFamily="34" charset="-120"/>
               </a:rPr>
               <a:t>Risk &amp; roadmap</a:t>
             </a:r>
-            <a:endParaRPr lang="en-US" sz="1500" dirty="0"/>
-          </a:p>
-        </p:txBody>
-      </p:sp>
-      <p:sp>
-        <p:nvSpPr>
-          <p:cNvPr id="13" name="Text 10"/>
+            <a:endParaRPr lang="en-US" sz="1400" dirty="0"/>
+          </a:p>
+        </p:txBody>
+      </p:sp>
+      <p:sp>
+        <p:nvSpPr>
+          <p:cNvPr id="16" name="Text 12"/>
           <p:cNvSpPr/>
           <p:nvPr/>
         </p:nvSpPr>
@@ -5278,95 +5548,17 @@
               <a:buNone/>
             </a:pPr>
             <a:r>
-              <a:rPr lang="en-US" sz="1300" dirty="0">
+              <a:rPr lang="en-US" sz="1200" dirty="0">
                 <a:solidFill>
                   <a:srgbClr val="B8D4E3"/>
                 </a:solidFill>
-                <a:latin typeface="Calibri" pitchFamily="34" charset="0"/>
-                <a:ea typeface="Calibri" pitchFamily="34" charset="-122"/>
-                <a:cs typeface="Calibri" pitchFamily="34" charset="-120"/>
+                <a:latin typeface="Georgia" pitchFamily="34" charset="0"/>
+                <a:ea typeface="Georgia" pitchFamily="34" charset="-122"/>
+                <a:cs typeface="Georgia" pitchFamily="34" charset="-120"/>
               </a:rPr>
               <a:t>Track treatments and sequence improvements for the quarter — not a multi-year GRC fantasy.</a:t>
             </a:r>
-            <a:endParaRPr lang="en-US" sz="1300" dirty="0"/>
-          </a:p>
-        </p:txBody>
-      </p:sp>
-      <p:sp>
-        <p:nvSpPr>
-          <p:cNvPr id="14" name="Text 11"/>
-          <p:cNvSpPr/>
-          <p:nvPr/>
-        </p:nvSpPr>
-        <p:spPr>
-          <a:xfrm>
-            <a:off x="457200" y="4709160"/>
-            <a:ext cx="4572000" cy="228600"/>
-          </a:xfrm>
-          <a:prstGeom prst="rect">
-            <a:avLst/>
-          </a:prstGeom>
-          <a:noFill/>
-          <a:ln/>
-        </p:spPr>
-        <p:txBody>
-          <a:bodyPr wrap="square" rtlCol="0" anchor="ctr"/>
-          <a:lstStyle/>
-          <a:p>
-            <a:pPr indent="0" marL="0">
-              <a:buNone/>
-            </a:pPr>
-            <a:r>
-              <a:rPr lang="en-US" sz="1000" dirty="0">
-                <a:solidFill>
-                  <a:srgbClr val="A8C0CC"/>
-                </a:solidFill>
-                <a:latin typeface="Calibri" pitchFamily="34" charset="0"/>
-                <a:ea typeface="Calibri" pitchFamily="34" charset="-122"/>
-                <a:cs typeface="Calibri" pitchFamily="34" charset="-120"/>
-              </a:rPr>
-              <a:t>Oblig  ·  Confidential</a:t>
-            </a:r>
-            <a:endParaRPr lang="en-US" sz="1000" dirty="0"/>
-          </a:p>
-        </p:txBody>
-      </p:sp>
-      <p:sp>
-        <p:nvSpPr>
-          <p:cNvPr id="15" name="Text 12"/>
-          <p:cNvSpPr/>
-          <p:nvPr/>
-        </p:nvSpPr>
-        <p:spPr>
-          <a:xfrm>
-            <a:off x="7772400" y="4709160"/>
-            <a:ext cx="914400" cy="228600"/>
-          </a:xfrm>
-          <a:prstGeom prst="rect">
-            <a:avLst/>
-          </a:prstGeom>
-          <a:noFill/>
-          <a:ln/>
-        </p:spPr>
-        <p:txBody>
-          <a:bodyPr wrap="square" rtlCol="0" anchor="ctr"/>
-          <a:lstStyle/>
-          <a:p>
-            <a:pPr algn="r" indent="0" marL="0">
-              <a:buNone/>
-            </a:pPr>
-            <a:r>
-              <a:rPr lang="en-US" sz="1000" dirty="0">
-                <a:solidFill>
-                  <a:srgbClr val="A8C0CC"/>
-                </a:solidFill>
-                <a:latin typeface="Calibri" pitchFamily="34" charset="0"/>
-                <a:ea typeface="Calibri" pitchFamily="34" charset="-122"/>
-                <a:cs typeface="Calibri" pitchFamily="34" charset="-120"/>
-              </a:rPr>
-              <a:t>6 / 11</a:t>
-            </a:r>
-            <a:endParaRPr lang="en-US" sz="1000" dirty="0"/>
+            <a:endParaRPr lang="en-US" sz="1200" dirty="0"/>
           </a:p>
         </p:txBody>
       </p:sp>
@@ -5419,16 +5611,118 @@
           </a:prstGeom>
         </p:spPr>
       </p:pic>
-      <p:sp>
-        <p:nvSpPr>
-          <p:cNvPr id="3" name="Text 0"/>
+      <p:pic>
+        <p:nvPicPr>
+          <p:cNvPr id="3" name="Image 1" descr="/home/workdir/artifacts/oblig/public/oblig-icon.png">    </p:cNvPr>
+          <p:cNvPicPr>
+            <a:picLocks noChangeAspect="1"/>
+          </p:cNvPicPr>
+          <p:nvPr/>
+        </p:nvPicPr>
+        <p:blipFill>
+          <a:blip r:embed="rId2"/>
+          <a:stretch>
+            <a:fillRect/>
+          </a:stretch>
+        </p:blipFill>
+        <p:spPr>
+          <a:xfrm>
+            <a:off x="8275320" y="201168"/>
+            <a:ext cx="438912" cy="475488"/>
+          </a:xfrm>
+          <a:prstGeom prst="rect">
+            <a:avLst/>
+          </a:prstGeom>
+        </p:spPr>
+      </p:pic>
+      <p:sp>
+        <p:nvSpPr>
+          <p:cNvPr id="4" name="Text 0"/>
+          <p:cNvSpPr/>
+          <p:nvPr/>
+        </p:nvSpPr>
+        <p:spPr>
+          <a:xfrm>
+            <a:off x="457200" y="4709160"/>
+            <a:ext cx="4572000" cy="228600"/>
+          </a:xfrm>
+          <a:prstGeom prst="rect">
+            <a:avLst/>
+          </a:prstGeom>
+          <a:noFill/>
+          <a:ln/>
+        </p:spPr>
+        <p:txBody>
+          <a:bodyPr wrap="square" rtlCol="0" anchor="ctr"/>
+          <a:lstStyle/>
+          <a:p>
+            <a:pPr indent="0" marL="0">
+              <a:buNone/>
+            </a:pPr>
+            <a:r>
+              <a:rPr lang="en-US" sz="1000" dirty="0">
+                <a:solidFill>
+                  <a:srgbClr val="A8C0CC"/>
+                </a:solidFill>
+                <a:latin typeface="Georgia" pitchFamily="34" charset="0"/>
+                <a:ea typeface="Georgia" pitchFamily="34" charset="-122"/>
+                <a:cs typeface="Georgia" pitchFamily="34" charset="-120"/>
+              </a:rPr>
+              <a:t>Oblig  ·  Confidential</a:t>
+            </a:r>
+            <a:endParaRPr lang="en-US" sz="1000" dirty="0"/>
+          </a:p>
+        </p:txBody>
+      </p:sp>
+      <p:sp>
+        <p:nvSpPr>
+          <p:cNvPr id="5" name="Text 1"/>
+          <p:cNvSpPr/>
+          <p:nvPr/>
+        </p:nvSpPr>
+        <p:spPr>
+          <a:xfrm>
+            <a:off x="7772400" y="4709160"/>
+            <a:ext cx="914400" cy="228600"/>
+          </a:xfrm>
+          <a:prstGeom prst="rect">
+            <a:avLst/>
+          </a:prstGeom>
+          <a:noFill/>
+          <a:ln/>
+        </p:spPr>
+        <p:txBody>
+          <a:bodyPr wrap="square" rtlCol="0" anchor="ctr"/>
+          <a:lstStyle/>
+          <a:p>
+            <a:pPr algn="r" indent="0" marL="0">
+              <a:buNone/>
+            </a:pPr>
+            <a:r>
+              <a:rPr lang="en-US" sz="1000" dirty="0">
+                <a:solidFill>
+                  <a:srgbClr val="A8C0CC"/>
+                </a:solidFill>
+                <a:latin typeface="Georgia" pitchFamily="34" charset="0"/>
+                <a:ea typeface="Georgia" pitchFamily="34" charset="-122"/>
+                <a:cs typeface="Georgia" pitchFamily="34" charset="-120"/>
+              </a:rPr>
+              <a:t>7 / 11</a:t>
+            </a:r>
+            <a:endParaRPr lang="en-US" sz="1000" dirty="0"/>
+          </a:p>
+        </p:txBody>
+      </p:sp>
+      <p:sp>
+        <p:nvSpPr>
+          <p:cNvPr id="6" name="Text 2"/>
           <p:cNvSpPr/>
           <p:nvPr/>
         </p:nvSpPr>
         <p:spPr>
           <a:xfrm>
             <a:off x="548640" y="320040"/>
-            <a:ext cx="8229600" cy="274320"/>
+            <a:ext cx="7498080" cy="274320"/>
           </a:xfrm>
           <a:prstGeom prst="rect">
             <a:avLst/>
@@ -5448,9 +5742,9 @@
                 <a:solidFill>
                   <a:srgbClr val="E11D48"/>
                 </a:solidFill>
-                <a:latin typeface="Calibri" pitchFamily="34" charset="0"/>
-                <a:ea typeface="Calibri" pitchFamily="34" charset="-122"/>
-                <a:cs typeface="Calibri" pitchFamily="34" charset="-120"/>
+                <a:latin typeface="Georgia" pitchFamily="34" charset="0"/>
+                <a:ea typeface="Georgia" pitchFamily="34" charset="-122"/>
+                <a:cs typeface="Georgia" pitchFamily="34" charset="-120"/>
               </a:rPr>
               <a:t>COVERAGE</a:t>
             </a:r>
@@ -5460,85 +5754,85 @@
       </p:sp>
       <p:sp>
         <p:nvSpPr>
-          <p:cNvPr id="4" name="Text 1"/>
+          <p:cNvPr id="7" name="Text 3"/>
           <p:cNvSpPr/>
           <p:nvPr/>
         </p:nvSpPr>
         <p:spPr>
           <a:xfrm>
             <a:off x="548640" y="685800"/>
-            <a:ext cx="8229600" cy="457200"/>
-          </a:xfrm>
-          <a:prstGeom prst="rect">
-            <a:avLst/>
-          </a:prstGeom>
-          <a:noFill/>
-          <a:ln/>
-        </p:spPr>
-        <p:txBody>
-          <a:bodyPr wrap="square" rtlCol="0" anchor="ctr"/>
-          <a:lstStyle/>
-          <a:p>
-            <a:pPr indent="0" marL="0">
-              <a:buNone/>
-            </a:pPr>
-            <a:r>
-              <a:rPr lang="en-US" sz="2800" b="1" dirty="0">
+            <a:ext cx="7498080" cy="457200"/>
+          </a:xfrm>
+          <a:prstGeom prst="rect">
+            <a:avLst/>
+          </a:prstGeom>
+          <a:noFill/>
+          <a:ln/>
+        </p:spPr>
+        <p:txBody>
+          <a:bodyPr wrap="square" rtlCol="0" anchor="ctr"/>
+          <a:lstStyle/>
+          <a:p>
+            <a:pPr indent="0" marL="0">
+              <a:buNone/>
+            </a:pPr>
+            <a:r>
+              <a:rPr lang="en-US" sz="2600" b="1" dirty="0">
                 <a:solidFill>
                   <a:srgbClr val="F3F7F9"/>
                 </a:solidFill>
-                <a:latin typeface="Calibri" pitchFamily="34" charset="0"/>
-                <a:ea typeface="Calibri" pitchFamily="34" charset="-122"/>
-                <a:cs typeface="Calibri" pitchFamily="34" charset="-120"/>
+                <a:latin typeface="Georgia" pitchFamily="34" charset="0"/>
+                <a:ea typeface="Georgia" pitchFamily="34" charset="-122"/>
+                <a:cs typeface="Georgia" pitchFamily="34" charset="-120"/>
               </a:rPr>
               <a:t>Ten APAC markets</a:t>
             </a:r>
-            <a:endParaRPr lang="en-US" sz="2800" dirty="0"/>
-          </a:p>
-        </p:txBody>
-      </p:sp>
-      <p:sp>
-        <p:nvSpPr>
-          <p:cNvPr id="5" name="Text 2"/>
+            <a:endParaRPr lang="en-US" sz="2600" dirty="0"/>
+          </a:p>
+        </p:txBody>
+      </p:sp>
+      <p:sp>
+        <p:nvSpPr>
+          <p:cNvPr id="8" name="Text 4"/>
           <p:cNvSpPr/>
           <p:nvPr/>
         </p:nvSpPr>
         <p:spPr>
           <a:xfrm>
             <a:off x="548640" y="1188720"/>
-            <a:ext cx="8229600" cy="320040"/>
-          </a:xfrm>
-          <a:prstGeom prst="rect">
-            <a:avLst/>
-          </a:prstGeom>
-          <a:noFill/>
-          <a:ln/>
-        </p:spPr>
-        <p:txBody>
-          <a:bodyPr wrap="square" rtlCol="0" anchor="ctr"/>
-          <a:lstStyle/>
-          <a:p>
-            <a:pPr indent="0" marL="0">
-              <a:buNone/>
-            </a:pPr>
-            <a:r>
-              <a:rPr lang="en-US" sz="1400" dirty="0">
+            <a:ext cx="8046720" cy="320040"/>
+          </a:xfrm>
+          <a:prstGeom prst="rect">
+            <a:avLst/>
+          </a:prstGeom>
+          <a:noFill/>
+          <a:ln/>
+        </p:spPr>
+        <p:txBody>
+          <a:bodyPr wrap="square" rtlCol="0" anchor="ctr"/>
+          <a:lstStyle/>
+          <a:p>
+            <a:pPr indent="0" marL="0">
+              <a:buNone/>
+            </a:pPr>
+            <a:r>
+              <a:rPr lang="en-US" sz="1300" dirty="0">
                 <a:solidFill>
                   <a:srgbClr val="B8D4E3"/>
                 </a:solidFill>
-                <a:latin typeface="Calibri" pitchFamily="34" charset="0"/>
-                <a:ea typeface="Calibri" pitchFamily="34" charset="-122"/>
-                <a:cs typeface="Calibri" pitchFamily="34" charset="-120"/>
+                <a:latin typeface="Georgia" pitchFamily="34" charset="0"/>
+                <a:ea typeface="Georgia" pitchFamily="34" charset="-122"/>
+                <a:cs typeface="Georgia" pitchFamily="34" charset="-120"/>
               </a:rPr>
               <a:t>Technology, data, and AI governance — not payments licensing.</a:t>
             </a:r>
-            <a:endParaRPr lang="en-US" sz="1400" dirty="0"/>
-          </a:p>
-        </p:txBody>
-      </p:sp>
-      <p:sp>
-        <p:nvSpPr>
-          <p:cNvPr id="6" name="Shape 3"/>
+            <a:endParaRPr lang="en-US" sz="1300" dirty="0"/>
+          </a:p>
+        </p:txBody>
+      </p:sp>
+      <p:sp>
+        <p:nvSpPr>
+          <p:cNvPr id="9" name="Shape 5"/>
           <p:cNvSpPr/>
           <p:nvPr/>
         </p:nvSpPr>
@@ -5562,7 +5856,7 @@
       </p:sp>
       <p:sp>
         <p:nvSpPr>
-          <p:cNvPr id="7" name="Text 4"/>
+          <p:cNvPr id="10" name="Text 6"/>
           <p:cNvSpPr/>
           <p:nvPr/>
         </p:nvSpPr>
@@ -5585,23 +5879,23 @@
               <a:buNone/>
             </a:pPr>
             <a:r>
-              <a:rPr lang="en-US" sz="1200" b="1" dirty="0">
+              <a:rPr lang="en-US" sz="1100" b="1" dirty="0">
                 <a:solidFill>
                   <a:srgbClr val="F3F7F9"/>
                 </a:solidFill>
-                <a:latin typeface="Calibri" pitchFamily="34" charset="0"/>
-                <a:ea typeface="Calibri" pitchFamily="34" charset="-122"/>
-                <a:cs typeface="Calibri" pitchFamily="34" charset="-120"/>
+                <a:latin typeface="Georgia" pitchFamily="34" charset="0"/>
+                <a:ea typeface="Georgia" pitchFamily="34" charset="-122"/>
+                <a:cs typeface="Georgia" pitchFamily="34" charset="-120"/>
               </a:rPr>
               <a:t>Singapore</a:t>
             </a:r>
-            <a:endParaRPr lang="en-US" sz="1200" dirty="0"/>
-          </a:p>
-        </p:txBody>
-      </p:sp>
-      <p:sp>
-        <p:nvSpPr>
-          <p:cNvPr id="8" name="Text 5"/>
+            <a:endParaRPr lang="en-US" sz="1100" dirty="0"/>
+          </a:p>
+        </p:txBody>
+      </p:sp>
+      <p:sp>
+        <p:nvSpPr>
+          <p:cNvPr id="11" name="Text 7"/>
           <p:cNvSpPr/>
           <p:nvPr/>
         </p:nvSpPr>
@@ -5624,23 +5918,23 @@
               <a:buNone/>
             </a:pPr>
             <a:r>
-              <a:rPr lang="en-US" sz="1000" dirty="0">
+              <a:rPr lang="en-US" sz="900" dirty="0">
                 <a:solidFill>
                   <a:srgbClr val="A8C0CC"/>
                 </a:solidFill>
-                <a:latin typeface="Calibri" pitchFamily="34" charset="0"/>
-                <a:ea typeface="Calibri" pitchFamily="34" charset="-122"/>
-                <a:cs typeface="Calibri" pitchFamily="34" charset="-120"/>
+                <a:latin typeface="Georgia" pitchFamily="34" charset="0"/>
+                <a:ea typeface="Georgia" pitchFamily="34" charset="-122"/>
+                <a:cs typeface="Georgia" pitchFamily="34" charset="-120"/>
               </a:rPr>
               <a:t>MAS TRM / outsourcing</a:t>
             </a:r>
-            <a:endParaRPr lang="en-US" sz="1000" dirty="0"/>
-          </a:p>
-        </p:txBody>
-      </p:sp>
-      <p:sp>
-        <p:nvSpPr>
-          <p:cNvPr id="9" name="Shape 6"/>
+            <a:endParaRPr lang="en-US" sz="900" dirty="0"/>
+          </a:p>
+        </p:txBody>
+      </p:sp>
+      <p:sp>
+        <p:nvSpPr>
+          <p:cNvPr id="12" name="Shape 8"/>
           <p:cNvSpPr/>
           <p:nvPr/>
         </p:nvSpPr>
@@ -5664,7 +5958,7 @@
       </p:sp>
       <p:sp>
         <p:nvSpPr>
-          <p:cNvPr id="10" name="Text 7"/>
+          <p:cNvPr id="13" name="Text 9"/>
           <p:cNvSpPr/>
           <p:nvPr/>
         </p:nvSpPr>
@@ -5687,23 +5981,23 @@
               <a:buNone/>
             </a:pPr>
             <a:r>
-              <a:rPr lang="en-US" sz="1200" b="1" dirty="0">
+              <a:rPr lang="en-US" sz="1100" b="1" dirty="0">
                 <a:solidFill>
                   <a:srgbClr val="F3F7F9"/>
                 </a:solidFill>
-                <a:latin typeface="Calibri" pitchFamily="34" charset="0"/>
-                <a:ea typeface="Calibri" pitchFamily="34" charset="-122"/>
-                <a:cs typeface="Calibri" pitchFamily="34" charset="-120"/>
+                <a:latin typeface="Georgia" pitchFamily="34" charset="0"/>
+                <a:ea typeface="Georgia" pitchFamily="34" charset="-122"/>
+                <a:cs typeface="Georgia" pitchFamily="34" charset="-120"/>
               </a:rPr>
               <a:t>Malaysia</a:t>
             </a:r>
-            <a:endParaRPr lang="en-US" sz="1200" dirty="0"/>
-          </a:p>
-        </p:txBody>
-      </p:sp>
-      <p:sp>
-        <p:nvSpPr>
-          <p:cNvPr id="11" name="Text 8"/>
+            <a:endParaRPr lang="en-US" sz="1100" dirty="0"/>
+          </a:p>
+        </p:txBody>
+      </p:sp>
+      <p:sp>
+        <p:nvSpPr>
+          <p:cNvPr id="14" name="Text 10"/>
           <p:cNvSpPr/>
           <p:nvPr/>
         </p:nvSpPr>
@@ -5726,23 +6020,23 @@
               <a:buNone/>
             </a:pPr>
             <a:r>
-              <a:rPr lang="en-US" sz="1000" dirty="0">
+              <a:rPr lang="en-US" sz="900" dirty="0">
                 <a:solidFill>
                   <a:srgbClr val="A8C0CC"/>
                 </a:solidFill>
-                <a:latin typeface="Calibri" pitchFamily="34" charset="0"/>
-                <a:ea typeface="Calibri" pitchFamily="34" charset="-122"/>
-                <a:cs typeface="Calibri" pitchFamily="34" charset="-120"/>
+                <a:latin typeface="Georgia" pitchFamily="34" charset="0"/>
+                <a:ea typeface="Georgia" pitchFamily="34" charset="-122"/>
+                <a:cs typeface="Georgia" pitchFamily="34" charset="-120"/>
               </a:rPr>
               <a:t>BNM RMiT</a:t>
             </a:r>
-            <a:endParaRPr lang="en-US" sz="1000" dirty="0"/>
-          </a:p>
-        </p:txBody>
-      </p:sp>
-      <p:sp>
-        <p:nvSpPr>
-          <p:cNvPr id="12" name="Shape 9"/>
+            <a:endParaRPr lang="en-US" sz="900" dirty="0"/>
+          </a:p>
+        </p:txBody>
+      </p:sp>
+      <p:sp>
+        <p:nvSpPr>
+          <p:cNvPr id="15" name="Shape 11"/>
           <p:cNvSpPr/>
           <p:nvPr/>
         </p:nvSpPr>
@@ -5766,7 +6060,7 @@
       </p:sp>
       <p:sp>
         <p:nvSpPr>
-          <p:cNvPr id="13" name="Text 10"/>
+          <p:cNvPr id="16" name="Text 12"/>
           <p:cNvSpPr/>
           <p:nvPr/>
         </p:nvSpPr>
@@ -5789,23 +6083,23 @@
               <a:buNone/>
             </a:pPr>
             <a:r>
-              <a:rPr lang="en-US" sz="1200" b="1" dirty="0">
+              <a:rPr lang="en-US" sz="1100" b="1" dirty="0">
                 <a:solidFill>
                   <a:srgbClr val="F3F7F9"/>
                 </a:solidFill>
-                <a:latin typeface="Calibri" pitchFamily="34" charset="0"/>
-                <a:ea typeface="Calibri" pitchFamily="34" charset="-122"/>
-                <a:cs typeface="Calibri" pitchFamily="34" charset="-120"/>
+                <a:latin typeface="Georgia" pitchFamily="34" charset="0"/>
+                <a:ea typeface="Georgia" pitchFamily="34" charset="-122"/>
+                <a:cs typeface="Georgia" pitchFamily="34" charset="-120"/>
               </a:rPr>
               <a:t>Indonesia</a:t>
             </a:r>
-            <a:endParaRPr lang="en-US" sz="1200" dirty="0"/>
-          </a:p>
-        </p:txBody>
-      </p:sp>
-      <p:sp>
-        <p:nvSpPr>
-          <p:cNvPr id="14" name="Text 11"/>
+            <a:endParaRPr lang="en-US" sz="1100" dirty="0"/>
+          </a:p>
+        </p:txBody>
+      </p:sp>
+      <p:sp>
+        <p:nvSpPr>
+          <p:cNvPr id="17" name="Text 13"/>
           <p:cNvSpPr/>
           <p:nvPr/>
         </p:nvSpPr>
@@ -5828,23 +6122,23 @@
               <a:buNone/>
             </a:pPr>
             <a:r>
-              <a:rPr lang="en-US" sz="1000" dirty="0">
+              <a:rPr lang="en-US" sz="900" dirty="0">
                 <a:solidFill>
                   <a:srgbClr val="A8C0CC"/>
                 </a:solidFill>
-                <a:latin typeface="Calibri" pitchFamily="34" charset="0"/>
-                <a:ea typeface="Calibri" pitchFamily="34" charset="-122"/>
-                <a:cs typeface="Calibri" pitchFamily="34" charset="-120"/>
+                <a:latin typeface="Georgia" pitchFamily="34" charset="0"/>
+                <a:ea typeface="Georgia" pitchFamily="34" charset="-122"/>
+                <a:cs typeface="Georgia" pitchFamily="34" charset="-120"/>
               </a:rPr>
               <a:t>OJK tech &amp; digital</a:t>
             </a:r>
-            <a:endParaRPr lang="en-US" sz="1000" dirty="0"/>
-          </a:p>
-        </p:txBody>
-      </p:sp>
-      <p:sp>
-        <p:nvSpPr>
-          <p:cNvPr id="15" name="Shape 12"/>
+            <a:endParaRPr lang="en-US" sz="900" dirty="0"/>
+          </a:p>
+        </p:txBody>
+      </p:sp>
+      <p:sp>
+        <p:nvSpPr>
+          <p:cNvPr id="18" name="Shape 14"/>
           <p:cNvSpPr/>
           <p:nvPr/>
         </p:nvSpPr>
@@ -5868,7 +6162,7 @@
       </p:sp>
       <p:sp>
         <p:nvSpPr>
-          <p:cNvPr id="16" name="Text 13"/>
+          <p:cNvPr id="19" name="Text 15"/>
           <p:cNvSpPr/>
           <p:nvPr/>
         </p:nvSpPr>
@@ -5891,23 +6185,23 @@
               <a:buNone/>
             </a:pPr>
             <a:r>
-              <a:rPr lang="en-US" sz="1200" b="1" dirty="0">
+              <a:rPr lang="en-US" sz="1100" b="1" dirty="0">
                 <a:solidFill>
                   <a:srgbClr val="F3F7F9"/>
                 </a:solidFill>
-                <a:latin typeface="Calibri" pitchFamily="34" charset="0"/>
-                <a:ea typeface="Calibri" pitchFamily="34" charset="-122"/>
-                <a:cs typeface="Calibri" pitchFamily="34" charset="-120"/>
+                <a:latin typeface="Georgia" pitchFamily="34" charset="0"/>
+                <a:ea typeface="Georgia" pitchFamily="34" charset="-122"/>
+                <a:cs typeface="Georgia" pitchFamily="34" charset="-120"/>
               </a:rPr>
               <a:t>Philippines</a:t>
             </a:r>
-            <a:endParaRPr lang="en-US" sz="1200" dirty="0"/>
-          </a:p>
-        </p:txBody>
-      </p:sp>
-      <p:sp>
-        <p:nvSpPr>
-          <p:cNvPr id="17" name="Text 14"/>
+            <a:endParaRPr lang="en-US" sz="1100" dirty="0"/>
+          </a:p>
+        </p:txBody>
+      </p:sp>
+      <p:sp>
+        <p:nvSpPr>
+          <p:cNvPr id="20" name="Text 16"/>
           <p:cNvSpPr/>
           <p:nvPr/>
         </p:nvSpPr>
@@ -5930,23 +6224,23 @@
               <a:buNone/>
             </a:pPr>
             <a:r>
-              <a:rPr lang="en-US" sz="1000" dirty="0">
+              <a:rPr lang="en-US" sz="900" dirty="0">
                 <a:solidFill>
                   <a:srgbClr val="A8C0CC"/>
                 </a:solidFill>
-                <a:latin typeface="Calibri" pitchFamily="34" charset="0"/>
-                <a:ea typeface="Calibri" pitchFamily="34" charset="-122"/>
-                <a:cs typeface="Calibri" pitchFamily="34" charset="-120"/>
+                <a:latin typeface="Georgia" pitchFamily="34" charset="0"/>
+                <a:ea typeface="Georgia" pitchFamily="34" charset="-122"/>
+                <a:cs typeface="Georgia" pitchFamily="34" charset="-120"/>
               </a:rPr>
               <a:t>BSP tech / outsourcing</a:t>
             </a:r>
-            <a:endParaRPr lang="en-US" sz="1000" dirty="0"/>
-          </a:p>
-        </p:txBody>
-      </p:sp>
-      <p:sp>
-        <p:nvSpPr>
-          <p:cNvPr id="18" name="Shape 15"/>
+            <a:endParaRPr lang="en-US" sz="900" dirty="0"/>
+          </a:p>
+        </p:txBody>
+      </p:sp>
+      <p:sp>
+        <p:nvSpPr>
+          <p:cNvPr id="21" name="Shape 17"/>
           <p:cNvSpPr/>
           <p:nvPr/>
         </p:nvSpPr>
@@ -5970,7 +6264,7 @@
       </p:sp>
       <p:sp>
         <p:nvSpPr>
-          <p:cNvPr id="19" name="Text 16"/>
+          <p:cNvPr id="22" name="Text 18"/>
           <p:cNvSpPr/>
           <p:nvPr/>
         </p:nvSpPr>
@@ -5993,23 +6287,23 @@
               <a:buNone/>
             </a:pPr>
             <a:r>
-              <a:rPr lang="en-US" sz="1200" b="1" dirty="0">
+              <a:rPr lang="en-US" sz="1100" b="1" dirty="0">
                 <a:solidFill>
                   <a:srgbClr val="F3F7F9"/>
                 </a:solidFill>
-                <a:latin typeface="Calibri" pitchFamily="34" charset="0"/>
-                <a:ea typeface="Calibri" pitchFamily="34" charset="-122"/>
-                <a:cs typeface="Calibri" pitchFamily="34" charset="-120"/>
+                <a:latin typeface="Georgia" pitchFamily="34" charset="0"/>
+                <a:ea typeface="Georgia" pitchFamily="34" charset="-122"/>
+                <a:cs typeface="Georgia" pitchFamily="34" charset="-120"/>
               </a:rPr>
               <a:t>Cambodia</a:t>
             </a:r>
-            <a:endParaRPr lang="en-US" sz="1200" dirty="0"/>
-          </a:p>
-        </p:txBody>
-      </p:sp>
-      <p:sp>
-        <p:nvSpPr>
-          <p:cNvPr id="20" name="Text 17"/>
+            <a:endParaRPr lang="en-US" sz="1100" dirty="0"/>
+          </a:p>
+        </p:txBody>
+      </p:sp>
+      <p:sp>
+        <p:nvSpPr>
+          <p:cNvPr id="23" name="Text 19"/>
           <p:cNvSpPr/>
           <p:nvPr/>
         </p:nvSpPr>
@@ -6032,23 +6326,23 @@
               <a:buNone/>
             </a:pPr>
             <a:r>
-              <a:rPr lang="en-US" sz="1000" dirty="0">
+              <a:rPr lang="en-US" sz="900" dirty="0">
                 <a:solidFill>
                   <a:srgbClr val="A8C0CC"/>
                 </a:solidFill>
-                <a:latin typeface="Calibri" pitchFamily="34" charset="0"/>
-                <a:ea typeface="Calibri" pitchFamily="34" charset="-122"/>
-                <a:cs typeface="Calibri" pitchFamily="34" charset="-120"/>
+                <a:latin typeface="Georgia" pitchFamily="34" charset="0"/>
+                <a:ea typeface="Georgia" pitchFamily="34" charset="-122"/>
+                <a:cs typeface="Georgia" pitchFamily="34" charset="-120"/>
               </a:rPr>
               <a:t>NBC technology risk</a:t>
             </a:r>
-            <a:endParaRPr lang="en-US" sz="1000" dirty="0"/>
-          </a:p>
-        </p:txBody>
-      </p:sp>
-      <p:sp>
-        <p:nvSpPr>
-          <p:cNvPr id="21" name="Shape 18"/>
+            <a:endParaRPr lang="en-US" sz="900" dirty="0"/>
+          </a:p>
+        </p:txBody>
+      </p:sp>
+      <p:sp>
+        <p:nvSpPr>
+          <p:cNvPr id="24" name="Shape 20"/>
           <p:cNvSpPr/>
           <p:nvPr/>
         </p:nvSpPr>
@@ -6072,7 +6366,7 @@
       </p:sp>
       <p:sp>
         <p:nvSpPr>
-          <p:cNvPr id="22" name="Text 19"/>
+          <p:cNvPr id="25" name="Text 21"/>
           <p:cNvSpPr/>
           <p:nvPr/>
         </p:nvSpPr>
@@ -6095,23 +6389,23 @@
               <a:buNone/>
             </a:pPr>
             <a:r>
-              <a:rPr lang="en-US" sz="1200" b="1" dirty="0">
+              <a:rPr lang="en-US" sz="1100" b="1" dirty="0">
                 <a:solidFill>
                   <a:srgbClr val="F3F7F9"/>
                 </a:solidFill>
-                <a:latin typeface="Calibri" pitchFamily="34" charset="0"/>
-                <a:ea typeface="Calibri" pitchFamily="34" charset="-122"/>
-                <a:cs typeface="Calibri" pitchFamily="34" charset="-120"/>
+                <a:latin typeface="Georgia" pitchFamily="34" charset="0"/>
+                <a:ea typeface="Georgia" pitchFamily="34" charset="-122"/>
+                <a:cs typeface="Georgia" pitchFamily="34" charset="-120"/>
               </a:rPr>
               <a:t>Vietnam</a:t>
             </a:r>
-            <a:endParaRPr lang="en-US" sz="1200" dirty="0"/>
-          </a:p>
-        </p:txBody>
-      </p:sp>
-      <p:sp>
-        <p:nvSpPr>
-          <p:cNvPr id="23" name="Text 20"/>
+            <a:endParaRPr lang="en-US" sz="1100" dirty="0"/>
+          </a:p>
+        </p:txBody>
+      </p:sp>
+      <p:sp>
+        <p:nvSpPr>
+          <p:cNvPr id="26" name="Text 22"/>
           <p:cNvSpPr/>
           <p:nvPr/>
         </p:nvSpPr>
@@ -6134,23 +6428,23 @@
               <a:buNone/>
             </a:pPr>
             <a:r>
-              <a:rPr lang="en-US" sz="1000" dirty="0">
+              <a:rPr lang="en-US" sz="900" dirty="0">
                 <a:solidFill>
                   <a:srgbClr val="A8C0CC"/>
                 </a:solidFill>
-                <a:latin typeface="Calibri" pitchFamily="34" charset="0"/>
-                <a:ea typeface="Calibri" pitchFamily="34" charset="-122"/>
-                <a:cs typeface="Calibri" pitchFamily="34" charset="-120"/>
+                <a:latin typeface="Georgia" pitchFamily="34" charset="0"/>
+                <a:ea typeface="Georgia" pitchFamily="34" charset="-122"/>
+                <a:cs typeface="Georgia" pitchFamily="34" charset="-120"/>
               </a:rPr>
               <a:t>SBV (expanding maps)</a:t>
             </a:r>
-            <a:endParaRPr lang="en-US" sz="1000" dirty="0"/>
-          </a:p>
-        </p:txBody>
-      </p:sp>
-      <p:sp>
-        <p:nvSpPr>
-          <p:cNvPr id="24" name="Shape 21"/>
+            <a:endParaRPr lang="en-US" sz="900" dirty="0"/>
+          </a:p>
+        </p:txBody>
+      </p:sp>
+      <p:sp>
+        <p:nvSpPr>
+          <p:cNvPr id="27" name="Shape 23"/>
           <p:cNvSpPr/>
           <p:nvPr/>
         </p:nvSpPr>
@@ -6174,7 +6468,7 @@
       </p:sp>
       <p:sp>
         <p:nvSpPr>
-          <p:cNvPr id="25" name="Text 22"/>
+          <p:cNvPr id="28" name="Text 24"/>
           <p:cNvSpPr/>
           <p:nvPr/>
         </p:nvSpPr>
@@ -6197,23 +6491,23 @@
               <a:buNone/>
             </a:pPr>
             <a:r>
-              <a:rPr lang="en-US" sz="1200" b="1" dirty="0">
+              <a:rPr lang="en-US" sz="1100" b="1" dirty="0">
                 <a:solidFill>
                   <a:srgbClr val="F3F7F9"/>
                 </a:solidFill>
-                <a:latin typeface="Calibri" pitchFamily="34" charset="0"/>
-                <a:ea typeface="Calibri" pitchFamily="34" charset="-122"/>
-                <a:cs typeface="Calibri" pitchFamily="34" charset="-120"/>
+                <a:latin typeface="Georgia" pitchFamily="34" charset="0"/>
+                <a:ea typeface="Georgia" pitchFamily="34" charset="-122"/>
+                <a:cs typeface="Georgia" pitchFamily="34" charset="-120"/>
               </a:rPr>
               <a:t>Thailand</a:t>
             </a:r>
-            <a:endParaRPr lang="en-US" sz="1200" dirty="0"/>
-          </a:p>
-        </p:txBody>
-      </p:sp>
-      <p:sp>
-        <p:nvSpPr>
-          <p:cNvPr id="26" name="Text 23"/>
+            <a:endParaRPr lang="en-US" sz="1100" dirty="0"/>
+          </a:p>
+        </p:txBody>
+      </p:sp>
+      <p:sp>
+        <p:nvSpPr>
+          <p:cNvPr id="29" name="Text 25"/>
           <p:cNvSpPr/>
           <p:nvPr/>
         </p:nvSpPr>
@@ -6236,23 +6530,23 @@
               <a:buNone/>
             </a:pPr>
             <a:r>
-              <a:rPr lang="en-US" sz="1000" dirty="0">
+              <a:rPr lang="en-US" sz="900" dirty="0">
                 <a:solidFill>
                   <a:srgbClr val="A8C0CC"/>
                 </a:solidFill>
-                <a:latin typeface="Calibri" pitchFamily="34" charset="0"/>
-                <a:ea typeface="Calibri" pitchFamily="34" charset="-122"/>
-                <a:cs typeface="Calibri" pitchFamily="34" charset="-120"/>
+                <a:latin typeface="Georgia" pitchFamily="34" charset="0"/>
+                <a:ea typeface="Georgia" pitchFamily="34" charset="-122"/>
+                <a:cs typeface="Georgia" pitchFamily="34" charset="-120"/>
               </a:rPr>
               <a:t>BOT IT risk (expanding)</a:t>
             </a:r>
-            <a:endParaRPr lang="en-US" sz="1000" dirty="0"/>
-          </a:p>
-        </p:txBody>
-      </p:sp>
-      <p:sp>
-        <p:nvSpPr>
-          <p:cNvPr id="27" name="Shape 24"/>
+            <a:endParaRPr lang="en-US" sz="900" dirty="0"/>
+          </a:p>
+        </p:txBody>
+      </p:sp>
+      <p:sp>
+        <p:nvSpPr>
+          <p:cNvPr id="30" name="Shape 26"/>
           <p:cNvSpPr/>
           <p:nvPr/>
         </p:nvSpPr>
@@ -6276,7 +6570,7 @@
       </p:sp>
       <p:sp>
         <p:nvSpPr>
-          <p:cNvPr id="28" name="Text 25"/>
+          <p:cNvPr id="31" name="Text 27"/>
           <p:cNvSpPr/>
           <p:nvPr/>
         </p:nvSpPr>
@@ -6299,23 +6593,23 @@
               <a:buNone/>
             </a:pPr>
             <a:r>
-              <a:rPr lang="en-US" sz="1200" b="1" dirty="0">
+              <a:rPr lang="en-US" sz="1100" b="1" dirty="0">
                 <a:solidFill>
                   <a:srgbClr val="F3F7F9"/>
                 </a:solidFill>
-                <a:latin typeface="Calibri" pitchFamily="34" charset="0"/>
-                <a:ea typeface="Calibri" pitchFamily="34" charset="-122"/>
-                <a:cs typeface="Calibri" pitchFamily="34" charset="-120"/>
+                <a:latin typeface="Georgia" pitchFamily="34" charset="0"/>
+                <a:ea typeface="Georgia" pitchFamily="34" charset="-122"/>
+                <a:cs typeface="Georgia" pitchFamily="34" charset="-120"/>
               </a:rPr>
               <a:t>Japan</a:t>
             </a:r>
-            <a:endParaRPr lang="en-US" sz="1200" dirty="0"/>
-          </a:p>
-        </p:txBody>
-      </p:sp>
-      <p:sp>
-        <p:nvSpPr>
-          <p:cNvPr id="29" name="Text 26"/>
+            <a:endParaRPr lang="en-US" sz="1100" dirty="0"/>
+          </a:p>
+        </p:txBody>
+      </p:sp>
+      <p:sp>
+        <p:nvSpPr>
+          <p:cNvPr id="32" name="Text 28"/>
           <p:cNvSpPr/>
           <p:nvPr/>
         </p:nvSpPr>
@@ -6338,23 +6632,23 @@
               <a:buNone/>
             </a:pPr>
             <a:r>
-              <a:rPr lang="en-US" sz="1000" dirty="0">
+              <a:rPr lang="en-US" sz="900" dirty="0">
                 <a:solidFill>
                   <a:srgbClr val="A8C0CC"/>
                 </a:solidFill>
-                <a:latin typeface="Calibri" pitchFamily="34" charset="0"/>
-                <a:ea typeface="Calibri" pitchFamily="34" charset="-122"/>
-                <a:cs typeface="Calibri" pitchFamily="34" charset="-120"/>
+                <a:latin typeface="Georgia" pitchFamily="34" charset="0"/>
+                <a:ea typeface="Georgia" pitchFamily="34" charset="-122"/>
+                <a:cs typeface="Georgia" pitchFamily="34" charset="-120"/>
               </a:rPr>
               <a:t>FSA cyber guidance</a:t>
             </a:r>
-            <a:endParaRPr lang="en-US" sz="1000" dirty="0"/>
-          </a:p>
-        </p:txBody>
-      </p:sp>
-      <p:sp>
-        <p:nvSpPr>
-          <p:cNvPr id="30" name="Shape 27"/>
+            <a:endParaRPr lang="en-US" sz="900" dirty="0"/>
+          </a:p>
+        </p:txBody>
+      </p:sp>
+      <p:sp>
+        <p:nvSpPr>
+          <p:cNvPr id="33" name="Shape 29"/>
           <p:cNvSpPr/>
           <p:nvPr/>
         </p:nvSpPr>
@@ -6378,7 +6672,7 @@
       </p:sp>
       <p:sp>
         <p:nvSpPr>
-          <p:cNvPr id="31" name="Text 28"/>
+          <p:cNvPr id="34" name="Text 30"/>
           <p:cNvSpPr/>
           <p:nvPr/>
         </p:nvSpPr>
@@ -6401,23 +6695,23 @@
               <a:buNone/>
             </a:pPr>
             <a:r>
-              <a:rPr lang="en-US" sz="1200" b="1" dirty="0">
+              <a:rPr lang="en-US" sz="1100" b="1" dirty="0">
                 <a:solidFill>
                   <a:srgbClr val="F3F7F9"/>
                 </a:solidFill>
-                <a:latin typeface="Calibri" pitchFamily="34" charset="0"/>
-                <a:ea typeface="Calibri" pitchFamily="34" charset="-122"/>
-                <a:cs typeface="Calibri" pitchFamily="34" charset="-120"/>
+                <a:latin typeface="Georgia" pitchFamily="34" charset="0"/>
+                <a:ea typeface="Georgia" pitchFamily="34" charset="-122"/>
+                <a:cs typeface="Georgia" pitchFamily="34" charset="-120"/>
               </a:rPr>
               <a:t>South Korea</a:t>
             </a:r>
-            <a:endParaRPr lang="en-US" sz="1200" dirty="0"/>
-          </a:p>
-        </p:txBody>
-      </p:sp>
-      <p:sp>
-        <p:nvSpPr>
-          <p:cNvPr id="32" name="Text 29"/>
+            <a:endParaRPr lang="en-US" sz="1100" dirty="0"/>
+          </a:p>
+        </p:txBody>
+      </p:sp>
+      <p:sp>
+        <p:nvSpPr>
+          <p:cNvPr id="35" name="Text 31"/>
           <p:cNvSpPr/>
           <p:nvPr/>
         </p:nvSpPr>
@@ -6440,23 +6734,23 @@
               <a:buNone/>
             </a:pPr>
             <a:r>
-              <a:rPr lang="en-US" sz="1000" dirty="0">
+              <a:rPr lang="en-US" sz="900" dirty="0">
                 <a:solidFill>
                   <a:srgbClr val="A8C0CC"/>
                 </a:solidFill>
-                <a:latin typeface="Calibri" pitchFamily="34" charset="0"/>
-                <a:ea typeface="Calibri" pitchFamily="34" charset="-122"/>
-                <a:cs typeface="Calibri" pitchFamily="34" charset="-120"/>
+                <a:latin typeface="Georgia" pitchFamily="34" charset="0"/>
+                <a:ea typeface="Georgia" pitchFamily="34" charset="-122"/>
+                <a:cs typeface="Georgia" pitchFamily="34" charset="-120"/>
               </a:rPr>
               <a:t>FSC / related</a:t>
             </a:r>
-            <a:endParaRPr lang="en-US" sz="1000" dirty="0"/>
-          </a:p>
-        </p:txBody>
-      </p:sp>
-      <p:sp>
-        <p:nvSpPr>
-          <p:cNvPr id="33" name="Shape 30"/>
+            <a:endParaRPr lang="en-US" sz="900" dirty="0"/>
+          </a:p>
+        </p:txBody>
+      </p:sp>
+      <p:sp>
+        <p:nvSpPr>
+          <p:cNvPr id="36" name="Shape 32"/>
           <p:cNvSpPr/>
           <p:nvPr/>
         </p:nvSpPr>
@@ -6480,7 +6774,7 @@
       </p:sp>
       <p:sp>
         <p:nvSpPr>
-          <p:cNvPr id="34" name="Text 31"/>
+          <p:cNvPr id="37" name="Text 33"/>
           <p:cNvSpPr/>
           <p:nvPr/>
         </p:nvSpPr>
@@ -6503,23 +6797,23 @@
               <a:buNone/>
             </a:pPr>
             <a:r>
-              <a:rPr lang="en-US" sz="1200" b="1" dirty="0">
+              <a:rPr lang="en-US" sz="1100" b="1" dirty="0">
                 <a:solidFill>
                   <a:srgbClr val="F3F7F9"/>
                 </a:solidFill>
-                <a:latin typeface="Calibri" pitchFamily="34" charset="0"/>
-                <a:ea typeface="Calibri" pitchFamily="34" charset="-122"/>
-                <a:cs typeface="Calibri" pitchFamily="34" charset="-120"/>
+                <a:latin typeface="Georgia" pitchFamily="34" charset="0"/>
+                <a:ea typeface="Georgia" pitchFamily="34" charset="-122"/>
+                <a:cs typeface="Georgia" pitchFamily="34" charset="-120"/>
               </a:rPr>
               <a:t>Taiwan</a:t>
             </a:r>
-            <a:endParaRPr lang="en-US" sz="1200" dirty="0"/>
-          </a:p>
-        </p:txBody>
-      </p:sp>
-      <p:sp>
-        <p:nvSpPr>
-          <p:cNvPr id="35" name="Text 32"/>
+            <a:endParaRPr lang="en-US" sz="1100" dirty="0"/>
+          </a:p>
+        </p:txBody>
+      </p:sp>
+      <p:sp>
+        <p:nvSpPr>
+          <p:cNvPr id="38" name="Text 34"/>
           <p:cNvSpPr/>
           <p:nvPr/>
         </p:nvSpPr>
@@ -6542,95 +6836,17 @@
               <a:buNone/>
             </a:pPr>
             <a:r>
-              <a:rPr lang="en-US" sz="1000" dirty="0">
+              <a:rPr lang="en-US" sz="900" dirty="0">
                 <a:solidFill>
                   <a:srgbClr val="A8C0CC"/>
                 </a:solidFill>
-                <a:latin typeface="Calibri" pitchFamily="34" charset="0"/>
-                <a:ea typeface="Calibri" pitchFamily="34" charset="-122"/>
-                <a:cs typeface="Calibri" pitchFamily="34" charset="-120"/>
+                <a:latin typeface="Georgia" pitchFamily="34" charset="0"/>
+                <a:ea typeface="Georgia" pitchFamily="34" charset="-122"/>
+                <a:cs typeface="Georgia" pitchFamily="34" charset="-120"/>
               </a:rPr>
               <a:t>FSC outsourcing</a:t>
             </a:r>
-            <a:endParaRPr lang="en-US" sz="1000" dirty="0"/>
-          </a:p>
-        </p:txBody>
-      </p:sp>
-      <p:sp>
-        <p:nvSpPr>
-          <p:cNvPr id="36" name="Text 33"/>
-          <p:cNvSpPr/>
-          <p:nvPr/>
-        </p:nvSpPr>
-        <p:spPr>
-          <a:xfrm>
-            <a:off x="457200" y="4709160"/>
-            <a:ext cx="4572000" cy="228600"/>
-          </a:xfrm>
-          <a:prstGeom prst="rect">
-            <a:avLst/>
-          </a:prstGeom>
-          <a:noFill/>
-          <a:ln/>
-        </p:spPr>
-        <p:txBody>
-          <a:bodyPr wrap="square" rtlCol="0" anchor="ctr"/>
-          <a:lstStyle/>
-          <a:p>
-            <a:pPr indent="0" marL="0">
-              <a:buNone/>
-            </a:pPr>
-            <a:r>
-              <a:rPr lang="en-US" sz="1000" dirty="0">
-                <a:solidFill>
-                  <a:srgbClr val="A8C0CC"/>
-                </a:solidFill>
-                <a:latin typeface="Calibri" pitchFamily="34" charset="0"/>
-                <a:ea typeface="Calibri" pitchFamily="34" charset="-122"/>
-                <a:cs typeface="Calibri" pitchFamily="34" charset="-120"/>
-              </a:rPr>
-              <a:t>Oblig  ·  Confidential</a:t>
-            </a:r>
-            <a:endParaRPr lang="en-US" sz="1000" dirty="0"/>
-          </a:p>
-        </p:txBody>
-      </p:sp>
-      <p:sp>
-        <p:nvSpPr>
-          <p:cNvPr id="37" name="Text 34"/>
-          <p:cNvSpPr/>
-          <p:nvPr/>
-        </p:nvSpPr>
-        <p:spPr>
-          <a:xfrm>
-            <a:off x="7772400" y="4709160"/>
-            <a:ext cx="914400" cy="228600"/>
-          </a:xfrm>
-          <a:prstGeom prst="rect">
-            <a:avLst/>
-          </a:prstGeom>
-          <a:noFill/>
-          <a:ln/>
-        </p:spPr>
-        <p:txBody>
-          <a:bodyPr wrap="square" rtlCol="0" anchor="ctr"/>
-          <a:lstStyle/>
-          <a:p>
-            <a:pPr algn="r" indent="0" marL="0">
-              <a:buNone/>
-            </a:pPr>
-            <a:r>
-              <a:rPr lang="en-US" sz="1000" dirty="0">
-                <a:solidFill>
-                  <a:srgbClr val="A8C0CC"/>
-                </a:solidFill>
-                <a:latin typeface="Calibri" pitchFamily="34" charset="0"/>
-                <a:ea typeface="Calibri" pitchFamily="34" charset="-122"/>
-                <a:cs typeface="Calibri" pitchFamily="34" charset="-120"/>
-              </a:rPr>
-              <a:t>7 / 11</a:t>
-            </a:r>
-            <a:endParaRPr lang="en-US" sz="1000" dirty="0"/>
+            <a:endParaRPr lang="en-US" sz="900" dirty="0"/>
           </a:p>
         </p:txBody>
       </p:sp>
@@ -6683,16 +6899,118 @@
           </a:prstGeom>
         </p:spPr>
       </p:pic>
-      <p:sp>
-        <p:nvSpPr>
-          <p:cNvPr id="3" name="Text 0"/>
+      <p:pic>
+        <p:nvPicPr>
+          <p:cNvPr id="3" name="Image 1" descr="/home/workdir/artifacts/oblig/public/oblig-icon.png">    </p:cNvPr>
+          <p:cNvPicPr>
+            <a:picLocks noChangeAspect="1"/>
+          </p:cNvPicPr>
+          <p:nvPr/>
+        </p:nvPicPr>
+        <p:blipFill>
+          <a:blip r:embed="rId2"/>
+          <a:stretch>
+            <a:fillRect/>
+          </a:stretch>
+        </p:blipFill>
+        <p:spPr>
+          <a:xfrm>
+            <a:off x="8275320" y="201168"/>
+            <a:ext cx="438912" cy="475488"/>
+          </a:xfrm>
+          <a:prstGeom prst="rect">
+            <a:avLst/>
+          </a:prstGeom>
+        </p:spPr>
+      </p:pic>
+      <p:sp>
+        <p:nvSpPr>
+          <p:cNvPr id="4" name="Text 0"/>
+          <p:cNvSpPr/>
+          <p:nvPr/>
+        </p:nvSpPr>
+        <p:spPr>
+          <a:xfrm>
+            <a:off x="457200" y="4709160"/>
+            <a:ext cx="4572000" cy="228600"/>
+          </a:xfrm>
+          <a:prstGeom prst="rect">
+            <a:avLst/>
+          </a:prstGeom>
+          <a:noFill/>
+          <a:ln/>
+        </p:spPr>
+        <p:txBody>
+          <a:bodyPr wrap="square" rtlCol="0" anchor="ctr"/>
+          <a:lstStyle/>
+          <a:p>
+            <a:pPr indent="0" marL="0">
+              <a:buNone/>
+            </a:pPr>
+            <a:r>
+              <a:rPr lang="en-US" sz="1000" dirty="0">
+                <a:solidFill>
+                  <a:srgbClr val="A8C0CC"/>
+                </a:solidFill>
+                <a:latin typeface="Georgia" pitchFamily="34" charset="0"/>
+                <a:ea typeface="Georgia" pitchFamily="34" charset="-122"/>
+                <a:cs typeface="Georgia" pitchFamily="34" charset="-120"/>
+              </a:rPr>
+              <a:t>Oblig  ·  Confidential</a:t>
+            </a:r>
+            <a:endParaRPr lang="en-US" sz="1000" dirty="0"/>
+          </a:p>
+        </p:txBody>
+      </p:sp>
+      <p:sp>
+        <p:nvSpPr>
+          <p:cNvPr id="5" name="Text 1"/>
+          <p:cNvSpPr/>
+          <p:nvPr/>
+        </p:nvSpPr>
+        <p:spPr>
+          <a:xfrm>
+            <a:off x="7772400" y="4709160"/>
+            <a:ext cx="914400" cy="228600"/>
+          </a:xfrm>
+          <a:prstGeom prst="rect">
+            <a:avLst/>
+          </a:prstGeom>
+          <a:noFill/>
+          <a:ln/>
+        </p:spPr>
+        <p:txBody>
+          <a:bodyPr wrap="square" rtlCol="0" anchor="ctr"/>
+          <a:lstStyle/>
+          <a:p>
+            <a:pPr algn="r" indent="0" marL="0">
+              <a:buNone/>
+            </a:pPr>
+            <a:r>
+              <a:rPr lang="en-US" sz="1000" dirty="0">
+                <a:solidFill>
+                  <a:srgbClr val="A8C0CC"/>
+                </a:solidFill>
+                <a:latin typeface="Georgia" pitchFamily="34" charset="0"/>
+                <a:ea typeface="Georgia" pitchFamily="34" charset="-122"/>
+                <a:cs typeface="Georgia" pitchFamily="34" charset="-120"/>
+              </a:rPr>
+              <a:t>8 / 11</a:t>
+            </a:r>
+            <a:endParaRPr lang="en-US" sz="1000" dirty="0"/>
+          </a:p>
+        </p:txBody>
+      </p:sp>
+      <p:sp>
+        <p:nvSpPr>
+          <p:cNvPr id="6" name="Text 2"/>
           <p:cNvSpPr/>
           <p:nvPr/>
         </p:nvSpPr>
         <p:spPr>
           <a:xfrm>
             <a:off x="548640" y="320040"/>
-            <a:ext cx="8229600" cy="274320"/>
+            <a:ext cx="7498080" cy="274320"/>
           </a:xfrm>
           <a:prstGeom prst="rect">
             <a:avLst/>
@@ -6712,9 +7030,9 @@
                 <a:solidFill>
                   <a:srgbClr val="E11D48"/>
                 </a:solidFill>
-                <a:latin typeface="Calibri" pitchFamily="34" charset="0"/>
-                <a:ea typeface="Calibri" pitchFamily="34" charset="-122"/>
-                <a:cs typeface="Calibri" pitchFamily="34" charset="-120"/>
+                <a:latin typeface="Georgia" pitchFamily="34" charset="0"/>
+                <a:ea typeface="Georgia" pitchFamily="34" charset="-122"/>
+                <a:cs typeface="Georgia" pitchFamily="34" charset="-120"/>
               </a:rPr>
               <a:t>WHY OBLIG</a:t>
             </a:r>
@@ -6724,46 +7042,46 @@
       </p:sp>
       <p:sp>
         <p:nvSpPr>
-          <p:cNvPr id="4" name="Text 1"/>
+          <p:cNvPr id="7" name="Text 3"/>
           <p:cNvSpPr/>
           <p:nvPr/>
         </p:nvSpPr>
         <p:spPr>
           <a:xfrm>
             <a:off x="548640" y="685800"/>
-            <a:ext cx="8229600" cy="457200"/>
-          </a:xfrm>
-          <a:prstGeom prst="rect">
-            <a:avLst/>
-          </a:prstGeom>
-          <a:noFill/>
-          <a:ln/>
-        </p:spPr>
-        <p:txBody>
-          <a:bodyPr wrap="square" rtlCol="0" anchor="ctr"/>
-          <a:lstStyle/>
-          <a:p>
-            <a:pPr indent="0" marL="0">
-              <a:buNone/>
-            </a:pPr>
-            <a:r>
-              <a:rPr lang="en-US" sz="2600" b="1" dirty="0">
+            <a:ext cx="7498080" cy="457200"/>
+          </a:xfrm>
+          <a:prstGeom prst="rect">
+            <a:avLst/>
+          </a:prstGeom>
+          <a:noFill/>
+          <a:ln/>
+        </p:spPr>
+        <p:txBody>
+          <a:bodyPr wrap="square" rtlCol="0" anchor="ctr"/>
+          <a:lstStyle/>
+          <a:p>
+            <a:pPr indent="0" marL="0">
+              <a:buNone/>
+            </a:pPr>
+            <a:r>
+              <a:rPr lang="en-US" sz="2400" b="1" dirty="0">
                 <a:solidFill>
                   <a:srgbClr val="F3F7F9"/>
                 </a:solidFill>
-                <a:latin typeface="Calibri" pitchFamily="34" charset="0"/>
-                <a:ea typeface="Calibri" pitchFamily="34" charset="-122"/>
-                <a:cs typeface="Calibri" pitchFamily="34" charset="-120"/>
+                <a:latin typeface="Georgia" pitchFamily="34" charset="0"/>
+                <a:ea typeface="Georgia" pitchFamily="34" charset="-122"/>
+                <a:cs typeface="Georgia" pitchFamily="34" charset="-120"/>
               </a:rPr>
               <a:t>Not another generic GRC checklist</a:t>
             </a:r>
-            <a:endParaRPr lang="en-US" sz="2600" dirty="0"/>
-          </a:p>
-        </p:txBody>
-      </p:sp>
-      <p:sp>
-        <p:nvSpPr>
-          <p:cNvPr id="5" name="Text 2"/>
+            <a:endParaRPr lang="en-US" sz="2400" dirty="0"/>
+          </a:p>
+        </p:txBody>
+      </p:sp>
+      <p:sp>
+        <p:nvSpPr>
+          <p:cNvPr id="8" name="Text 4"/>
           <p:cNvSpPr/>
           <p:nvPr/>
         </p:nvSpPr>
@@ -6786,23 +7104,23 @@
               <a:buNone/>
             </a:pPr>
             <a:r>
-              <a:rPr lang="en-US" sz="1400" b="1" dirty="0">
+              <a:rPr lang="en-US" sz="1300" b="1" dirty="0">
                 <a:solidFill>
                   <a:srgbClr val="E11D48"/>
                 </a:solidFill>
-                <a:latin typeface="Calibri" pitchFamily="34" charset="0"/>
-                <a:ea typeface="Calibri" pitchFamily="34" charset="-122"/>
-                <a:cs typeface="Calibri" pitchFamily="34" charset="-120"/>
+                <a:latin typeface="Georgia" pitchFamily="34" charset="0"/>
+                <a:ea typeface="Georgia" pitchFamily="34" charset="-122"/>
+                <a:cs typeface="Georgia" pitchFamily="34" charset="-120"/>
               </a:rPr>
               <a:t>Focus</a:t>
             </a:r>
-            <a:endParaRPr lang="en-US" sz="1400" dirty="0"/>
-          </a:p>
-        </p:txBody>
-      </p:sp>
-      <p:sp>
-        <p:nvSpPr>
-          <p:cNvPr id="6" name="Text 3"/>
+            <a:endParaRPr lang="en-US" sz="1300" dirty="0"/>
+          </a:p>
+        </p:txBody>
+      </p:sp>
+      <p:sp>
+        <p:nvSpPr>
+          <p:cNvPr id="9" name="Text 5"/>
           <p:cNvSpPr/>
           <p:nvPr/>
         </p:nvSpPr>
@@ -6825,23 +7143,23 @@
               <a:buNone/>
             </a:pPr>
             <a:r>
-              <a:rPr lang="en-US" sz="1400" dirty="0">
+              <a:rPr lang="en-US" sz="1300" dirty="0">
                 <a:solidFill>
                   <a:srgbClr val="F3F7F9"/>
                 </a:solidFill>
-                <a:latin typeface="Calibri" pitchFamily="34" charset="0"/>
-                <a:ea typeface="Calibri" pitchFamily="34" charset="-122"/>
-                <a:cs typeface="Calibri" pitchFamily="34" charset="-120"/>
+                <a:latin typeface="Georgia" pitchFamily="34" charset="0"/>
+                <a:ea typeface="Georgia" pitchFamily="34" charset="-122"/>
+                <a:cs typeface="Georgia" pitchFamily="34" charset="-120"/>
               </a:rPr>
               <a:t>APAC tech / data / AI governance for fintechs</a:t>
             </a:r>
-            <a:endParaRPr lang="en-US" sz="1400" dirty="0"/>
-          </a:p>
-        </p:txBody>
-      </p:sp>
-      <p:sp>
-        <p:nvSpPr>
-          <p:cNvPr id="7" name="Text 4"/>
+            <a:endParaRPr lang="en-US" sz="1300" dirty="0"/>
+          </a:p>
+        </p:txBody>
+      </p:sp>
+      <p:sp>
+        <p:nvSpPr>
+          <p:cNvPr id="10" name="Text 6"/>
           <p:cNvSpPr/>
           <p:nvPr/>
         </p:nvSpPr>
@@ -6864,23 +7182,23 @@
               <a:buNone/>
             </a:pPr>
             <a:r>
-              <a:rPr lang="en-US" sz="1400" b="1" dirty="0">
+              <a:rPr lang="en-US" sz="1300" b="1" dirty="0">
                 <a:solidFill>
                   <a:srgbClr val="E11D48"/>
                 </a:solidFill>
-                <a:latin typeface="Calibri" pitchFamily="34" charset="0"/>
-                <a:ea typeface="Calibri" pitchFamily="34" charset="-122"/>
-                <a:cs typeface="Calibri" pitchFamily="34" charset="-120"/>
+                <a:latin typeface="Georgia" pitchFamily="34" charset="0"/>
+                <a:ea typeface="Georgia" pitchFamily="34" charset="-122"/>
+                <a:cs typeface="Georgia" pitchFamily="34" charset="-120"/>
               </a:rPr>
               <a:t>Depth</a:t>
             </a:r>
-            <a:endParaRPr lang="en-US" sz="1400" dirty="0"/>
-          </a:p>
-        </p:txBody>
-      </p:sp>
-      <p:sp>
-        <p:nvSpPr>
-          <p:cNvPr id="8" name="Text 5"/>
+            <a:endParaRPr lang="en-US" sz="1300" dirty="0"/>
+          </a:p>
+        </p:txBody>
+      </p:sp>
+      <p:sp>
+        <p:nvSpPr>
+          <p:cNvPr id="11" name="Text 7"/>
           <p:cNvSpPr/>
           <p:nvPr/>
         </p:nvSpPr>
@@ -6903,23 +7221,23 @@
               <a:buNone/>
             </a:pPr>
             <a:r>
-              <a:rPr lang="en-US" sz="1400" dirty="0">
+              <a:rPr lang="en-US" sz="1300" dirty="0">
                 <a:solidFill>
                   <a:srgbClr val="F3F7F9"/>
                 </a:solidFill>
-                <a:latin typeface="Calibri" pitchFamily="34" charset="0"/>
-                <a:ea typeface="Calibri" pitchFamily="34" charset="-122"/>
-                <a:cs typeface="Calibri" pitchFamily="34" charset="-120"/>
+                <a:latin typeface="Georgia" pitchFamily="34" charset="0"/>
+                <a:ea typeface="Georgia" pitchFamily="34" charset="-122"/>
+                <a:cs typeface="Georgia" pitchFamily="34" charset="-120"/>
               </a:rPr>
               <a:t>MAS- and BNM-shaped themes buyers actually test</a:t>
             </a:r>
-            <a:endParaRPr lang="en-US" sz="1400" dirty="0"/>
-          </a:p>
-        </p:txBody>
-      </p:sp>
-      <p:sp>
-        <p:nvSpPr>
-          <p:cNvPr id="9" name="Text 6"/>
+            <a:endParaRPr lang="en-US" sz="1300" dirty="0"/>
+          </a:p>
+        </p:txBody>
+      </p:sp>
+      <p:sp>
+        <p:nvSpPr>
+          <p:cNvPr id="12" name="Text 8"/>
           <p:cNvSpPr/>
           <p:nvPr/>
         </p:nvSpPr>
@@ -6942,23 +7260,23 @@
               <a:buNone/>
             </a:pPr>
             <a:r>
-              <a:rPr lang="en-US" sz="1400" b="1" dirty="0">
+              <a:rPr lang="en-US" sz="1300" b="1" dirty="0">
                 <a:solidFill>
                   <a:srgbClr val="E11D48"/>
                 </a:solidFill>
-                <a:latin typeface="Calibri" pitchFamily="34" charset="0"/>
-                <a:ea typeface="Calibri" pitchFamily="34" charset="-122"/>
-                <a:cs typeface="Calibri" pitchFamily="34" charset="-120"/>
+                <a:latin typeface="Georgia" pitchFamily="34" charset="0"/>
+                <a:ea typeface="Georgia" pitchFamily="34" charset="-122"/>
+                <a:cs typeface="Georgia" pitchFamily="34" charset="-120"/>
               </a:rPr>
               <a:t>Speed</a:t>
             </a:r>
-            <a:endParaRPr lang="en-US" sz="1400" dirty="0"/>
-          </a:p>
-        </p:txBody>
-      </p:sp>
-      <p:sp>
-        <p:nvSpPr>
-          <p:cNvPr id="10" name="Text 7"/>
+            <a:endParaRPr lang="en-US" sz="1300" dirty="0"/>
+          </a:p>
+        </p:txBody>
+      </p:sp>
+      <p:sp>
+        <p:nvSpPr>
+          <p:cNvPr id="13" name="Text 9"/>
           <p:cNvSpPr/>
           <p:nvPr/>
         </p:nvSpPr>
@@ -6981,23 +7299,23 @@
               <a:buNone/>
             </a:pPr>
             <a:r>
-              <a:rPr lang="en-US" sz="1400" dirty="0">
+              <a:rPr lang="en-US" sz="1300" dirty="0">
                 <a:solidFill>
                   <a:srgbClr val="F3F7F9"/>
                 </a:solidFill>
-                <a:latin typeface="Calibri" pitchFamily="34" charset="0"/>
-                <a:ea typeface="Calibri" pitchFamily="34" charset="-122"/>
-                <a:cs typeface="Calibri" pitchFamily="34" charset="-120"/>
+                <a:latin typeface="Georgia" pitchFamily="34" charset="0"/>
+                <a:ea typeface="Georgia" pitchFamily="34" charset="-122"/>
+                <a:cs typeface="Georgia" pitchFamily="34" charset="-120"/>
               </a:rPr>
               <a:t>Baseline in minutes; policies you can edit today</a:t>
             </a:r>
-            <a:endParaRPr lang="en-US" sz="1400" dirty="0"/>
-          </a:p>
-        </p:txBody>
-      </p:sp>
-      <p:sp>
-        <p:nvSpPr>
-          <p:cNvPr id="11" name="Text 8"/>
+            <a:endParaRPr lang="en-US" sz="1300" dirty="0"/>
+          </a:p>
+        </p:txBody>
+      </p:sp>
+      <p:sp>
+        <p:nvSpPr>
+          <p:cNvPr id="14" name="Text 10"/>
           <p:cNvSpPr/>
           <p:nvPr/>
         </p:nvSpPr>
@@ -7020,23 +7338,23 @@
               <a:buNone/>
             </a:pPr>
             <a:r>
-              <a:rPr lang="en-US" sz="1400" b="1" dirty="0">
+              <a:rPr lang="en-US" sz="1300" b="1" dirty="0">
                 <a:solidFill>
                   <a:srgbClr val="E11D48"/>
                 </a:solidFill>
-                <a:latin typeface="Calibri" pitchFamily="34" charset="0"/>
-                <a:ea typeface="Calibri" pitchFamily="34" charset="-122"/>
-                <a:cs typeface="Calibri" pitchFamily="34" charset="-120"/>
+                <a:latin typeface="Georgia" pitchFamily="34" charset="0"/>
+                <a:ea typeface="Georgia" pitchFamily="34" charset="-122"/>
+                <a:cs typeface="Georgia" pitchFamily="34" charset="-120"/>
               </a:rPr>
               <a:t>Honesty</a:t>
             </a:r>
-            <a:endParaRPr lang="en-US" sz="1400" dirty="0"/>
-          </a:p>
-        </p:txBody>
-      </p:sp>
-      <p:sp>
-        <p:nvSpPr>
-          <p:cNvPr id="12" name="Text 9"/>
+            <a:endParaRPr lang="en-US" sz="1300" dirty="0"/>
+          </a:p>
+        </p:txBody>
+      </p:sp>
+      <p:sp>
+        <p:nvSpPr>
+          <p:cNvPr id="15" name="Text 11"/>
           <p:cNvSpPr/>
           <p:nvPr/>
         </p:nvSpPr>
@@ -7059,23 +7377,23 @@
               <a:buNone/>
             </a:pPr>
             <a:r>
-              <a:rPr lang="en-US" sz="1400" dirty="0">
+              <a:rPr lang="en-US" sz="1300" dirty="0">
                 <a:solidFill>
                   <a:srgbClr val="F3F7F9"/>
                 </a:solidFill>
-                <a:latin typeface="Calibri" pitchFamily="34" charset="0"/>
-                <a:ea typeface="Calibri" pitchFamily="34" charset="-122"/>
-                <a:cs typeface="Calibri" pitchFamily="34" charset="-120"/>
+                <a:latin typeface="Georgia" pitchFamily="34" charset="0"/>
+                <a:ea typeface="Georgia" pitchFamily="34" charset="-122"/>
+                <a:cs typeface="Georgia" pitchFamily="34" charset="-120"/>
               </a:rPr>
               <a:t>ISO is baseline — not a substitute for local bars</a:t>
             </a:r>
-            <a:endParaRPr lang="en-US" sz="1400" dirty="0"/>
-          </a:p>
-        </p:txBody>
-      </p:sp>
-      <p:sp>
-        <p:nvSpPr>
-          <p:cNvPr id="13" name="Text 10"/>
+            <a:endParaRPr lang="en-US" sz="1300" dirty="0"/>
+          </a:p>
+        </p:txBody>
+      </p:sp>
+      <p:sp>
+        <p:nvSpPr>
+          <p:cNvPr id="16" name="Text 12"/>
           <p:cNvSpPr/>
           <p:nvPr/>
         </p:nvSpPr>
@@ -7098,23 +7416,23 @@
               <a:buNone/>
             </a:pPr>
             <a:r>
-              <a:rPr lang="en-US" sz="1400" b="1" dirty="0">
+              <a:rPr lang="en-US" sz="1300" b="1" dirty="0">
                 <a:solidFill>
                   <a:srgbClr val="E11D48"/>
                 </a:solidFill>
-                <a:latin typeface="Calibri" pitchFamily="34" charset="0"/>
-                <a:ea typeface="Calibri" pitchFamily="34" charset="-122"/>
-                <a:cs typeface="Calibri" pitchFamily="34" charset="-120"/>
+                <a:latin typeface="Georgia" pitchFamily="34" charset="0"/>
+                <a:ea typeface="Georgia" pitchFamily="34" charset="-122"/>
+                <a:cs typeface="Georgia" pitchFamily="34" charset="-120"/>
               </a:rPr>
               <a:t>Currency</a:t>
             </a:r>
-            <a:endParaRPr lang="en-US" sz="1400" dirty="0"/>
-          </a:p>
-        </p:txBody>
-      </p:sp>
-      <p:sp>
-        <p:nvSpPr>
-          <p:cNvPr id="14" name="Text 11"/>
+            <a:endParaRPr lang="en-US" sz="1300" dirty="0"/>
+          </a:p>
+        </p:txBody>
+      </p:sp>
+      <p:sp>
+        <p:nvSpPr>
+          <p:cNvPr id="17" name="Text 13"/>
           <p:cNvSpPr/>
           <p:nvPr/>
         </p:nvSpPr>
@@ -7137,95 +7455,17 @@
               <a:buNone/>
             </a:pPr>
             <a:r>
-              <a:rPr lang="en-US" sz="1400" dirty="0">
+              <a:rPr lang="en-US" sz="1300" dirty="0">
                 <a:solidFill>
                   <a:srgbClr val="F3F7F9"/>
                 </a:solidFill>
-                <a:latin typeface="Calibri" pitchFamily="34" charset="0"/>
-                <a:ea typeface="Calibri" pitchFamily="34" charset="-122"/>
-                <a:cs typeface="Calibri" pitchFamily="34" charset="-120"/>
+                <a:latin typeface="Georgia" pitchFamily="34" charset="0"/>
+                <a:ea typeface="Georgia" pitchFamily="34" charset="-122"/>
+                <a:cs typeface="Georgia" pitchFamily="34" charset="-120"/>
               </a:rPr>
               <a:t>Weekly regulatory intel on tech, data, AI (human-reviewed into product)</a:t>
             </a:r>
-            <a:endParaRPr lang="en-US" sz="1400" dirty="0"/>
-          </a:p>
-        </p:txBody>
-      </p:sp>
-      <p:sp>
-        <p:nvSpPr>
-          <p:cNvPr id="15" name="Text 12"/>
-          <p:cNvSpPr/>
-          <p:nvPr/>
-        </p:nvSpPr>
-        <p:spPr>
-          <a:xfrm>
-            <a:off x="457200" y="4709160"/>
-            <a:ext cx="4572000" cy="228600"/>
-          </a:xfrm>
-          <a:prstGeom prst="rect">
-            <a:avLst/>
-          </a:prstGeom>
-          <a:noFill/>
-          <a:ln/>
-        </p:spPr>
-        <p:txBody>
-          <a:bodyPr wrap="square" rtlCol="0" anchor="ctr"/>
-          <a:lstStyle/>
-          <a:p>
-            <a:pPr indent="0" marL="0">
-              <a:buNone/>
-            </a:pPr>
-            <a:r>
-              <a:rPr lang="en-US" sz="1000" dirty="0">
-                <a:solidFill>
-                  <a:srgbClr val="A8C0CC"/>
-                </a:solidFill>
-                <a:latin typeface="Calibri" pitchFamily="34" charset="0"/>
-                <a:ea typeface="Calibri" pitchFamily="34" charset="-122"/>
-                <a:cs typeface="Calibri" pitchFamily="34" charset="-120"/>
-              </a:rPr>
-              <a:t>Oblig  ·  Confidential</a:t>
-            </a:r>
-            <a:endParaRPr lang="en-US" sz="1000" dirty="0"/>
-          </a:p>
-        </p:txBody>
-      </p:sp>
-      <p:sp>
-        <p:nvSpPr>
-          <p:cNvPr id="16" name="Text 13"/>
-          <p:cNvSpPr/>
-          <p:nvPr/>
-        </p:nvSpPr>
-        <p:spPr>
-          <a:xfrm>
-            <a:off x="7772400" y="4709160"/>
-            <a:ext cx="914400" cy="228600"/>
-          </a:xfrm>
-          <a:prstGeom prst="rect">
-            <a:avLst/>
-          </a:prstGeom>
-          <a:noFill/>
-          <a:ln/>
-        </p:spPr>
-        <p:txBody>
-          <a:bodyPr wrap="square" rtlCol="0" anchor="ctr"/>
-          <a:lstStyle/>
-          <a:p>
-            <a:pPr algn="r" indent="0" marL="0">
-              <a:buNone/>
-            </a:pPr>
-            <a:r>
-              <a:rPr lang="en-US" sz="1000" dirty="0">
-                <a:solidFill>
-                  <a:srgbClr val="A8C0CC"/>
-                </a:solidFill>
-                <a:latin typeface="Calibri" pitchFamily="34" charset="0"/>
-                <a:ea typeface="Calibri" pitchFamily="34" charset="-122"/>
-                <a:cs typeface="Calibri" pitchFamily="34" charset="-120"/>
-              </a:rPr>
-              <a:t>8 / 11</a:t>
-            </a:r>
-            <a:endParaRPr lang="en-US" sz="1000" dirty="0"/>
+            <a:endParaRPr lang="en-US" sz="1300" dirty="0"/>
           </a:p>
         </p:txBody>
       </p:sp>
@@ -7278,16 +7518,118 @@
           </a:prstGeom>
         </p:spPr>
       </p:pic>
-      <p:sp>
-        <p:nvSpPr>
-          <p:cNvPr id="3" name="Text 0"/>
+      <p:pic>
+        <p:nvPicPr>
+          <p:cNvPr id="3" name="Image 1" descr="/home/workdir/artifacts/oblig/public/oblig-icon.png">    </p:cNvPr>
+          <p:cNvPicPr>
+            <a:picLocks noChangeAspect="1"/>
+          </p:cNvPicPr>
+          <p:nvPr/>
+        </p:nvPicPr>
+        <p:blipFill>
+          <a:blip r:embed="rId2"/>
+          <a:stretch>
+            <a:fillRect/>
+          </a:stretch>
+        </p:blipFill>
+        <p:spPr>
+          <a:xfrm>
+            <a:off x="8275320" y="201168"/>
+            <a:ext cx="438912" cy="475488"/>
+          </a:xfrm>
+          <a:prstGeom prst="rect">
+            <a:avLst/>
+          </a:prstGeom>
+        </p:spPr>
+      </p:pic>
+      <p:sp>
+        <p:nvSpPr>
+          <p:cNvPr id="4" name="Text 0"/>
+          <p:cNvSpPr/>
+          <p:nvPr/>
+        </p:nvSpPr>
+        <p:spPr>
+          <a:xfrm>
+            <a:off x="457200" y="4709160"/>
+            <a:ext cx="4572000" cy="228600"/>
+          </a:xfrm>
+          <a:prstGeom prst="rect">
+            <a:avLst/>
+          </a:prstGeom>
+          <a:noFill/>
+          <a:ln/>
+        </p:spPr>
+        <p:txBody>
+          <a:bodyPr wrap="square" rtlCol="0" anchor="ctr"/>
+          <a:lstStyle/>
+          <a:p>
+            <a:pPr indent="0" marL="0">
+              <a:buNone/>
+            </a:pPr>
+            <a:r>
+              <a:rPr lang="en-US" sz="1000" dirty="0">
+                <a:solidFill>
+                  <a:srgbClr val="A8C0CC"/>
+                </a:solidFill>
+                <a:latin typeface="Georgia" pitchFamily="34" charset="0"/>
+                <a:ea typeface="Georgia" pitchFamily="34" charset="-122"/>
+                <a:cs typeface="Georgia" pitchFamily="34" charset="-120"/>
+              </a:rPr>
+              <a:t>Oblig  ·  Confidential</a:t>
+            </a:r>
+            <a:endParaRPr lang="en-US" sz="1000" dirty="0"/>
+          </a:p>
+        </p:txBody>
+      </p:sp>
+      <p:sp>
+        <p:nvSpPr>
+          <p:cNvPr id="5" name="Text 1"/>
+          <p:cNvSpPr/>
+          <p:nvPr/>
+        </p:nvSpPr>
+        <p:spPr>
+          <a:xfrm>
+            <a:off x="7772400" y="4709160"/>
+            <a:ext cx="914400" cy="228600"/>
+          </a:xfrm>
+          <a:prstGeom prst="rect">
+            <a:avLst/>
+          </a:prstGeom>
+          <a:noFill/>
+          <a:ln/>
+        </p:spPr>
+        <p:txBody>
+          <a:bodyPr wrap="square" rtlCol="0" anchor="ctr"/>
+          <a:lstStyle/>
+          <a:p>
+            <a:pPr algn="r" indent="0" marL="0">
+              <a:buNone/>
+            </a:pPr>
+            <a:r>
+              <a:rPr lang="en-US" sz="1000" dirty="0">
+                <a:solidFill>
+                  <a:srgbClr val="A8C0CC"/>
+                </a:solidFill>
+                <a:latin typeface="Georgia" pitchFamily="34" charset="0"/>
+                <a:ea typeface="Georgia" pitchFamily="34" charset="-122"/>
+                <a:cs typeface="Georgia" pitchFamily="34" charset="-120"/>
+              </a:rPr>
+              <a:t>9 / 11</a:t>
+            </a:r>
+            <a:endParaRPr lang="en-US" sz="1000" dirty="0"/>
+          </a:p>
+        </p:txBody>
+      </p:sp>
+      <p:sp>
+        <p:nvSpPr>
+          <p:cNvPr id="6" name="Text 2"/>
           <p:cNvSpPr/>
           <p:nvPr/>
         </p:nvSpPr>
         <p:spPr>
           <a:xfrm>
             <a:off x="548640" y="320040"/>
-            <a:ext cx="8229600" cy="274320"/>
+            <a:ext cx="7498080" cy="274320"/>
           </a:xfrm>
           <a:prstGeom prst="rect">
             <a:avLst/>
@@ -7307,9 +7649,9 @@
                 <a:solidFill>
                   <a:srgbClr val="E11D48"/>
                 </a:solidFill>
-                <a:latin typeface="Calibri" pitchFamily="34" charset="0"/>
-                <a:ea typeface="Calibri" pitchFamily="34" charset="-122"/>
-                <a:cs typeface="Calibri" pitchFamily="34" charset="-120"/>
+                <a:latin typeface="Georgia" pitchFamily="34" charset="0"/>
+                <a:ea typeface="Georgia" pitchFamily="34" charset="-122"/>
+                <a:cs typeface="Georgia" pitchFamily="34" charset="-120"/>
               </a:rPr>
               <a:t>STAGE</a:t>
             </a:r>
@@ -7319,85 +7661,85 @@
       </p:sp>
       <p:sp>
         <p:nvSpPr>
-          <p:cNvPr id="4" name="Text 1"/>
+          <p:cNvPr id="7" name="Text 3"/>
           <p:cNvSpPr/>
           <p:nvPr/>
         </p:nvSpPr>
         <p:spPr>
           <a:xfrm>
             <a:off x="548640" y="685800"/>
-            <a:ext cx="8229600" cy="457200"/>
-          </a:xfrm>
-          <a:prstGeom prst="rect">
-            <a:avLst/>
-          </a:prstGeom>
-          <a:noFill/>
-          <a:ln/>
-        </p:spPr>
-        <p:txBody>
-          <a:bodyPr wrap="square" rtlCol="0" anchor="ctr"/>
-          <a:lstStyle/>
-          <a:p>
-            <a:pPr indent="0" marL="0">
-              <a:buNone/>
-            </a:pPr>
-            <a:r>
-              <a:rPr lang="en-US" sz="2800" b="1" dirty="0">
+            <a:ext cx="7498080" cy="457200"/>
+          </a:xfrm>
+          <a:prstGeom prst="rect">
+            <a:avLst/>
+          </a:prstGeom>
+          <a:noFill/>
+          <a:ln/>
+        </p:spPr>
+        <p:txBody>
+          <a:bodyPr wrap="square" rtlCol="0" anchor="ctr"/>
+          <a:lstStyle/>
+          <a:p>
+            <a:pPr indent="0" marL="0">
+              <a:buNone/>
+            </a:pPr>
+            <a:r>
+              <a:rPr lang="en-US" sz="2600" b="1" dirty="0">
                 <a:solidFill>
                   <a:srgbClr val="F3F7F9"/>
                 </a:solidFill>
-                <a:latin typeface="Calibri" pitchFamily="34" charset="0"/>
-                <a:ea typeface="Calibri" pitchFamily="34" charset="-122"/>
-                <a:cs typeface="Calibri" pitchFamily="34" charset="-120"/>
+                <a:latin typeface="Georgia" pitchFamily="34" charset="0"/>
+                <a:ea typeface="Georgia" pitchFamily="34" charset="-122"/>
+                <a:cs typeface="Georgia" pitchFamily="34" charset="-120"/>
               </a:rPr>
               <a:t>Focused rollout</a:t>
             </a:r>
-            <a:endParaRPr lang="en-US" sz="2800" dirty="0"/>
-          </a:p>
-        </p:txBody>
-      </p:sp>
-      <p:sp>
-        <p:nvSpPr>
-          <p:cNvPr id="5" name="Text 2"/>
+            <a:endParaRPr lang="en-US" sz="2600" dirty="0"/>
+          </a:p>
+        </p:txBody>
+      </p:sp>
+      <p:sp>
+        <p:nvSpPr>
+          <p:cNvPr id="8" name="Text 4"/>
           <p:cNvSpPr/>
           <p:nvPr/>
         </p:nvSpPr>
         <p:spPr>
           <a:xfrm>
             <a:off x="548640" y="1234440"/>
-            <a:ext cx="8229600" cy="457200"/>
-          </a:xfrm>
-          <a:prstGeom prst="rect">
-            <a:avLst/>
-          </a:prstGeom>
-          <a:noFill/>
-          <a:ln/>
-        </p:spPr>
-        <p:txBody>
-          <a:bodyPr wrap="square" rtlCol="0" anchor="ctr"/>
-          <a:lstStyle/>
-          <a:p>
-            <a:pPr indent="0" marL="0">
-              <a:buNone/>
-            </a:pPr>
-            <a:r>
-              <a:rPr lang="en-US" sz="1500" dirty="0">
+            <a:ext cx="8046720" cy="457200"/>
+          </a:xfrm>
+          <a:prstGeom prst="rect">
+            <a:avLst/>
+          </a:prstGeom>
+          <a:noFill/>
+          <a:ln/>
+        </p:spPr>
+        <p:txBody>
+          <a:bodyPr wrap="square" rtlCol="0" anchor="ctr"/>
+          <a:lstStyle/>
+          <a:p>
+            <a:pPr indent="0" marL="0">
+              <a:buNone/>
+            </a:pPr>
+            <a:r>
+              <a:rPr lang="en-US" sz="1400" dirty="0">
                 <a:solidFill>
                   <a:srgbClr val="B8D4E3"/>
                 </a:solidFill>
-                <a:latin typeface="Calibri" pitchFamily="34" charset="0"/>
-                <a:ea typeface="Calibri" pitchFamily="34" charset="-122"/>
-                <a:cs typeface="Calibri" pitchFamily="34" charset="-120"/>
+                <a:latin typeface="Georgia" pitchFamily="34" charset="0"/>
+                <a:ea typeface="Georgia" pitchFamily="34" charset="-122"/>
+                <a:cs typeface="Georgia" pitchFamily="34" charset="-120"/>
               </a:rPr>
               <a:t>Strong enough for design partners and guided pilots. Self-serve billing and team features are next.</a:t>
             </a:r>
-            <a:endParaRPr lang="en-US" sz="1500" dirty="0"/>
-          </a:p>
-        </p:txBody>
-      </p:sp>
-      <p:sp>
-        <p:nvSpPr>
-          <p:cNvPr id="6" name="Text 3"/>
+            <a:endParaRPr lang="en-US" sz="1400" dirty="0"/>
+          </a:p>
+        </p:txBody>
+      </p:sp>
+      <p:sp>
+        <p:nvSpPr>
+          <p:cNvPr id="9" name="Text 5"/>
           <p:cNvSpPr/>
           <p:nvPr/>
         </p:nvSpPr>
@@ -7420,23 +7762,23 @@
               <a:buNone/>
             </a:pPr>
             <a:r>
-              <a:rPr lang="en-US" sz="1400" b="1" dirty="0">
+              <a:rPr lang="en-US" sz="1300" b="1" dirty="0">
                 <a:solidFill>
                   <a:srgbClr val="E11D48"/>
                 </a:solidFill>
-                <a:latin typeface="Calibri" pitchFamily="34" charset="0"/>
-                <a:ea typeface="Calibri" pitchFamily="34" charset="-122"/>
-                <a:cs typeface="Calibri" pitchFamily="34" charset="-120"/>
+                <a:latin typeface="Georgia" pitchFamily="34" charset="0"/>
+                <a:ea typeface="Georgia" pitchFamily="34" charset="-122"/>
+                <a:cs typeface="Georgia" pitchFamily="34" charset="-120"/>
               </a:rPr>
               <a:t>Now</a:t>
             </a:r>
-            <a:endParaRPr lang="en-US" sz="1400" dirty="0"/>
-          </a:p>
-        </p:txBody>
-      </p:sp>
-      <p:sp>
-        <p:nvSpPr>
-          <p:cNvPr id="7" name="Text 4"/>
+            <a:endParaRPr lang="en-US" sz="1300" dirty="0"/>
+          </a:p>
+        </p:txBody>
+      </p:sp>
+      <p:sp>
+        <p:nvSpPr>
+          <p:cNvPr id="10" name="Text 6"/>
           <p:cNvSpPr/>
           <p:nvPr/>
         </p:nvSpPr>
@@ -7459,23 +7801,23 @@
               <a:buNone/>
             </a:pPr>
             <a:r>
-              <a:rPr lang="en-US" sz="1400" b="1" dirty="0">
+              <a:rPr lang="en-US" sz="1300" b="1" dirty="0">
                 <a:solidFill>
                   <a:srgbClr val="E11D48"/>
                 </a:solidFill>
-                <a:latin typeface="Calibri" pitchFamily="34" charset="0"/>
-                <a:ea typeface="Calibri" pitchFamily="34" charset="-122"/>
-                <a:cs typeface="Calibri" pitchFamily="34" charset="-120"/>
+                <a:latin typeface="Georgia" pitchFamily="34" charset="0"/>
+                <a:ea typeface="Georgia" pitchFamily="34" charset="-122"/>
+                <a:cs typeface="Georgia" pitchFamily="34" charset="-120"/>
               </a:rPr>
               <a:t>Next</a:t>
             </a:r>
-            <a:endParaRPr lang="en-US" sz="1400" dirty="0"/>
-          </a:p>
-        </p:txBody>
-      </p:sp>
-      <p:sp>
-        <p:nvSpPr>
-          <p:cNvPr id="8" name="Text 5"/>
+            <a:endParaRPr lang="en-US" sz="1300" dirty="0"/>
+          </a:p>
+        </p:txBody>
+      </p:sp>
+      <p:sp>
+        <p:nvSpPr>
+          <p:cNvPr id="11" name="Text 7"/>
           <p:cNvSpPr/>
           <p:nvPr/>
         </p:nvSpPr>
@@ -7498,23 +7840,23 @@
               <a:buNone/>
             </a:pPr>
             <a:r>
-              <a:rPr lang="en-US" sz="1300" dirty="0">
+              <a:rPr lang="en-US" sz="1200" dirty="0">
                 <a:solidFill>
                   <a:srgbClr val="F3F7F9"/>
                 </a:solidFill>
-                <a:latin typeface="Calibri" pitchFamily="34" charset="0"/>
-                <a:ea typeface="Calibri" pitchFamily="34" charset="-122"/>
-                <a:cs typeface="Calibri" pitchFamily="34" charset="-120"/>
+                <a:latin typeface="Georgia" pitchFamily="34" charset="0"/>
+                <a:ea typeface="Georgia" pitchFamily="34" charset="-122"/>
+                <a:cs typeface="Georgia" pitchFamily="34" charset="-120"/>
               </a:rPr>
               <a:t>▸  Assessment, dashboard, policies, Copilot</a:t>
             </a:r>
-            <a:endParaRPr lang="en-US" sz="1300" dirty="0"/>
-          </a:p>
-        </p:txBody>
-      </p:sp>
-      <p:sp>
-        <p:nvSpPr>
-          <p:cNvPr id="9" name="Text 6"/>
+            <a:endParaRPr lang="en-US" sz="1200" dirty="0"/>
+          </a:p>
+        </p:txBody>
+      </p:sp>
+      <p:sp>
+        <p:nvSpPr>
+          <p:cNvPr id="12" name="Text 8"/>
           <p:cNvSpPr/>
           <p:nvPr/>
         </p:nvSpPr>
@@ -7537,23 +7879,23 @@
               <a:buNone/>
             </a:pPr>
             <a:r>
-              <a:rPr lang="en-US" sz="1300" dirty="0">
+              <a:rPr lang="en-US" sz="1200" dirty="0">
                 <a:solidFill>
                   <a:srgbClr val="F3F7F9"/>
                 </a:solidFill>
-                <a:latin typeface="Calibri" pitchFamily="34" charset="0"/>
-                <a:ea typeface="Calibri" pitchFamily="34" charset="-122"/>
-                <a:cs typeface="Calibri" pitchFamily="34" charset="-120"/>
+                <a:latin typeface="Georgia" pitchFamily="34" charset="0"/>
+                <a:ea typeface="Georgia" pitchFamily="34" charset="-122"/>
+                <a:cs typeface="Georgia" pitchFamily="34" charset="-120"/>
               </a:rPr>
               <a:t>▸  Docs, Terms, Privacy, contact</a:t>
             </a:r>
-            <a:endParaRPr lang="en-US" sz="1300" dirty="0"/>
-          </a:p>
-        </p:txBody>
-      </p:sp>
-      <p:sp>
-        <p:nvSpPr>
-          <p:cNvPr id="10" name="Text 7"/>
+            <a:endParaRPr lang="en-US" sz="1200" dirty="0"/>
+          </a:p>
+        </p:txBody>
+      </p:sp>
+      <p:sp>
+        <p:nvSpPr>
+          <p:cNvPr id="13" name="Text 9"/>
           <p:cNvSpPr/>
           <p:nvPr/>
         </p:nvSpPr>
@@ -7576,23 +7918,23 @@
               <a:buNone/>
             </a:pPr>
             <a:r>
-              <a:rPr lang="en-US" sz="1300" dirty="0">
+              <a:rPr lang="en-US" sz="1200" dirty="0">
                 <a:solidFill>
                   <a:srgbClr val="F3F7F9"/>
                 </a:solidFill>
-                <a:latin typeface="Calibri" pitchFamily="34" charset="0"/>
-                <a:ea typeface="Calibri" pitchFamily="34" charset="-122"/>
-                <a:cs typeface="Calibri" pitchFamily="34" charset="-120"/>
+                <a:latin typeface="Georgia" pitchFamily="34" charset="0"/>
+                <a:ea typeface="Georgia" pitchFamily="34" charset="-122"/>
+                <a:cs typeface="Georgia" pitchFamily="34" charset="-120"/>
               </a:rPr>
               <a:t>▸  Password reset &amp; account controls</a:t>
             </a:r>
-            <a:endParaRPr lang="en-US" sz="1300" dirty="0"/>
-          </a:p>
-        </p:txBody>
-      </p:sp>
-      <p:sp>
-        <p:nvSpPr>
-          <p:cNvPr id="11" name="Text 8"/>
+            <a:endParaRPr lang="en-US" sz="1200" dirty="0"/>
+          </a:p>
+        </p:txBody>
+      </p:sp>
+      <p:sp>
+        <p:nvSpPr>
+          <p:cNvPr id="14" name="Text 10"/>
           <p:cNvSpPr/>
           <p:nvPr/>
         </p:nvSpPr>
@@ -7615,23 +7957,23 @@
               <a:buNone/>
             </a:pPr>
             <a:r>
-              <a:rPr lang="en-US" sz="1300" dirty="0">
+              <a:rPr lang="en-US" sz="1200" dirty="0">
                 <a:solidFill>
                   <a:srgbClr val="F3F7F9"/>
                 </a:solidFill>
-                <a:latin typeface="Calibri" pitchFamily="34" charset="0"/>
-                <a:ea typeface="Calibri" pitchFamily="34" charset="-122"/>
-                <a:cs typeface="Calibri" pitchFamily="34" charset="-120"/>
+                <a:latin typeface="Georgia" pitchFamily="34" charset="0"/>
+                <a:ea typeface="Georgia" pitchFamily="34" charset="-122"/>
+                <a:cs typeface="Georgia" pitchFamily="34" charset="-120"/>
               </a:rPr>
               <a:t>▸  Weekly APAC tech/data/AI intel automation</a:t>
             </a:r>
-            <a:endParaRPr lang="en-US" sz="1300" dirty="0"/>
-          </a:p>
-        </p:txBody>
-      </p:sp>
-      <p:sp>
-        <p:nvSpPr>
-          <p:cNvPr id="12" name="Text 9"/>
+            <a:endParaRPr lang="en-US" sz="1200" dirty="0"/>
+          </a:p>
+        </p:txBody>
+      </p:sp>
+      <p:sp>
+        <p:nvSpPr>
+          <p:cNvPr id="15" name="Text 11"/>
           <p:cNvSpPr/>
           <p:nvPr/>
         </p:nvSpPr>
@@ -7654,23 +7996,23 @@
               <a:buNone/>
             </a:pPr>
             <a:r>
-              <a:rPr lang="en-US" sz="1300" dirty="0">
+              <a:rPr lang="en-US" sz="1200" dirty="0">
                 <a:solidFill>
                   <a:srgbClr val="F3F7F9"/>
                 </a:solidFill>
-                <a:latin typeface="Calibri" pitchFamily="34" charset="0"/>
-                <a:ea typeface="Calibri" pitchFamily="34" charset="-122"/>
-                <a:cs typeface="Calibri" pitchFamily="34" charset="-120"/>
+                <a:latin typeface="Georgia" pitchFamily="34" charset="0"/>
+                <a:ea typeface="Georgia" pitchFamily="34" charset="-122"/>
+                <a:cs typeface="Georgia" pitchFamily="34" charset="-120"/>
               </a:rPr>
               <a:t>▸  In-app billing &amp; plan enforcement</a:t>
             </a:r>
-            <a:endParaRPr lang="en-US" sz="1300" dirty="0"/>
-          </a:p>
-        </p:txBody>
-      </p:sp>
-      <p:sp>
-        <p:nvSpPr>
-          <p:cNvPr id="13" name="Text 10"/>
+            <a:endParaRPr lang="en-US" sz="1200" dirty="0"/>
+          </a:p>
+        </p:txBody>
+      </p:sp>
+      <p:sp>
+        <p:nvSpPr>
+          <p:cNvPr id="16" name="Text 12"/>
           <p:cNvSpPr/>
           <p:nvPr/>
         </p:nvSpPr>
@@ -7693,23 +8035,23 @@
               <a:buNone/>
             </a:pPr>
             <a:r>
-              <a:rPr lang="en-US" sz="1300" dirty="0">
+              <a:rPr lang="en-US" sz="1200" dirty="0">
                 <a:solidFill>
                   <a:srgbClr val="F3F7F9"/>
                 </a:solidFill>
-                <a:latin typeface="Calibri" pitchFamily="34" charset="0"/>
-                <a:ea typeface="Calibri" pitchFamily="34" charset="-122"/>
-                <a:cs typeface="Calibri" pitchFamily="34" charset="-120"/>
+                <a:latin typeface="Georgia" pitchFamily="34" charset="0"/>
+                <a:ea typeface="Georgia" pitchFamily="34" charset="-122"/>
+                <a:cs typeface="Georgia" pitchFamily="34" charset="-120"/>
               </a:rPr>
               <a:t>▸  Deeper VN / TH control maps</a:t>
             </a:r>
-            <a:endParaRPr lang="en-US" sz="1300" dirty="0"/>
-          </a:p>
-        </p:txBody>
-      </p:sp>
-      <p:sp>
-        <p:nvSpPr>
-          <p:cNvPr id="14" name="Text 11"/>
+            <a:endParaRPr lang="en-US" sz="1200" dirty="0"/>
+          </a:p>
+        </p:txBody>
+      </p:sp>
+      <p:sp>
+        <p:nvSpPr>
+          <p:cNvPr id="17" name="Text 13"/>
           <p:cNvSpPr/>
           <p:nvPr/>
         </p:nvSpPr>
@@ -7732,23 +8074,23 @@
               <a:buNone/>
             </a:pPr>
             <a:r>
-              <a:rPr lang="en-US" sz="1300" dirty="0">
+              <a:rPr lang="en-US" sz="1200" dirty="0">
                 <a:solidFill>
                   <a:srgbClr val="F3F7F9"/>
                 </a:solidFill>
-                <a:latin typeface="Calibri" pitchFamily="34" charset="0"/>
-                <a:ea typeface="Calibri" pitchFamily="34" charset="-122"/>
-                <a:cs typeface="Calibri" pitchFamily="34" charset="-120"/>
+                <a:latin typeface="Georgia" pitchFamily="34" charset="0"/>
+                <a:ea typeface="Georgia" pitchFamily="34" charset="-122"/>
+                <a:cs typeface="Georgia" pitchFamily="34" charset="-120"/>
               </a:rPr>
               <a:t>▸  Team roles &amp; collaboration</a:t>
             </a:r>
-            <a:endParaRPr lang="en-US" sz="1300" dirty="0"/>
-          </a:p>
-        </p:txBody>
-      </p:sp>
-      <p:sp>
-        <p:nvSpPr>
-          <p:cNvPr id="15" name="Text 12"/>
+            <a:endParaRPr lang="en-US" sz="1200" dirty="0"/>
+          </a:p>
+        </p:txBody>
+      </p:sp>
+      <p:sp>
+        <p:nvSpPr>
+          <p:cNvPr id="18" name="Text 14"/>
           <p:cNvSpPr/>
           <p:nvPr/>
         </p:nvSpPr>
@@ -7771,95 +8113,17 @@
               <a:buNone/>
             </a:pPr>
             <a:r>
-              <a:rPr lang="en-US" sz="1300" dirty="0">
+              <a:rPr lang="en-US" sz="1200" dirty="0">
                 <a:solidFill>
                   <a:srgbClr val="F3F7F9"/>
                 </a:solidFill>
-                <a:latin typeface="Calibri" pitchFamily="34" charset="0"/>
-                <a:ea typeface="Calibri" pitchFamily="34" charset="-122"/>
-                <a:cs typeface="Calibri" pitchFamily="34" charset="-120"/>
+                <a:latin typeface="Georgia" pitchFamily="34" charset="0"/>
+                <a:ea typeface="Georgia" pitchFamily="34" charset="-122"/>
+                <a:cs typeface="Georgia" pitchFamily="34" charset="-120"/>
               </a:rPr>
               <a:t>▸  Stronger evidence &amp; support SLAs</a:t>
             </a:r>
-            <a:endParaRPr lang="en-US" sz="1300" dirty="0"/>
-          </a:p>
-        </p:txBody>
-      </p:sp>
-      <p:sp>
-        <p:nvSpPr>
-          <p:cNvPr id="16" name="Text 13"/>
-          <p:cNvSpPr/>
-          <p:nvPr/>
-        </p:nvSpPr>
-        <p:spPr>
-          <a:xfrm>
-            <a:off x="457200" y="4709160"/>
-            <a:ext cx="4572000" cy="228600"/>
-          </a:xfrm>
-          <a:prstGeom prst="rect">
-            <a:avLst/>
-          </a:prstGeom>
-          <a:noFill/>
-          <a:ln/>
-        </p:spPr>
-        <p:txBody>
-          <a:bodyPr wrap="square" rtlCol="0" anchor="ctr"/>
-          <a:lstStyle/>
-          <a:p>
-            <a:pPr indent="0" marL="0">
-              <a:buNone/>
-            </a:pPr>
-            <a:r>
-              <a:rPr lang="en-US" sz="1000" dirty="0">
-                <a:solidFill>
-                  <a:srgbClr val="A8C0CC"/>
-                </a:solidFill>
-                <a:latin typeface="Calibri" pitchFamily="34" charset="0"/>
-                <a:ea typeface="Calibri" pitchFamily="34" charset="-122"/>
-                <a:cs typeface="Calibri" pitchFamily="34" charset="-120"/>
-              </a:rPr>
-              <a:t>Oblig  ·  Confidential</a:t>
-            </a:r>
-            <a:endParaRPr lang="en-US" sz="1000" dirty="0"/>
-          </a:p>
-        </p:txBody>
-      </p:sp>
-      <p:sp>
-        <p:nvSpPr>
-          <p:cNvPr id="17" name="Text 14"/>
-          <p:cNvSpPr/>
-          <p:nvPr/>
-        </p:nvSpPr>
-        <p:spPr>
-          <a:xfrm>
-            <a:off x="7772400" y="4709160"/>
-            <a:ext cx="914400" cy="228600"/>
-          </a:xfrm>
-          <a:prstGeom prst="rect">
-            <a:avLst/>
-          </a:prstGeom>
-          <a:noFill/>
-          <a:ln/>
-        </p:spPr>
-        <p:txBody>
-          <a:bodyPr wrap="square" rtlCol="0" anchor="ctr"/>
-          <a:lstStyle/>
-          <a:p>
-            <a:pPr algn="r" indent="0" marL="0">
-              <a:buNone/>
-            </a:pPr>
-            <a:r>
-              <a:rPr lang="en-US" sz="1000" dirty="0">
-                <a:solidFill>
-                  <a:srgbClr val="A8C0CC"/>
-                </a:solidFill>
-                <a:latin typeface="Calibri" pitchFamily="34" charset="0"/>
-                <a:ea typeface="Calibri" pitchFamily="34" charset="-122"/>
-                <a:cs typeface="Calibri" pitchFamily="34" charset="-120"/>
-              </a:rPr>
-              <a:t>9 / 11</a:t>
-            </a:r>
-            <a:endParaRPr lang="en-US" sz="1000" dirty="0"/>
+            <a:endParaRPr lang="en-US" sz="1200" dirty="0"/>
           </a:p>
         </p:txBody>
       </p:sp>
